--- a/ppt/final/SIH26120_Idea_Presentation_STRICT.pptx
+++ b/ppt/final/SIH26120_Idea_Presentation_STRICT.pptx
@@ -5,7 +5,7 @@
     <p:sldMasterId id="2147483648" r:id="rId1"/>
   </p:sldMasterIdLst>
   <p:notesMasterIdLst>
-    <p:notesMasterId r:id="rId9"/>
+    <p:notesMasterId r:id="rId8"/>
   </p:notesMasterIdLst>
   <p:sldIdLst>
     <p:sldId id="291" r:id="rId2"/>
@@ -261,7 +261,7 @@
             <a:fld id="{C4D5ADD5-2BBC-4A94-8F86-D9013941F742}" type="datetimeFigureOut">
               <a:rPr lang="en-US"/>
               <a:pPr/>
-              <a:t>6/2/2026</a:t>
+              <a:t>9/29/2026</a:t>
             </a:fld>
             <a:endParaRPr lang="en-US"/>
           </a:p>
@@ -1534,7 +1534,7 @@
           <a:p>
             <a:fld id="{E60792E3-D524-454C-8AFD-A91972900BCB}" type="datetime1">
               <a:rPr lang="en-US" smtClean="0"/>
-              <a:t>6/2/2026</a:t>
+              <a:t>9/29/2026</a:t>
             </a:fld>
             <a:endParaRPr lang="en-US"/>
           </a:p>
@@ -1716,7 +1716,7 @@
           <a:p>
             <a:fld id="{053C3A68-6922-42D3-8905-ECC2D82A3469}" type="datetime1">
               <a:rPr lang="en-US" smtClean="0"/>
-              <a:t>6/2/2026</a:t>
+              <a:t>9/29/2026</a:t>
             </a:fld>
             <a:endParaRPr lang="en-US"/>
           </a:p>
@@ -1908,7 +1908,7 @@
           <a:p>
             <a:fld id="{CB69E9F4-7604-4950-A8B2-8ACDEDB1506E}" type="datetime1">
               <a:rPr lang="en-US" smtClean="0"/>
-              <a:t>6/2/2026</a:t>
+              <a:t>9/29/2026</a:t>
             </a:fld>
             <a:endParaRPr lang="en-US"/>
           </a:p>
@@ -2090,7 +2090,7 @@
           <a:p>
             <a:fld id="{708B7524-32A2-4C20-A58C-BC3BAA1042FC}" type="datetime1">
               <a:rPr lang="en-US" smtClean="0"/>
-              <a:t>6/2/2026</a:t>
+              <a:t>9/29/2026</a:t>
             </a:fld>
             <a:endParaRPr lang="en-US"/>
           </a:p>
@@ -2349,7 +2349,7 @@
           <a:p>
             <a:fld id="{1E994447-D6B2-43BB-A877-57F1A267B999}" type="datetime1">
               <a:rPr lang="en-US" smtClean="0"/>
-              <a:t>6/2/2026</a:t>
+              <a:t>9/29/2026</a:t>
             </a:fld>
             <a:endParaRPr lang="en-US"/>
           </a:p>
@@ -2648,7 +2648,7 @@
           <a:p>
             <a:fld id="{68920E16-BD35-483C-AA6B-346FC7E46DEA}" type="datetime1">
               <a:rPr lang="en-US" smtClean="0"/>
-              <a:t>6/2/2026</a:t>
+              <a:t>9/29/2026</a:t>
             </a:fld>
             <a:endParaRPr lang="en-US"/>
           </a:p>
@@ -3081,7 +3081,7 @@
           <a:p>
             <a:fld id="{2FEAC6F8-5103-4FC0-A69E-5C6AE6469DA8}" type="datetime1">
               <a:rPr lang="en-US" smtClean="0"/>
-              <a:t>6/2/2026</a:t>
+              <a:t>9/29/2026</a:t>
             </a:fld>
             <a:endParaRPr lang="en-US"/>
           </a:p>
@@ -3212,7 +3212,7 @@
           <a:p>
             <a:fld id="{C60C6921-0627-4C8F-83D5-0CF936D2FFDD}" type="datetime1">
               <a:rPr lang="en-US" smtClean="0"/>
-              <a:t>6/2/2026</a:t>
+              <a:t>9/29/2026</a:t>
             </a:fld>
             <a:endParaRPr lang="en-US"/>
           </a:p>
@@ -3321,7 +3321,7 @@
           <a:p>
             <a:fld id="{2FF08AD7-8103-40F8-983C-E2BA6BB9CBE0}" type="datetime1">
               <a:rPr lang="en-US" smtClean="0"/>
-              <a:t>6/2/2026</a:t>
+              <a:t>9/29/2026</a:t>
             </a:fld>
             <a:endParaRPr lang="en-US"/>
           </a:p>
@@ -3610,7 +3610,7 @@
           <a:p>
             <a:fld id="{DF8C06B4-9380-4A4D-AF49-A3596E17DAF5}" type="datetime1">
               <a:rPr lang="en-US" smtClean="0"/>
-              <a:t>6/2/2026</a:t>
+              <a:t>9/29/2026</a:t>
             </a:fld>
             <a:endParaRPr lang="en-US"/>
           </a:p>
@@ -3879,7 +3879,7 @@
           <a:p>
             <a:fld id="{EF7FDEF1-C582-4E22-9E77-D68326471F28}" type="datetime1">
               <a:rPr lang="en-US" smtClean="0"/>
-              <a:t>6/2/2026</a:t>
+              <a:t>9/29/2026</a:t>
             </a:fld>
             <a:endParaRPr lang="en-US"/>
           </a:p>
@@ -4122,7 +4122,7 @@
           <a:p>
             <a:fld id="{780A9602-A9A9-453F-AEF1-37B5837E02CD}" type="datetime1">
               <a:rPr lang="en-US" smtClean="0"/>
-              <a:t>6/2/2026</a:t>
+              <a:t>9/29/2026</a:t>
             </a:fld>
             <a:endParaRPr lang="en-US"/>
           </a:p>
@@ -4673,7 +4673,7 @@
                 <a16:creationId xmlns:a16="http://schemas.microsoft.com/office/drawing/2014/main" id="{3E443FD7-A66B-4AA0-872D-B088B9BC5F17}"/>
               </a:ext>
               <a:ext uri="{C183D7F6-B498-43B3-948B-1728B52AA6E4}">
-                <adec:decorative xmlns:adec="http://schemas.microsoft.com/office/drawing/2017/decorative" xmlns="" val="1"/>
+                <adec:decorative xmlns:adec="http://schemas.microsoft.com/office/drawing/2017/decorative" val="1"/>
               </a:ext>
             </a:extLst>
           </p:cNvPr>
@@ -4733,7 +4733,7 @@
                 <a16:creationId xmlns:a16="http://schemas.microsoft.com/office/drawing/2014/main" id="{C04BE0EF-3561-49B4-9A29-F283168A91C7}"/>
               </a:ext>
               <a:ext uri="{C183D7F6-B498-43B3-948B-1728B52AA6E4}">
-                <adec:decorative xmlns:adec="http://schemas.microsoft.com/office/drawing/2017/decorative" xmlns="" val="1"/>
+                <adec:decorative xmlns:adec="http://schemas.microsoft.com/office/drawing/2017/decorative" val="1"/>
               </a:ext>
             </a:extLst>
           </p:cNvPr>
@@ -5604,16 +5604,7 @@
                 </a:solidFill>
                 <a:latin typeface="Garamond" panose="02020404030301010803" pitchFamily="18" charset="0"/>
               </a:rPr>
-              <a:t>SMART INDIA HACKATHON </a:t>
-            </a:r>
-            <a:r>
-              <a:rPr lang="en-US" sz="4000" b="1" dirty="0" smtClean="0">
-                <a:solidFill>
-                  <a:schemeClr val="tx2"/>
-                </a:solidFill>
-                <a:latin typeface="Garamond" panose="02020404030301010803" pitchFamily="18" charset="0"/>
-              </a:rPr>
-              <a:t>2026</a:t>
+              <a:t>SMART INDIA HACKATHON 2026</a:t>
             </a:r>
             <a:endParaRPr lang="en-IN" sz="4000" b="1" dirty="0">
               <a:solidFill>
@@ -5750,43 +5741,23 @@
                 <a:cs typeface="Arial" pitchFamily="34" charset="0"/>
                 <a:sym typeface="Arial" pitchFamily="34" charset="0"/>
               </a:rPr>
-              <a:t>Team Name (Registered on portal)- TEAM ________</a:t>
-            </a:r>
-          </a:p>
-          <a:p>
-            <a:pPr marL="201168" indent="-201168">
-              <a:spcAft>
-                <a:spcPts val="1400"/>
-              </a:spcAft>
-              <a:buFont typeface="Arial" panose="020B0604020202020204" pitchFamily="34" charset="0"/>
-              <a:buChar char="•"/>
-            </a:pPr>
-            <a:r>
-              <a:rPr lang="en-IN" sz="1600" b="1" dirty="0">
+              <a:t>Team Name (Registered on portal)-  </a:t>
+            </a:r>
+            <a:r>
+              <a:rPr lang="en-IN" sz="1600" b="1" dirty="0" err="1">
                 <a:latin typeface="Arial" pitchFamily="34" charset="0"/>
                 <a:ea typeface="Arial" pitchFamily="34" charset="0"/>
                 <a:cs typeface="Arial" pitchFamily="34" charset="0"/>
                 <a:sym typeface="Arial" pitchFamily="34" charset="0"/>
               </a:rPr>
-              <a:t>Organisation- Oil India Limited  |  Baghewala field, Rajasthan</a:t>
-            </a:r>
-          </a:p>
-          <a:p>
-            <a:pPr marL="0" indent="0">
-              <a:buNone/>
-            </a:pPr>
-            <a:r>
-              <a:rPr lang="en-IN" sz="1500" b="1" i="1" dirty="0">
-                <a:solidFill>
-                  <a:srgbClr val="1F497D"/>
-                </a:solidFill>
-                <a:latin typeface="Arial" pitchFamily="34" charset="0"/>
-                <a:ea typeface="Arial" pitchFamily="34" charset="0"/>
-                <a:cs typeface="Arial" pitchFamily="34" charset="0"/>
-                <a:sym typeface="Arial" pitchFamily="34" charset="0"/>
-              </a:rPr>
-              <a:t>“Physics + AI for India’s first cyclic-steam oilfield”</a:t>
-            </a:r>
+              <a:t>AlphaQ</a:t>
+            </a:r>
+            <a:endParaRPr lang="en-IN" sz="1600" b="1" dirty="0">
+              <a:latin typeface="Arial" pitchFamily="34" charset="0"/>
+              <a:ea typeface="Arial" pitchFamily="34" charset="0"/>
+              <a:cs typeface="Arial" pitchFamily="34" charset="0"/>
+              <a:sym typeface="Arial" pitchFamily="34" charset="0"/>
+            </a:endParaRPr>
           </a:p>
         </p:txBody>
       </p:sp>
@@ -5939,6 +5910,11 @@
                 <a:cs typeface="Times New Roman" panose="02020603050405020304" pitchFamily="18" charset="0"/>
               </a:rPr>
             </a:br>
+            <a:endParaRPr lang="en-US" sz="3600" b="1" dirty="0">
+              <a:latin typeface="Times New Roman" panose="02020603050405020304" pitchFamily="18" charset="0"/>
+              <a:ea typeface="ＭＳ Ｐゴシック" pitchFamily="1" charset="-128"/>
+              <a:cs typeface="Times New Roman" panose="02020603050405020304" pitchFamily="18" charset="0"/>
+            </a:endParaRPr>
           </a:p>
         </p:txBody>
       </p:sp>
@@ -6086,7 +6062,7 @@
                 <a16:creationId xmlns:a16="http://schemas.microsoft.com/office/drawing/2014/main" id="{5DBCE864-823D-4A13-9607-5DA1F0ED5FB8}"/>
               </a:ext>
               <a:ext uri="{C183D7F6-B498-43B3-948B-1728B52AA6E4}">
-                <adec:decorative xmlns:adec="http://schemas.microsoft.com/office/drawing/2017/decorative" xmlns="" val="0"/>
+                <adec:decorative xmlns:adec="http://schemas.microsoft.com/office/drawing/2017/decorative" val="0"/>
               </a:ext>
             </a:extLst>
           </p:cNvPr>
@@ -6122,8 +6098,8 @@
           <a:p>
             <a:pPr algn="ctr"/>
             <a:r>
-              <a:rPr lang="en-US" dirty="0"/>
-              <a:t>Your Team Name</a:t>
+              <a:rPr lang="en-US" dirty="0" err="1"/>
+              <a:t>AlphaQ</a:t>
             </a:r>
             <a:endParaRPr lang="en-IN" dirty="0"/>
           </a:p>
@@ -6186,11 +6162,13 @@
           </a:ln>
         </p:spPr>
         <p:txBody>
-          <a:bodyPr rtlCol="0" anchor="t" wrap="square" lIns="45720" tIns="18288" rIns="36576" bIns="9144">
+          <a:bodyPr wrap="square" lIns="45720" tIns="18288" rIns="36576" bIns="9144" rtlCol="0" anchor="t">
             <a:noAutofit/>
           </a:bodyPr>
           <a:lstStyle/>
-          <a:p/>
+          <a:p>
+            <a:endParaRPr/>
+          </a:p>
         </p:txBody>
       </p:sp>
       <p:sp>
@@ -6218,7 +6196,7 @@
           </a:ln>
         </p:spPr>
         <p:txBody>
-          <a:bodyPr rtlCol="0" anchor="ctr" wrap="square" lIns="73152" tIns="0" rIns="73152" bIns="0">
+          <a:bodyPr wrap="square" lIns="73152" tIns="0" rIns="73152" bIns="0" rtlCol="0" anchor="ctr">
             <a:noAutofit/>
           </a:bodyPr>
           <a:lstStyle/>
@@ -6236,7 +6214,7 @@
               <a:buNone/>
             </a:pPr>
             <a:r>
-              <a:rPr lang="en-IN" sz="1300" dirty="0" b="1">
+              <a:rPr lang="en-IN" sz="1300" b="1" dirty="0">
                 <a:solidFill>
                   <a:srgbClr val="FFFFFF"/>
                 </a:solidFill>
@@ -6278,11 +6256,13 @@
           </a:ln>
         </p:spPr>
         <p:txBody>
-          <a:bodyPr rtlCol="0" anchor="t" wrap="square" lIns="45720" tIns="18288" rIns="36576" bIns="9144">
+          <a:bodyPr wrap="square" lIns="45720" tIns="18288" rIns="36576" bIns="9144" rtlCol="0" anchor="t">
             <a:noAutofit/>
           </a:bodyPr>
           <a:lstStyle/>
-          <a:p/>
+          <a:p>
+            <a:endParaRPr/>
+          </a:p>
         </p:txBody>
       </p:sp>
       <p:sp>
@@ -6310,7 +6290,7 @@
           </a:ln>
         </p:spPr>
         <p:txBody>
-          <a:bodyPr rtlCol="0" anchor="ctr" wrap="square" lIns="73152" tIns="0" rIns="73152" bIns="0">
+          <a:bodyPr wrap="square" lIns="73152" tIns="0" rIns="73152" bIns="0" rtlCol="0" anchor="ctr">
             <a:noAutofit/>
           </a:bodyPr>
           <a:lstStyle/>
@@ -6328,7 +6308,7 @@
               <a:buNone/>
             </a:pPr>
             <a:r>
-              <a:rPr lang="en-IN" sz="1300" dirty="0" b="1">
+              <a:rPr lang="en-IN" sz="1300" b="1" dirty="0">
                 <a:solidFill>
                   <a:srgbClr val="FFFFFF"/>
                 </a:solidFill>
@@ -6370,11 +6350,13 @@
           </a:ln>
         </p:spPr>
         <p:txBody>
-          <a:bodyPr rtlCol="0" anchor="t" wrap="square" lIns="45720" tIns="18288" rIns="36576" bIns="9144">
+          <a:bodyPr wrap="square" lIns="45720" tIns="18288" rIns="36576" bIns="9144" rtlCol="0" anchor="t">
             <a:noAutofit/>
           </a:bodyPr>
           <a:lstStyle/>
-          <a:p/>
+          <a:p>
+            <a:endParaRPr/>
+          </a:p>
         </p:txBody>
       </p:sp>
       <p:sp>
@@ -6402,7 +6384,7 @@
           </a:ln>
         </p:spPr>
         <p:txBody>
-          <a:bodyPr rtlCol="0" anchor="ctr" wrap="square" lIns="73152" tIns="0" rIns="73152" bIns="0">
+          <a:bodyPr wrap="square" lIns="73152" tIns="0" rIns="73152" bIns="0" rtlCol="0" anchor="ctr">
             <a:noAutofit/>
           </a:bodyPr>
           <a:lstStyle/>
@@ -6420,7 +6402,7 @@
               <a:buNone/>
             </a:pPr>
             <a:r>
-              <a:rPr lang="en-IN" sz="1300" dirty="0" b="1">
+              <a:rPr lang="en-IN" sz="1300" b="1" dirty="0">
                 <a:solidFill>
                   <a:srgbClr val="FFFFFF"/>
                 </a:solidFill>
@@ -6462,11 +6444,13 @@
           </a:ln>
         </p:spPr>
         <p:txBody>
-          <a:bodyPr rtlCol="0" anchor="t" wrap="square" lIns="45720" tIns="18288" rIns="36576" bIns="9144">
+          <a:bodyPr wrap="square" lIns="45720" tIns="18288" rIns="36576" bIns="9144" rtlCol="0" anchor="t">
             <a:noAutofit/>
           </a:bodyPr>
           <a:lstStyle/>
-          <a:p/>
+          <a:p>
+            <a:endParaRPr/>
+          </a:p>
         </p:txBody>
       </p:sp>
       <p:sp>
@@ -6494,7 +6478,7 @@
           </a:ln>
         </p:spPr>
         <p:txBody>
-          <a:bodyPr rtlCol="0" anchor="ctr" wrap="square" lIns="109728" tIns="0" rIns="54864" bIns="0">
+          <a:bodyPr wrap="square" lIns="109728" tIns="0" rIns="54864" bIns="0" rtlCol="0" anchor="ctr">
             <a:noAutofit/>
           </a:bodyPr>
           <a:lstStyle/>
@@ -6512,7 +6496,7 @@
               <a:buNone/>
             </a:pPr>
             <a:r>
-              <a:rPr lang="en-IN" sz="1200" dirty="0" b="1">
+              <a:rPr lang="en-IN" sz="1200" b="1" dirty="0">
                 <a:solidFill>
                   <a:srgbClr val="FFFFFF"/>
                 </a:solidFill>
@@ -6521,7 +6505,7 @@
                 <a:cs typeface="Arial"/>
                 <a:sym typeface="Arial"/>
               </a:rPr>
-              <a:t>Links (fill in before submission)</a:t>
+              <a:t>Links (demo video to be added)</a:t>
             </a:r>
             <a:endParaRPr lang="en-IN" sz="1200" dirty="0"/>
           </a:p>
@@ -6556,6 +6540,7 @@
           <a:lstStyle/>
           <a:p>
             <a:pPr algn="ctr"/>
+            <a:endParaRPr/>
           </a:p>
         </p:txBody>
       </p:sp>
@@ -6588,6 +6573,7 @@
           <a:lstStyle/>
           <a:p>
             <a:pPr algn="ctr"/>
+            <a:endParaRPr/>
           </a:p>
         </p:txBody>
       </p:sp>
@@ -6620,6 +6606,7 @@
           <a:lstStyle/>
           <a:p>
             <a:pPr algn="ctr"/>
+            <a:endParaRPr/>
           </a:p>
         </p:txBody>
       </p:sp>
@@ -6640,7 +6627,7 @@
           <a:noFill/>
         </p:spPr>
         <p:txBody>
-          <a:bodyPr wrap="square" lIns="0" tIns="0" rIns="0" bIns="0" anchor="t" rtlCol="0">
+          <a:bodyPr wrap="square" lIns="0" tIns="0" rIns="0" bIns="0" rtlCol="0" anchor="t">
             <a:noAutofit/>
           </a:bodyPr>
           <a:lstStyle/>
@@ -6751,7 +6738,7 @@
           </a:ln>
         </p:spPr>
         <p:txBody>
-          <a:bodyPr rtlCol="0" anchor="ctr" wrap="square" lIns="54864" tIns="0" rIns="36576" bIns="0">
+          <a:bodyPr wrap="square" lIns="54864" tIns="0" rIns="36576" bIns="0" rtlCol="0" anchor="ctr">
             <a:noAutofit/>
           </a:bodyPr>
           <a:lstStyle/>
@@ -6808,7 +6795,7 @@
           </a:ln>
         </p:spPr>
         <p:txBody>
-          <a:bodyPr rtlCol="0" anchor="ctr" wrap="square" lIns="54864" tIns="0" rIns="36576" bIns="0">
+          <a:bodyPr wrap="square" lIns="54864" tIns="0" rIns="36576" bIns="0" rtlCol="0" anchor="ctr">
             <a:noAutofit/>
           </a:bodyPr>
           <a:lstStyle/>
@@ -6865,7 +6852,7 @@
           </a:ln>
         </p:spPr>
         <p:txBody>
-          <a:bodyPr rtlCol="0" anchor="ctr" wrap="square" lIns="54864" tIns="0" rIns="36576" bIns="0">
+          <a:bodyPr wrap="square" lIns="54864" tIns="0" rIns="36576" bIns="0" rtlCol="0" anchor="ctr">
             <a:noAutofit/>
           </a:bodyPr>
           <a:lstStyle/>
@@ -6922,7 +6909,7 @@
           </a:ln>
         </p:spPr>
         <p:txBody>
-          <a:bodyPr rtlCol="0" anchor="ctr" wrap="square" lIns="54864" tIns="0" rIns="36576" bIns="0">
+          <a:bodyPr wrap="square" lIns="54864" tIns="0" rIns="36576" bIns="0" rtlCol="0" anchor="ctr">
             <a:noAutofit/>
           </a:bodyPr>
           <a:lstStyle/>
@@ -6979,7 +6966,7 @@
           </a:ln>
         </p:spPr>
         <p:txBody>
-          <a:bodyPr rtlCol="0" anchor="ctr" wrap="square" lIns="54864" tIns="0" rIns="36576" bIns="0">
+          <a:bodyPr wrap="square" lIns="54864" tIns="0" rIns="36576" bIns="0" rtlCol="0" anchor="ctr">
             <a:noAutofit/>
           </a:bodyPr>
           <a:lstStyle/>
@@ -7029,7 +7016,7 @@
           <a:noFill/>
         </p:spPr>
         <p:txBody>
-          <a:bodyPr wrap="square" lIns="0" tIns="0" rIns="0" bIns="0" anchor="t" rtlCol="0">
+          <a:bodyPr wrap="square" lIns="0" tIns="0" rIns="0" bIns="0" rtlCol="0" anchor="t">
             <a:noAutofit/>
           </a:bodyPr>
           <a:lstStyle/>
@@ -7140,7 +7127,7 @@
           </a:ln>
         </p:spPr>
         <p:txBody>
-          <a:bodyPr rtlCol="0" anchor="ctr" wrap="square" lIns="54864" tIns="0" rIns="36576" bIns="0">
+          <a:bodyPr wrap="square" lIns="54864" tIns="0" rIns="36576" bIns="0" rtlCol="0" anchor="ctr">
             <a:noAutofit/>
           </a:bodyPr>
           <a:lstStyle/>
@@ -7197,7 +7184,7 @@
           </a:ln>
         </p:spPr>
         <p:txBody>
-          <a:bodyPr rtlCol="0" anchor="ctr" wrap="square" lIns="54864" tIns="0" rIns="36576" bIns="0">
+          <a:bodyPr wrap="square" lIns="54864" tIns="0" rIns="36576" bIns="0" rtlCol="0" anchor="ctr">
             <a:noAutofit/>
           </a:bodyPr>
           <a:lstStyle/>
@@ -7254,7 +7241,7 @@
           </a:ln>
         </p:spPr>
         <p:txBody>
-          <a:bodyPr rtlCol="0" anchor="ctr" wrap="square" lIns="54864" tIns="0" rIns="36576" bIns="0">
+          <a:bodyPr wrap="square" lIns="54864" tIns="0" rIns="36576" bIns="0" rtlCol="0" anchor="ctr">
             <a:noAutofit/>
           </a:bodyPr>
           <a:lstStyle/>
@@ -7311,7 +7298,7 @@
           </a:ln>
         </p:spPr>
         <p:txBody>
-          <a:bodyPr rtlCol="0" anchor="ctr" wrap="square" lIns="54864" tIns="0" rIns="36576" bIns="0">
+          <a:bodyPr wrap="square" lIns="54864" tIns="0" rIns="36576" bIns="0" rtlCol="0" anchor="ctr">
             <a:noAutofit/>
           </a:bodyPr>
           <a:lstStyle/>
@@ -7368,7 +7355,7 @@
           </a:ln>
         </p:spPr>
         <p:txBody>
-          <a:bodyPr rtlCol="0" anchor="ctr" wrap="square" lIns="54864" tIns="0" rIns="36576" bIns="0">
+          <a:bodyPr wrap="square" lIns="54864" tIns="0" rIns="36576" bIns="0" rtlCol="0" anchor="ctr">
             <a:noAutofit/>
           </a:bodyPr>
           <a:lstStyle/>
@@ -7418,7 +7405,7 @@
           <a:noFill/>
         </p:spPr>
         <p:txBody>
-          <a:bodyPr wrap="square" lIns="0" tIns="0" rIns="0" bIns="0" anchor="t" rtlCol="0">
+          <a:bodyPr wrap="square" lIns="0" tIns="0" rIns="0" bIns="0" rtlCol="0" anchor="t">
             <a:noAutofit/>
           </a:bodyPr>
           <a:lstStyle/>
@@ -7529,7 +7516,7 @@
           </a:ln>
         </p:spPr>
         <p:txBody>
-          <a:bodyPr rtlCol="0" anchor="ctr" wrap="square" lIns="54864" tIns="0" rIns="36576" bIns="0">
+          <a:bodyPr wrap="square" lIns="54864" tIns="0" rIns="36576" bIns="0" rtlCol="0" anchor="ctr">
             <a:noAutofit/>
           </a:bodyPr>
           <a:lstStyle/>
@@ -7586,7 +7573,7 @@
           </a:ln>
         </p:spPr>
         <p:txBody>
-          <a:bodyPr rtlCol="0" anchor="ctr" wrap="square" lIns="54864" tIns="0" rIns="36576" bIns="0">
+          <a:bodyPr wrap="square" lIns="54864" tIns="0" rIns="36576" bIns="0" rtlCol="0" anchor="ctr">
             <a:noAutofit/>
           </a:bodyPr>
           <a:lstStyle/>
@@ -7643,7 +7630,7 @@
           </a:ln>
         </p:spPr>
         <p:txBody>
-          <a:bodyPr rtlCol="0" anchor="ctr" wrap="square" lIns="54864" tIns="0" rIns="36576" bIns="0">
+          <a:bodyPr wrap="square" lIns="54864" tIns="0" rIns="36576" bIns="0" rtlCol="0" anchor="ctr">
             <a:noAutofit/>
           </a:bodyPr>
           <a:lstStyle/>
@@ -7700,7 +7687,7 @@
           </a:ln>
         </p:spPr>
         <p:txBody>
-          <a:bodyPr rtlCol="0" anchor="ctr" wrap="square" lIns="54864" tIns="0" rIns="36576" bIns="0">
+          <a:bodyPr wrap="square" lIns="54864" tIns="0" rIns="36576" bIns="0" rtlCol="0" anchor="ctr">
             <a:noAutofit/>
           </a:bodyPr>
           <a:lstStyle/>
@@ -7757,7 +7744,7 @@
           </a:ln>
         </p:spPr>
         <p:txBody>
-          <a:bodyPr rtlCol="0" anchor="ctr" wrap="square" lIns="54864" tIns="0" rIns="36576" bIns="0">
+          <a:bodyPr wrap="square" lIns="54864" tIns="0" rIns="36576" bIns="0" rtlCol="0" anchor="ctr">
             <a:noAutofit/>
           </a:bodyPr>
           <a:lstStyle/>
@@ -7817,7 +7804,7 @@
           </a:ln>
         </p:spPr>
         <p:txBody>
-          <a:bodyPr rtlCol="0" anchor="ctr" wrap="square" lIns="457200" tIns="9144" rIns="45720" bIns="9144">
+          <a:bodyPr wrap="square" lIns="457200" tIns="9144" rIns="45720" bIns="9144" rtlCol="0" anchor="ctr">
             <a:noAutofit/>
           </a:bodyPr>
           <a:lstStyle/>
@@ -7862,18 +7849,19 @@
               <a:buNone/>
             </a:pPr>
             <a:r>
-              <a:rPr lang="en-IN" sz="1050" dirty="0">
-                <a:solidFill>
-                  <a:srgbClr val="1A1A1A"/>
+              <a:rPr lang="en-IN" sz="950" dirty="0">
+                <a:solidFill>
+                  <a:srgbClr val="0563C1"/>
                 </a:solidFill>
                 <a:latin typeface="Arial"/>
                 <a:ea typeface="Arial"/>
                 <a:cs typeface="Arial"/>
                 <a:sym typeface="Arial"/>
-              </a:rPr>
-              <a:t>https://  ________________</a:t>
-            </a:r>
-            <a:endParaRPr lang="en-IN" sz="1050" dirty="0"/>
+                <a:hlinkClick r:id="rId4"/>
+              </a:rPr>
+              <a:t>baghewala-digital-twin.onrender.com</a:t>
+            </a:r>
+            <a:endParaRPr lang="en-IN" sz="950" dirty="0"/>
           </a:p>
         </p:txBody>
       </p:sp>
@@ -7904,7 +7892,7 @@
           </a:ln>
         </p:spPr>
         <p:txBody>
-          <a:bodyPr rtlCol="0" anchor="ctr" wrap="square" lIns="457200" tIns="9144" rIns="45720" bIns="9144">
+          <a:bodyPr wrap="square" lIns="457200" tIns="9144" rIns="45720" bIns="9144" rtlCol="0" anchor="ctr">
             <a:noAutofit/>
           </a:bodyPr>
           <a:lstStyle/>
@@ -7949,9 +7937,9 @@
               <a:buNone/>
             </a:pPr>
             <a:r>
-              <a:rPr lang="en-IN" sz="1050" dirty="0">
-                <a:solidFill>
-                  <a:srgbClr val="1A1A1A"/>
+              <a:rPr lang="en-IN" sz="950" dirty="0">
+                <a:solidFill>
+                  <a:srgbClr val="0563C1"/>
                 </a:solidFill>
                 <a:latin typeface="Arial"/>
                 <a:ea typeface="Arial"/>
@@ -7960,7 +7948,7 @@
               </a:rPr>
               <a:t>https://  ________________</a:t>
             </a:r>
-            <a:endParaRPr lang="en-IN" sz="1050" dirty="0"/>
+            <a:endParaRPr lang="en-IN" sz="950" dirty="0"/>
           </a:p>
         </p:txBody>
       </p:sp>
@@ -7991,7 +7979,7 @@
           </a:ln>
         </p:spPr>
         <p:txBody>
-          <a:bodyPr rtlCol="0" anchor="ctr" wrap="square" lIns="457200" tIns="9144" rIns="45720" bIns="9144">
+          <a:bodyPr wrap="square" lIns="457200" tIns="9144" rIns="45720" bIns="9144" rtlCol="0" anchor="ctr">
             <a:noAutofit/>
           </a:bodyPr>
           <a:lstStyle/>
@@ -8036,18 +8024,19 @@
               <a:buNone/>
             </a:pPr>
             <a:r>
-              <a:rPr lang="en-IN" sz="1050" dirty="0">
-                <a:solidFill>
-                  <a:srgbClr val="1A1A1A"/>
+              <a:rPr lang="en-IN" sz="950" dirty="0">
+                <a:solidFill>
+                  <a:srgbClr val="0563C1"/>
                 </a:solidFill>
                 <a:latin typeface="Arial"/>
                 <a:ea typeface="Arial"/>
                 <a:cs typeface="Arial"/>
                 <a:sym typeface="Arial"/>
-              </a:rPr>
-              <a:t>https://  ________________</a:t>
-            </a:r>
-            <a:endParaRPr lang="en-IN" sz="1050" dirty="0"/>
+                <a:hlinkClick r:id="rId5"/>
+              </a:rPr>
+              <a:t>github.com/grv-io/sih2026-baghewala-digital-twin</a:t>
+            </a:r>
+            <a:endParaRPr lang="en-IN" sz="950" dirty="0"/>
           </a:p>
         </p:txBody>
       </p:sp>
@@ -8060,7 +8049,7 @@
           <p:nvPr/>
         </p:nvPicPr>
         <p:blipFill>
-          <a:blip r:embed="rId4"/>
+          <a:blip r:embed="rId6"/>
           <a:stretch>
             <a:fillRect/>
           </a:stretch>
@@ -8084,7 +8073,7 @@
           <p:nvPr/>
         </p:nvPicPr>
         <p:blipFill>
-          <a:blip r:embed="rId5"/>
+          <a:blip r:embed="rId7"/>
           <a:stretch>
             <a:fillRect/>
           </a:stretch>
@@ -8108,7 +8097,7 @@
           <p:nvPr/>
         </p:nvPicPr>
         <p:blipFill>
-          <a:blip r:embed="rId6"/>
+          <a:blip r:embed="rId8"/>
           <a:stretch>
             <a:fillRect/>
           </a:stretch>
@@ -8132,7 +8121,7 @@
           <p:nvPr/>
         </p:nvPicPr>
         <p:blipFill>
-          <a:blip r:embed="rId7"/>
+          <a:blip r:embed="rId9"/>
           <a:stretch>
             <a:fillRect/>
           </a:stretch>
@@ -8156,7 +8145,7 @@
           <p:nvPr/>
         </p:nvPicPr>
         <p:blipFill>
-          <a:blip r:embed="rId8"/>
+          <a:blip r:embed="rId10"/>
           <a:stretch>
             <a:fillRect/>
           </a:stretch>
@@ -8180,7 +8169,7 @@
           <p:nvPr/>
         </p:nvPicPr>
         <p:blipFill>
-          <a:blip r:embed="rId9"/>
+          <a:blip r:embed="rId11"/>
           <a:stretch>
             <a:fillRect/>
           </a:stretch>
@@ -8446,57 +8435,6 @@
           </a:p>
         </p:txBody>
       </p:sp>
-      <p:sp>
-        <p:nvSpPr>
-          <p:cNvPr id="11" name="Oval 10" descr="Your startup LOGO">
-            <a:extLst>
-              <a:ext uri="{FF2B5EF4-FFF2-40B4-BE49-F238E27FC236}">
-                <a16:creationId xmlns:a16="http://schemas.microsoft.com/office/drawing/2014/main" id="{5DBCE864-823D-4A13-9607-5DA1F0ED5FB8}"/>
-              </a:ext>
-              <a:ext uri="{C183D7F6-B498-43B3-948B-1728B52AA6E4}">
-                <adec:decorative xmlns:adec="http://schemas.microsoft.com/office/drawing/2017/decorative" xmlns="" val="0"/>
-              </a:ext>
-            </a:extLst>
-          </p:cNvPr>
-          <p:cNvSpPr/>
-          <p:nvPr/>
-        </p:nvSpPr>
-        <p:spPr>
-          <a:xfrm>
-            <a:off x="329773" y="252246"/>
-            <a:ext cx="1251857" cy="807334"/>
-          </a:xfrm>
-          <a:prstGeom prst="ellipse">
-            <a:avLst/>
-          </a:prstGeom>
-        </p:spPr>
-        <p:style>
-          <a:lnRef idx="2">
-            <a:schemeClr val="accent4"/>
-          </a:lnRef>
-          <a:fillRef idx="1">
-            <a:schemeClr val="lt1"/>
-          </a:fillRef>
-          <a:effectRef idx="0">
-            <a:schemeClr val="accent4"/>
-          </a:effectRef>
-          <a:fontRef idx="minor">
-            <a:schemeClr val="dk1"/>
-          </a:fontRef>
-        </p:style>
-        <p:txBody>
-          <a:bodyPr rtlCol="0" anchor="ctr"/>
-          <a:lstStyle/>
-          <a:p>
-            <a:pPr algn="ctr"/>
-            <a:r>
-              <a:rPr lang="en-US" dirty="0"/>
-              <a:t>Your Team Name</a:t>
-            </a:r>
-            <a:endParaRPr lang="en-IN" dirty="0"/>
-          </a:p>
-        </p:txBody>
-      </p:sp>
       <p:pic>
         <p:nvPicPr>
           <p:cNvPr id="12" name="Picture 11"/>
@@ -8554,11 +8492,13 @@
           </a:ln>
         </p:spPr>
         <p:txBody>
-          <a:bodyPr rtlCol="0" anchor="t" wrap="square" lIns="45720" tIns="18288" rIns="36576" bIns="9144">
+          <a:bodyPr wrap="square" lIns="45720" tIns="18288" rIns="36576" bIns="9144" rtlCol="0" anchor="t">
             <a:noAutofit/>
           </a:bodyPr>
           <a:lstStyle/>
-          <a:p/>
+          <a:p>
+            <a:endParaRPr/>
+          </a:p>
         </p:txBody>
       </p:sp>
       <p:sp>
@@ -8586,7 +8526,7 @@
           </a:ln>
         </p:spPr>
         <p:txBody>
-          <a:bodyPr rtlCol="0" anchor="ctr" wrap="square" lIns="54864" tIns="0" rIns="54864" bIns="0">
+          <a:bodyPr wrap="square" lIns="54864" tIns="0" rIns="54864" bIns="0" rtlCol="0" anchor="ctr">
             <a:noAutofit/>
           </a:bodyPr>
           <a:lstStyle/>
@@ -8604,7 +8544,7 @@
               <a:buNone/>
             </a:pPr>
             <a:r>
-              <a:rPr lang="en-IN" sz="1500" dirty="0" b="1">
+              <a:rPr lang="en-IN" sz="1500" b="1" dirty="0">
                 <a:solidFill>
                   <a:srgbClr val="FFFFFF"/>
                 </a:solidFill>
@@ -8646,11 +8586,13 @@
           </a:ln>
         </p:spPr>
         <p:txBody>
-          <a:bodyPr rtlCol="0" anchor="t" wrap="square" lIns="45720" tIns="18288" rIns="36576" bIns="9144">
+          <a:bodyPr wrap="square" lIns="45720" tIns="18288" rIns="36576" bIns="9144" rtlCol="0" anchor="t">
             <a:noAutofit/>
           </a:bodyPr>
           <a:lstStyle/>
-          <a:p/>
+          <a:p>
+            <a:endParaRPr/>
+          </a:p>
         </p:txBody>
       </p:sp>
       <p:sp>
@@ -8678,7 +8620,7 @@
           </a:ln>
         </p:spPr>
         <p:txBody>
-          <a:bodyPr rtlCol="0" anchor="ctr" wrap="square" lIns="54864" tIns="0" rIns="54864" bIns="0">
+          <a:bodyPr wrap="square" lIns="54864" tIns="0" rIns="54864" bIns="0" rtlCol="0" anchor="ctr">
             <a:noAutofit/>
           </a:bodyPr>
           <a:lstStyle/>
@@ -8696,7 +8638,7 @@
               <a:buNone/>
             </a:pPr>
             <a:r>
-              <a:rPr lang="en-IN" sz="1500" dirty="0" b="1">
+              <a:rPr lang="en-IN" sz="1500" b="1" dirty="0">
                 <a:solidFill>
                   <a:srgbClr val="FFFFFF"/>
                 </a:solidFill>
@@ -8738,11 +8680,13 @@
           </a:ln>
         </p:spPr>
         <p:txBody>
-          <a:bodyPr rtlCol="0" anchor="t" wrap="square" lIns="45720" tIns="18288" rIns="36576" bIns="9144">
+          <a:bodyPr wrap="square" lIns="45720" tIns="18288" rIns="36576" bIns="9144" rtlCol="0" anchor="t">
             <a:noAutofit/>
           </a:bodyPr>
           <a:lstStyle/>
-          <a:p/>
+          <a:p>
+            <a:endParaRPr/>
+          </a:p>
         </p:txBody>
       </p:sp>
       <p:sp>
@@ -8770,7 +8714,7 @@
           </a:ln>
         </p:spPr>
         <p:txBody>
-          <a:bodyPr rtlCol="0" anchor="ctr" wrap="square" lIns="54864" tIns="0" rIns="54864" bIns="0">
+          <a:bodyPr wrap="square" lIns="54864" tIns="0" rIns="54864" bIns="0" rtlCol="0" anchor="ctr">
             <a:noAutofit/>
           </a:bodyPr>
           <a:lstStyle/>
@@ -8788,7 +8732,7 @@
               <a:buNone/>
             </a:pPr>
             <a:r>
-              <a:rPr lang="en-IN" sz="1500" dirty="0" b="1">
+              <a:rPr lang="en-IN" sz="1500" b="1" dirty="0">
                 <a:solidFill>
                   <a:srgbClr val="FFFFFF"/>
                 </a:solidFill>
@@ -8830,11 +8774,13 @@
           </a:ln>
         </p:spPr>
         <p:txBody>
-          <a:bodyPr rtlCol="0" anchor="t" wrap="square" lIns="45720" tIns="18288" rIns="36576" bIns="9144">
+          <a:bodyPr wrap="square" lIns="45720" tIns="18288" rIns="36576" bIns="9144" rtlCol="0" anchor="t">
             <a:noAutofit/>
           </a:bodyPr>
           <a:lstStyle/>
-          <a:p/>
+          <a:p>
+            <a:endParaRPr/>
+          </a:p>
         </p:txBody>
       </p:sp>
       <p:sp>
@@ -8862,7 +8808,7 @@
           </a:ln>
         </p:spPr>
         <p:txBody>
-          <a:bodyPr rtlCol="0" anchor="ctr" wrap="square" lIns="54864" tIns="0" rIns="54864" bIns="0">
+          <a:bodyPr wrap="square" lIns="54864" tIns="0" rIns="54864" bIns="0" rtlCol="0" anchor="ctr">
             <a:noAutofit/>
           </a:bodyPr>
           <a:lstStyle/>
@@ -8880,7 +8826,7 @@
               <a:buNone/>
             </a:pPr>
             <a:r>
-              <a:rPr lang="en-IN" sz="1500" dirty="0" b="1">
+              <a:rPr lang="en-IN" sz="1500" b="1" dirty="0">
                 <a:solidFill>
                   <a:srgbClr val="FFFFFF"/>
                 </a:solidFill>
@@ -8922,11 +8868,13 @@
           </a:ln>
         </p:spPr>
         <p:txBody>
-          <a:bodyPr rtlCol="0" anchor="t" wrap="square" lIns="45720" tIns="18288" rIns="36576" bIns="9144">
+          <a:bodyPr wrap="square" lIns="45720" tIns="18288" rIns="36576" bIns="9144" rtlCol="0" anchor="t">
             <a:noAutofit/>
           </a:bodyPr>
           <a:lstStyle/>
-          <a:p/>
+          <a:p>
+            <a:endParaRPr/>
+          </a:p>
         </p:txBody>
       </p:sp>
       <p:sp>
@@ -8954,7 +8902,7 @@
           </a:ln>
         </p:spPr>
         <p:txBody>
-          <a:bodyPr rtlCol="0" anchor="ctr" wrap="square" lIns="54864" tIns="0" rIns="54864" bIns="0">
+          <a:bodyPr wrap="square" lIns="54864" tIns="0" rIns="54864" bIns="0" rtlCol="0" anchor="ctr">
             <a:noAutofit/>
           </a:bodyPr>
           <a:lstStyle/>
@@ -8972,7 +8920,7 @@
               <a:buNone/>
             </a:pPr>
             <a:r>
-              <a:rPr lang="en-IN" sz="1500" dirty="0" b="1">
+              <a:rPr lang="en-IN" sz="1500" b="1" dirty="0">
                 <a:solidFill>
                   <a:srgbClr val="FFFFFF"/>
                 </a:solidFill>
@@ -9014,11 +8962,13 @@
           </a:ln>
         </p:spPr>
         <p:txBody>
-          <a:bodyPr rtlCol="0" anchor="t" wrap="square" lIns="45720" tIns="18288" rIns="36576" bIns="9144">
+          <a:bodyPr wrap="square" lIns="45720" tIns="18288" rIns="36576" bIns="9144" rtlCol="0" anchor="t">
             <a:noAutofit/>
           </a:bodyPr>
           <a:lstStyle/>
-          <a:p/>
+          <a:p>
+            <a:endParaRPr/>
+          </a:p>
         </p:txBody>
       </p:sp>
       <p:sp>
@@ -9046,7 +8996,7 @@
           </a:ln>
         </p:spPr>
         <p:txBody>
-          <a:bodyPr rtlCol="0" anchor="ctr" wrap="square" lIns="109728" tIns="0" rIns="54864" bIns="0">
+          <a:bodyPr wrap="square" lIns="109728" tIns="0" rIns="54864" bIns="0" rtlCol="0" anchor="ctr">
             <a:noAutofit/>
           </a:bodyPr>
           <a:lstStyle/>
@@ -9064,7 +9014,7 @@
               <a:buNone/>
             </a:pPr>
             <a:r>
-              <a:rPr lang="en-IN" sz="1200" dirty="0" b="1">
+              <a:rPr lang="en-IN" sz="1200" b="1" dirty="0">
                 <a:solidFill>
                   <a:srgbClr val="FFFFFF"/>
                 </a:solidFill>
@@ -9106,11 +9056,13 @@
           </a:ln>
         </p:spPr>
         <p:txBody>
-          <a:bodyPr rtlCol="0" anchor="t" wrap="square" lIns="45720" tIns="18288" rIns="36576" bIns="9144">
+          <a:bodyPr wrap="square" lIns="45720" tIns="18288" rIns="36576" bIns="9144" rtlCol="0" anchor="t">
             <a:noAutofit/>
           </a:bodyPr>
           <a:lstStyle/>
-          <a:p/>
+          <a:p>
+            <a:endParaRPr/>
+          </a:p>
         </p:txBody>
       </p:sp>
       <p:sp>
@@ -9138,7 +9090,7 @@
           </a:ln>
         </p:spPr>
         <p:txBody>
-          <a:bodyPr rtlCol="0" anchor="ctr" wrap="square" lIns="109728" tIns="0" rIns="54864" bIns="0">
+          <a:bodyPr wrap="square" lIns="109728" tIns="0" rIns="54864" bIns="0" rtlCol="0" anchor="ctr">
             <a:noAutofit/>
           </a:bodyPr>
           <a:lstStyle/>
@@ -9156,7 +9108,7 @@
               <a:buNone/>
             </a:pPr>
             <a:r>
-              <a:rPr lang="en-IN" sz="1200" dirty="0" b="1">
+              <a:rPr lang="en-IN" sz="1200" b="1" dirty="0">
                 <a:solidFill>
                   <a:srgbClr val="FFFFFF"/>
                 </a:solidFill>
@@ -9200,6 +9152,7 @@
           <a:lstStyle/>
           <a:p>
             <a:pPr algn="ctr"/>
+            <a:endParaRPr/>
           </a:p>
         </p:txBody>
       </p:sp>
@@ -9232,6 +9185,7 @@
           <a:lstStyle/>
           <a:p>
             <a:pPr algn="ctr"/>
+            <a:endParaRPr/>
           </a:p>
         </p:txBody>
       </p:sp>
@@ -9264,6 +9218,7 @@
           <a:lstStyle/>
           <a:p>
             <a:pPr algn="ctr"/>
+            <a:endParaRPr/>
           </a:p>
         </p:txBody>
       </p:sp>
@@ -9296,6 +9251,7 @@
           <a:lstStyle/>
           <a:p>
             <a:pPr algn="ctr"/>
+            <a:endParaRPr/>
           </a:p>
         </p:txBody>
       </p:sp>
@@ -9328,6 +9284,7 @@
           <a:lstStyle/>
           <a:p>
             <a:pPr algn="ctr"/>
+            <a:endParaRPr/>
           </a:p>
         </p:txBody>
       </p:sp>
@@ -9472,6 +9429,7 @@
           <a:lstStyle/>
           <a:p>
             <a:pPr algn="ctr"/>
+            <a:endParaRPr/>
           </a:p>
         </p:txBody>
       </p:sp>
@@ -9515,7 +9473,7 @@
           <a:noFill/>
         </p:spPr>
         <p:txBody>
-          <a:bodyPr wrap="square" lIns="0" tIns="0" rIns="0" bIns="0" anchor="t" rtlCol="0">
+          <a:bodyPr wrap="square" lIns="0" tIns="0" rIns="0" bIns="0" rtlCol="0" anchor="t">
             <a:noAutofit/>
           </a:bodyPr>
           <a:lstStyle/>
@@ -9626,7 +9584,7 @@
           </a:ln>
         </p:spPr>
         <p:txBody>
-          <a:bodyPr rtlCol="0" anchor="ctr" wrap="square" lIns="54864" tIns="0" rIns="36576" bIns="0">
+          <a:bodyPr wrap="square" lIns="54864" tIns="0" rIns="36576" bIns="0" rtlCol="0" anchor="ctr">
             <a:noAutofit/>
           </a:bodyPr>
           <a:lstStyle/>
@@ -9683,7 +9641,7 @@
           </a:ln>
         </p:spPr>
         <p:txBody>
-          <a:bodyPr rtlCol="0" anchor="ctr" wrap="square" lIns="54864" tIns="0" rIns="36576" bIns="0">
+          <a:bodyPr wrap="square" lIns="54864" tIns="0" rIns="36576" bIns="0" rtlCol="0" anchor="ctr">
             <a:noAutofit/>
           </a:bodyPr>
           <a:lstStyle/>
@@ -9740,7 +9698,7 @@
           </a:ln>
         </p:spPr>
         <p:txBody>
-          <a:bodyPr rtlCol="0" anchor="ctr" wrap="square" lIns="54864" tIns="0" rIns="36576" bIns="0">
+          <a:bodyPr wrap="square" lIns="54864" tIns="0" rIns="36576" bIns="0" rtlCol="0" anchor="ctr">
             <a:noAutofit/>
           </a:bodyPr>
           <a:lstStyle/>
@@ -9790,7 +9748,7 @@
           <a:noFill/>
         </p:spPr>
         <p:txBody>
-          <a:bodyPr wrap="square" lIns="0" tIns="0" rIns="0" bIns="0" anchor="t" rtlCol="0">
+          <a:bodyPr wrap="square" lIns="0" tIns="0" rIns="0" bIns="0" rtlCol="0" anchor="t">
             <a:noAutofit/>
           </a:bodyPr>
           <a:lstStyle/>
@@ -9901,7 +9859,7 @@
           </a:ln>
         </p:spPr>
         <p:txBody>
-          <a:bodyPr rtlCol="0" anchor="ctr" wrap="square" lIns="54864" tIns="0" rIns="36576" bIns="0">
+          <a:bodyPr wrap="square" lIns="54864" tIns="0" rIns="36576" bIns="0" rtlCol="0" anchor="ctr">
             <a:noAutofit/>
           </a:bodyPr>
           <a:lstStyle/>
@@ -9958,7 +9916,7 @@
           </a:ln>
         </p:spPr>
         <p:txBody>
-          <a:bodyPr rtlCol="0" anchor="ctr" wrap="square" lIns="54864" tIns="0" rIns="36576" bIns="0">
+          <a:bodyPr wrap="square" lIns="54864" tIns="0" rIns="36576" bIns="0" rtlCol="0" anchor="ctr">
             <a:noAutofit/>
           </a:bodyPr>
           <a:lstStyle/>
@@ -10015,7 +9973,7 @@
           </a:ln>
         </p:spPr>
         <p:txBody>
-          <a:bodyPr rtlCol="0" anchor="ctr" wrap="square" lIns="54864" tIns="0" rIns="36576" bIns="0">
+          <a:bodyPr wrap="square" lIns="54864" tIns="0" rIns="36576" bIns="0" rtlCol="0" anchor="ctr">
             <a:noAutofit/>
           </a:bodyPr>
           <a:lstStyle/>
@@ -10065,7 +10023,7 @@
           <a:noFill/>
         </p:spPr>
         <p:txBody>
-          <a:bodyPr wrap="square" lIns="0" tIns="0" rIns="0" bIns="0" anchor="t" rtlCol="0">
+          <a:bodyPr wrap="square" lIns="0" tIns="0" rIns="0" bIns="0" rtlCol="0" anchor="t">
             <a:noAutofit/>
           </a:bodyPr>
           <a:lstStyle/>
@@ -10176,7 +10134,7 @@
           </a:ln>
         </p:spPr>
         <p:txBody>
-          <a:bodyPr rtlCol="0" anchor="ctr" wrap="square" lIns="54864" tIns="0" rIns="36576" bIns="0">
+          <a:bodyPr wrap="square" lIns="54864" tIns="0" rIns="36576" bIns="0" rtlCol="0" anchor="ctr">
             <a:noAutofit/>
           </a:bodyPr>
           <a:lstStyle/>
@@ -10233,7 +10191,7 @@
           </a:ln>
         </p:spPr>
         <p:txBody>
-          <a:bodyPr rtlCol="0" anchor="ctr" wrap="square" lIns="54864" tIns="0" rIns="36576" bIns="0">
+          <a:bodyPr wrap="square" lIns="54864" tIns="0" rIns="36576" bIns="0" rtlCol="0" anchor="ctr">
             <a:noAutofit/>
           </a:bodyPr>
           <a:lstStyle/>
@@ -10290,7 +10248,7 @@
           </a:ln>
         </p:spPr>
         <p:txBody>
-          <a:bodyPr rtlCol="0" anchor="ctr" wrap="square" lIns="54864" tIns="0" rIns="36576" bIns="0">
+          <a:bodyPr wrap="square" lIns="54864" tIns="0" rIns="36576" bIns="0" rtlCol="0" anchor="ctr">
             <a:noAutofit/>
           </a:bodyPr>
           <a:lstStyle/>
@@ -10340,7 +10298,7 @@
           <a:noFill/>
         </p:spPr>
         <p:txBody>
-          <a:bodyPr wrap="square" lIns="0" tIns="0" rIns="0" bIns="0" anchor="t" rtlCol="0">
+          <a:bodyPr wrap="square" lIns="0" tIns="0" rIns="0" bIns="0" rtlCol="0" anchor="t">
             <a:noAutofit/>
           </a:bodyPr>
           <a:lstStyle/>
@@ -10451,7 +10409,7 @@
           </a:ln>
         </p:spPr>
         <p:txBody>
-          <a:bodyPr rtlCol="0" anchor="ctr" wrap="square" lIns="54864" tIns="0" rIns="36576" bIns="0">
+          <a:bodyPr wrap="square" lIns="54864" tIns="0" rIns="36576" bIns="0" rtlCol="0" anchor="ctr">
             <a:noAutofit/>
           </a:bodyPr>
           <a:lstStyle/>
@@ -10508,7 +10466,7 @@
           </a:ln>
         </p:spPr>
         <p:txBody>
-          <a:bodyPr rtlCol="0" anchor="ctr" wrap="square" lIns="54864" tIns="0" rIns="36576" bIns="0">
+          <a:bodyPr wrap="square" lIns="54864" tIns="0" rIns="36576" bIns="0" rtlCol="0" anchor="ctr">
             <a:noAutofit/>
           </a:bodyPr>
           <a:lstStyle/>
@@ -10565,7 +10523,7 @@
           </a:ln>
         </p:spPr>
         <p:txBody>
-          <a:bodyPr rtlCol="0" anchor="ctr" wrap="square" lIns="54864" tIns="0" rIns="36576" bIns="0">
+          <a:bodyPr wrap="square" lIns="54864" tIns="0" rIns="36576" bIns="0" rtlCol="0" anchor="ctr">
             <a:noAutofit/>
           </a:bodyPr>
           <a:lstStyle/>
@@ -10615,7 +10573,7 @@
           <a:noFill/>
         </p:spPr>
         <p:txBody>
-          <a:bodyPr wrap="square" lIns="0" tIns="0" rIns="0" bIns="0" anchor="t" rtlCol="0">
+          <a:bodyPr wrap="square" lIns="0" tIns="0" rIns="0" bIns="0" rtlCol="0" anchor="t">
             <a:noAutofit/>
           </a:bodyPr>
           <a:lstStyle/>
@@ -10726,7 +10684,7 @@
           </a:ln>
         </p:spPr>
         <p:txBody>
-          <a:bodyPr rtlCol="0" anchor="ctr" wrap="square" lIns="54864" tIns="0" rIns="36576" bIns="0">
+          <a:bodyPr wrap="square" lIns="54864" tIns="0" rIns="36576" bIns="0" rtlCol="0" anchor="ctr">
             <a:noAutofit/>
           </a:bodyPr>
           <a:lstStyle/>
@@ -10783,7 +10741,7 @@
           </a:ln>
         </p:spPr>
         <p:txBody>
-          <a:bodyPr rtlCol="0" anchor="ctr" wrap="square" lIns="54864" tIns="0" rIns="36576" bIns="0">
+          <a:bodyPr wrap="square" lIns="54864" tIns="0" rIns="36576" bIns="0" rtlCol="0" anchor="ctr">
             <a:noAutofit/>
           </a:bodyPr>
           <a:lstStyle/>
@@ -10840,7 +10798,7 @@
           </a:ln>
         </p:spPr>
         <p:txBody>
-          <a:bodyPr rtlCol="0" anchor="ctr" wrap="square" lIns="54864" tIns="0" rIns="36576" bIns="0">
+          <a:bodyPr wrap="square" lIns="54864" tIns="0" rIns="36576" bIns="0" rtlCol="0" anchor="ctr">
             <a:noAutofit/>
           </a:bodyPr>
           <a:lstStyle/>
@@ -10890,7 +10848,7 @@
           <a:noFill/>
         </p:spPr>
         <p:txBody>
-          <a:bodyPr wrap="square" lIns="0" tIns="0" rIns="0" bIns="0" anchor="ctr" rtlCol="0">
+          <a:bodyPr wrap="square" lIns="0" tIns="0" rIns="0" bIns="0" rtlCol="0" anchor="ctr">
             <a:noAutofit/>
           </a:bodyPr>
           <a:lstStyle/>
@@ -10908,7 +10866,7 @@
               <a:buNone/>
             </a:pPr>
             <a:r>
-              <a:rPr lang="en-IN" sz="1100" dirty="0" b="1">
+              <a:rPr lang="en-IN" sz="1100" b="1" dirty="0">
                 <a:solidFill>
                   <a:srgbClr val="404040"/>
                 </a:solidFill>
@@ -10950,7 +10908,7 @@
           </a:ln>
         </p:spPr>
         <p:txBody>
-          <a:bodyPr rtlCol="0" anchor="ctr" wrap="square" lIns="457200" tIns="9144" rIns="45720" bIns="9144">
+          <a:bodyPr wrap="square" lIns="457200" tIns="9144" rIns="45720" bIns="9144" rtlCol="0" anchor="ctr">
             <a:noAutofit/>
           </a:bodyPr>
           <a:lstStyle/>
@@ -10968,7 +10926,7 @@
               <a:buNone/>
             </a:pPr>
             <a:r>
-              <a:rPr lang="en-IN" sz="1100" dirty="0" b="1">
+              <a:rPr lang="en-IN" sz="1100" b="1" dirty="0">
                 <a:solidFill>
                   <a:srgbClr val="1A1A1A"/>
                 </a:solidFill>
@@ -10995,7 +10953,7 @@
               <a:buNone/>
             </a:pPr>
             <a:r>
-              <a:rPr lang="en-IN" sz="1100" dirty="0" b="1">
+              <a:rPr lang="en-IN" sz="1100" b="1" dirty="0">
                 <a:solidFill>
                   <a:srgbClr val="1A1A1A"/>
                 </a:solidFill>
@@ -11037,7 +10995,7 @@
           </a:ln>
         </p:spPr>
         <p:txBody>
-          <a:bodyPr rtlCol="0" anchor="ctr" wrap="square" lIns="457200" tIns="9144" rIns="45720" bIns="9144">
+          <a:bodyPr wrap="square" lIns="457200" tIns="9144" rIns="45720" bIns="9144" rtlCol="0" anchor="ctr">
             <a:noAutofit/>
           </a:bodyPr>
           <a:lstStyle/>
@@ -11055,7 +11013,7 @@
               <a:buNone/>
             </a:pPr>
             <a:r>
-              <a:rPr lang="en-IN" sz="1100" dirty="0" b="1">
+              <a:rPr lang="en-IN" sz="1100" b="1" dirty="0">
                 <a:solidFill>
                   <a:srgbClr val="1A1A1A"/>
                 </a:solidFill>
@@ -11082,7 +11040,7 @@
               <a:buNone/>
             </a:pPr>
             <a:r>
-              <a:rPr lang="en-IN" sz="1100" dirty="0" b="1">
+              <a:rPr lang="en-IN" sz="1100" b="1" dirty="0">
                 <a:solidFill>
                   <a:srgbClr val="1A1A1A"/>
                 </a:solidFill>
@@ -11124,7 +11082,7 @@
           </a:ln>
         </p:spPr>
         <p:txBody>
-          <a:bodyPr rtlCol="0" anchor="ctr" wrap="square" lIns="457200" tIns="9144" rIns="45720" bIns="9144">
+          <a:bodyPr wrap="square" lIns="457200" tIns="9144" rIns="45720" bIns="9144" rtlCol="0" anchor="ctr">
             <a:noAutofit/>
           </a:bodyPr>
           <a:lstStyle/>
@@ -11142,7 +11100,7 @@
               <a:buNone/>
             </a:pPr>
             <a:r>
-              <a:rPr lang="en-IN" sz="1100" dirty="0" b="1">
+              <a:rPr lang="en-IN" sz="1100" b="1" dirty="0">
                 <a:solidFill>
                   <a:srgbClr val="1A1A1A"/>
                 </a:solidFill>
@@ -11169,7 +11127,7 @@
               <a:buNone/>
             </a:pPr>
             <a:r>
-              <a:rPr lang="en-IN" sz="1100" dirty="0" b="1">
+              <a:rPr lang="en-IN" sz="1100" b="1" dirty="0">
                 <a:solidFill>
                   <a:srgbClr val="1A1A1A"/>
                 </a:solidFill>
@@ -11211,7 +11169,7 @@
           </a:ln>
         </p:spPr>
         <p:txBody>
-          <a:bodyPr rtlCol="0" anchor="ctr" wrap="square" lIns="457200" tIns="9144" rIns="45720" bIns="9144">
+          <a:bodyPr wrap="square" lIns="457200" tIns="9144" rIns="45720" bIns="9144" rtlCol="0" anchor="ctr">
             <a:noAutofit/>
           </a:bodyPr>
           <a:lstStyle/>
@@ -11229,7 +11187,7 @@
               <a:buNone/>
             </a:pPr>
             <a:r>
-              <a:rPr lang="en-IN" sz="1100" dirty="0" b="1">
+              <a:rPr lang="en-IN" sz="1100" b="1" dirty="0">
                 <a:solidFill>
                   <a:srgbClr val="1A1A1A"/>
                 </a:solidFill>
@@ -11256,7 +11214,7 @@
               <a:buNone/>
             </a:pPr>
             <a:r>
-              <a:rPr lang="en-IN" sz="1100" dirty="0" b="1">
+              <a:rPr lang="en-IN" sz="1100" b="1" dirty="0">
                 <a:solidFill>
                   <a:srgbClr val="1A1A1A"/>
                 </a:solidFill>
@@ -11298,7 +11256,7 @@
           </a:ln>
         </p:spPr>
         <p:txBody>
-          <a:bodyPr rtlCol="0" anchor="ctr" wrap="square" lIns="457200" tIns="9144" rIns="45720" bIns="9144">
+          <a:bodyPr wrap="square" lIns="457200" tIns="9144" rIns="45720" bIns="9144" rtlCol="0" anchor="ctr">
             <a:noAutofit/>
           </a:bodyPr>
           <a:lstStyle/>
@@ -11316,7 +11274,7 @@
               <a:buNone/>
             </a:pPr>
             <a:r>
-              <a:rPr lang="en-IN" sz="1100" dirty="0" b="1">
+              <a:rPr lang="en-IN" sz="1100" b="1" dirty="0">
                 <a:solidFill>
                   <a:srgbClr val="1A1A1A"/>
                 </a:solidFill>
@@ -11343,7 +11301,7 @@
               <a:buNone/>
             </a:pPr>
             <a:r>
-              <a:rPr lang="en-IN" sz="1100" dirty="0" b="1">
+              <a:rPr lang="en-IN" sz="1100" b="1" dirty="0">
                 <a:solidFill>
                   <a:srgbClr val="1A1A1A"/>
                 </a:solidFill>
@@ -11385,7 +11343,7 @@
           </a:ln>
         </p:spPr>
         <p:txBody>
-          <a:bodyPr rtlCol="0" anchor="ctr" wrap="square" lIns="457200" tIns="9144" rIns="45720" bIns="9144">
+          <a:bodyPr wrap="square" lIns="457200" tIns="9144" rIns="45720" bIns="9144" rtlCol="0" anchor="ctr">
             <a:noAutofit/>
           </a:bodyPr>
           <a:lstStyle/>
@@ -11403,7 +11361,7 @@
               <a:buNone/>
             </a:pPr>
             <a:r>
-              <a:rPr lang="en-IN" sz="1100" dirty="0" b="1">
+              <a:rPr lang="en-IN" sz="1100" b="1" dirty="0">
                 <a:solidFill>
                   <a:srgbClr val="1A1A1A"/>
                 </a:solidFill>
@@ -11430,7 +11388,7 @@
               <a:buNone/>
             </a:pPr>
             <a:r>
-              <a:rPr lang="en-IN" sz="1100" dirty="0" b="1">
+              <a:rPr lang="en-IN" sz="1100" b="1" dirty="0">
                 <a:solidFill>
                   <a:srgbClr val="1A1A1A"/>
                 </a:solidFill>
@@ -11462,7 +11420,7 @@
           <a:noFill/>
         </p:spPr>
         <p:txBody>
-          <a:bodyPr wrap="square" lIns="0" tIns="0" rIns="0" bIns="0" anchor="ctr" rtlCol="0">
+          <a:bodyPr wrap="square" lIns="0" tIns="0" rIns="0" bIns="0" rtlCol="0" anchor="ctr">
             <a:noAutofit/>
           </a:bodyPr>
           <a:lstStyle/>
@@ -11480,7 +11438,7 @@
               <a:buNone/>
             </a:pPr>
             <a:r>
-              <a:rPr lang="en-IN" sz="1100" dirty="0" i="1">
+              <a:rPr lang="en-IN" sz="1100" i="1" dirty="0">
                 <a:solidFill>
                   <a:srgbClr val="595959"/>
                 </a:solidFill>
@@ -11783,6 +11741,57 @@
           </a:prstGeom>
         </p:spPr>
       </p:pic>
+      <p:sp>
+        <p:nvSpPr>
+          <p:cNvPr id="5" name="Oval 4" descr="Your startup LOGO">
+            <a:extLst>
+              <a:ext uri="{FF2B5EF4-FFF2-40B4-BE49-F238E27FC236}">
+                <a16:creationId xmlns:a16="http://schemas.microsoft.com/office/drawing/2014/main" id="{E16450A4-DE2F-DD39-B4E0-4ED2F1547EF8}"/>
+              </a:ext>
+              <a:ext uri="{C183D7F6-B498-43B3-948B-1728B52AA6E4}">
+                <adec:decorative xmlns:adec="http://schemas.microsoft.com/office/drawing/2017/decorative" val="0"/>
+              </a:ext>
+            </a:extLst>
+          </p:cNvPr>
+          <p:cNvSpPr/>
+          <p:nvPr/>
+        </p:nvSpPr>
+        <p:spPr>
+          <a:xfrm>
+            <a:off x="329773" y="252246"/>
+            <a:ext cx="1251857" cy="807334"/>
+          </a:xfrm>
+          <a:prstGeom prst="ellipse">
+            <a:avLst/>
+          </a:prstGeom>
+        </p:spPr>
+        <p:style>
+          <a:lnRef idx="2">
+            <a:schemeClr val="accent4"/>
+          </a:lnRef>
+          <a:fillRef idx="1">
+            <a:schemeClr val="lt1"/>
+          </a:fillRef>
+          <a:effectRef idx="0">
+            <a:schemeClr val="accent4"/>
+          </a:effectRef>
+          <a:fontRef idx="minor">
+            <a:schemeClr val="dk1"/>
+          </a:fontRef>
+        </p:style>
+        <p:txBody>
+          <a:bodyPr rtlCol="0" anchor="ctr"/>
+          <a:lstStyle/>
+          <a:p>
+            <a:pPr algn="ctr"/>
+            <a:r>
+              <a:rPr lang="en-US" dirty="0" err="1"/>
+              <a:t>AlphaQ</a:t>
+            </a:r>
+            <a:endParaRPr lang="en-IN" dirty="0"/>
+          </a:p>
+        </p:txBody>
+      </p:sp>
     </p:spTree>
   </p:cSld>
   <p:clrMapOvr>
@@ -12121,7 +12130,7 @@
                 <a16:creationId xmlns:a16="http://schemas.microsoft.com/office/drawing/2014/main" id="{5DBCE864-823D-4A13-9607-5DA1F0ED5FB8}"/>
               </a:ext>
               <a:ext uri="{C183D7F6-B498-43B3-948B-1728B52AA6E4}">
-                <adec:decorative xmlns:adec="http://schemas.microsoft.com/office/drawing/2017/decorative" xmlns="" val="0"/>
+                <adec:decorative xmlns:adec="http://schemas.microsoft.com/office/drawing/2017/decorative" val="0"/>
               </a:ext>
             </a:extLst>
           </p:cNvPr>
@@ -12157,8 +12166,8 @@
           <a:p>
             <a:pPr algn="ctr"/>
             <a:r>
-              <a:rPr lang="en-US" dirty="0"/>
-              <a:t>Your Team Name</a:t>
+              <a:rPr lang="en-US" dirty="0" err="1"/>
+              <a:t>AlphaQ</a:t>
             </a:r>
             <a:endParaRPr lang="en-IN" dirty="0"/>
           </a:p>
@@ -12221,11 +12230,13 @@
           </a:ln>
         </p:spPr>
         <p:txBody>
-          <a:bodyPr rtlCol="0" anchor="t" wrap="square" lIns="45720" tIns="18288" rIns="36576" bIns="9144">
+          <a:bodyPr wrap="square" lIns="45720" tIns="18288" rIns="36576" bIns="9144" rtlCol="0" anchor="t">
             <a:noAutofit/>
           </a:bodyPr>
           <a:lstStyle/>
-          <a:p/>
+          <a:p>
+            <a:endParaRPr/>
+          </a:p>
         </p:txBody>
       </p:sp>
       <p:sp>
@@ -12253,7 +12264,7 @@
           </a:ln>
         </p:spPr>
         <p:txBody>
-          <a:bodyPr rtlCol="0" anchor="ctr" wrap="square" lIns="73152" tIns="0" rIns="73152" bIns="0">
+          <a:bodyPr wrap="square" lIns="73152" tIns="0" rIns="73152" bIns="0" rtlCol="0" anchor="ctr">
             <a:noAutofit/>
           </a:bodyPr>
           <a:lstStyle/>
@@ -12271,7 +12282,7 @@
               <a:buNone/>
             </a:pPr>
             <a:r>
-              <a:rPr lang="en-IN" sz="1300" dirty="0" b="1">
+              <a:rPr lang="en-IN" sz="1300" b="1" dirty="0">
                 <a:solidFill>
                   <a:srgbClr val="FFFFFF"/>
                 </a:solidFill>
@@ -12313,11 +12324,13 @@
           </a:ln>
         </p:spPr>
         <p:txBody>
-          <a:bodyPr rtlCol="0" anchor="t" wrap="square" lIns="45720" tIns="18288" rIns="36576" bIns="9144">
+          <a:bodyPr wrap="square" lIns="45720" tIns="18288" rIns="36576" bIns="9144" rtlCol="0" anchor="t">
             <a:noAutofit/>
           </a:bodyPr>
           <a:lstStyle/>
-          <a:p/>
+          <a:p>
+            <a:endParaRPr/>
+          </a:p>
         </p:txBody>
       </p:sp>
       <p:sp>
@@ -12345,7 +12358,7 @@
           </a:ln>
         </p:spPr>
         <p:txBody>
-          <a:bodyPr rtlCol="0" anchor="ctr" wrap="square" lIns="73152" tIns="0" rIns="73152" bIns="0">
+          <a:bodyPr wrap="square" lIns="73152" tIns="0" rIns="73152" bIns="0" rtlCol="0" anchor="ctr">
             <a:noAutofit/>
           </a:bodyPr>
           <a:lstStyle/>
@@ -12363,7 +12376,7 @@
               <a:buNone/>
             </a:pPr>
             <a:r>
-              <a:rPr lang="en-IN" sz="1300" dirty="0" b="1">
+              <a:rPr lang="en-IN" sz="1300" b="1" dirty="0">
                 <a:solidFill>
                   <a:srgbClr val="FFFFFF"/>
                 </a:solidFill>
@@ -12405,11 +12418,13 @@
           </a:ln>
         </p:spPr>
         <p:txBody>
-          <a:bodyPr rtlCol="0" anchor="t" wrap="square" lIns="45720" tIns="18288" rIns="36576" bIns="9144">
+          <a:bodyPr wrap="square" lIns="45720" tIns="18288" rIns="36576" bIns="9144" rtlCol="0" anchor="t">
             <a:noAutofit/>
           </a:bodyPr>
           <a:lstStyle/>
-          <a:p/>
+          <a:p>
+            <a:endParaRPr/>
+          </a:p>
         </p:txBody>
       </p:sp>
       <p:sp>
@@ -12437,7 +12452,7 @@
           </a:ln>
         </p:spPr>
         <p:txBody>
-          <a:bodyPr rtlCol="0" anchor="ctr" wrap="square" lIns="73152" tIns="0" rIns="73152" bIns="0">
+          <a:bodyPr wrap="square" lIns="73152" tIns="0" rIns="73152" bIns="0" rtlCol="0" anchor="ctr">
             <a:noAutofit/>
           </a:bodyPr>
           <a:lstStyle/>
@@ -12455,7 +12470,7 @@
               <a:buNone/>
             </a:pPr>
             <a:r>
-              <a:rPr lang="en-IN" sz="1300" dirty="0" b="1">
+              <a:rPr lang="en-IN" sz="1300" b="1" dirty="0">
                 <a:solidFill>
                   <a:srgbClr val="FFFFFF"/>
                 </a:solidFill>
@@ -12497,11 +12512,13 @@
           </a:ln>
         </p:spPr>
         <p:txBody>
-          <a:bodyPr rtlCol="0" anchor="t" wrap="square" lIns="45720" tIns="18288" rIns="36576" bIns="9144">
+          <a:bodyPr wrap="square" lIns="45720" tIns="18288" rIns="36576" bIns="9144" rtlCol="0" anchor="t">
             <a:noAutofit/>
           </a:bodyPr>
           <a:lstStyle/>
-          <a:p/>
+          <a:p>
+            <a:endParaRPr/>
+          </a:p>
         </p:txBody>
       </p:sp>
       <p:sp>
@@ -12529,7 +12546,7 @@
           </a:ln>
         </p:spPr>
         <p:txBody>
-          <a:bodyPr rtlCol="0" anchor="ctr" wrap="square" lIns="109728" tIns="0" rIns="54864" bIns="0">
+          <a:bodyPr wrap="square" lIns="109728" tIns="0" rIns="54864" bIns="0" rtlCol="0" anchor="ctr">
             <a:noAutofit/>
           </a:bodyPr>
           <a:lstStyle/>
@@ -12547,7 +12564,7 @@
               <a:buNone/>
             </a:pPr>
             <a:r>
-              <a:rPr lang="en-IN" sz="1200" dirty="0" b="1">
+              <a:rPr lang="en-IN" sz="1200" b="1" dirty="0">
                 <a:solidFill>
                   <a:srgbClr val="FFFFFF"/>
                 </a:solidFill>
@@ -12591,6 +12608,7 @@
           <a:lstStyle/>
           <a:p>
             <a:pPr algn="ctr"/>
+            <a:endParaRPr/>
           </a:p>
         </p:txBody>
       </p:sp>
@@ -12623,6 +12641,7 @@
           <a:lstStyle/>
           <a:p>
             <a:pPr algn="ctr"/>
+            <a:endParaRPr/>
           </a:p>
         </p:txBody>
       </p:sp>
@@ -12655,6 +12674,7 @@
           <a:lstStyle/>
           <a:p>
             <a:pPr algn="ctr"/>
+            <a:endParaRPr/>
           </a:p>
         </p:txBody>
       </p:sp>
@@ -12675,7 +12695,7 @@
           <a:noFill/>
         </p:spPr>
         <p:txBody>
-          <a:bodyPr wrap="square" lIns="0" tIns="0" rIns="0" bIns="0" anchor="t" rtlCol="0">
+          <a:bodyPr wrap="square" lIns="0" tIns="0" rIns="0" bIns="0" rtlCol="0" anchor="t">
             <a:noAutofit/>
           </a:bodyPr>
           <a:lstStyle/>
@@ -12786,7 +12806,7 @@
           </a:ln>
         </p:spPr>
         <p:txBody>
-          <a:bodyPr rtlCol="0" anchor="ctr" wrap="square" lIns="54864" tIns="0" rIns="36576" bIns="0">
+          <a:bodyPr wrap="square" lIns="54864" tIns="0" rIns="36576" bIns="0" rtlCol="0" anchor="ctr">
             <a:noAutofit/>
           </a:bodyPr>
           <a:lstStyle/>
@@ -12843,7 +12863,7 @@
           </a:ln>
         </p:spPr>
         <p:txBody>
-          <a:bodyPr rtlCol="0" anchor="ctr" wrap="square" lIns="54864" tIns="0" rIns="36576" bIns="0">
+          <a:bodyPr wrap="square" lIns="54864" tIns="0" rIns="36576" bIns="0" rtlCol="0" anchor="ctr">
             <a:noAutofit/>
           </a:bodyPr>
           <a:lstStyle/>
@@ -12900,7 +12920,7 @@
           </a:ln>
         </p:spPr>
         <p:txBody>
-          <a:bodyPr rtlCol="0" anchor="ctr" wrap="square" lIns="54864" tIns="0" rIns="36576" bIns="0">
+          <a:bodyPr wrap="square" lIns="54864" tIns="0" rIns="36576" bIns="0" rtlCol="0" anchor="ctr">
             <a:noAutofit/>
           </a:bodyPr>
           <a:lstStyle/>
@@ -12957,7 +12977,7 @@
           </a:ln>
         </p:spPr>
         <p:txBody>
-          <a:bodyPr rtlCol="0" anchor="ctr" wrap="square" lIns="54864" tIns="0" rIns="36576" bIns="0">
+          <a:bodyPr wrap="square" lIns="54864" tIns="0" rIns="36576" bIns="0" rtlCol="0" anchor="ctr">
             <a:noAutofit/>
           </a:bodyPr>
           <a:lstStyle/>
@@ -13007,7 +13027,7 @@
           <a:noFill/>
         </p:spPr>
         <p:txBody>
-          <a:bodyPr wrap="square" lIns="0" tIns="0" rIns="0" bIns="0" anchor="t" rtlCol="0">
+          <a:bodyPr wrap="square" lIns="0" tIns="0" rIns="0" bIns="0" rtlCol="0" anchor="t">
             <a:noAutofit/>
           </a:bodyPr>
           <a:lstStyle/>
@@ -13118,7 +13138,7 @@
           </a:ln>
         </p:spPr>
         <p:txBody>
-          <a:bodyPr rtlCol="0" anchor="ctr" wrap="square" lIns="54864" tIns="0" rIns="36576" bIns="0">
+          <a:bodyPr wrap="square" lIns="54864" tIns="0" rIns="36576" bIns="0" rtlCol="0" anchor="ctr">
             <a:noAutofit/>
           </a:bodyPr>
           <a:lstStyle/>
@@ -13175,7 +13195,7 @@
           </a:ln>
         </p:spPr>
         <p:txBody>
-          <a:bodyPr rtlCol="0" anchor="ctr" wrap="square" lIns="54864" tIns="0" rIns="36576" bIns="0">
+          <a:bodyPr wrap="square" lIns="54864" tIns="0" rIns="36576" bIns="0" rtlCol="0" anchor="ctr">
             <a:noAutofit/>
           </a:bodyPr>
           <a:lstStyle/>
@@ -13232,7 +13252,7 @@
           </a:ln>
         </p:spPr>
         <p:txBody>
-          <a:bodyPr rtlCol="0" anchor="ctr" wrap="square" lIns="54864" tIns="0" rIns="36576" bIns="0">
+          <a:bodyPr wrap="square" lIns="54864" tIns="0" rIns="36576" bIns="0" rtlCol="0" anchor="ctr">
             <a:noAutofit/>
           </a:bodyPr>
           <a:lstStyle/>
@@ -13289,7 +13309,7 @@
           </a:ln>
         </p:spPr>
         <p:txBody>
-          <a:bodyPr rtlCol="0" anchor="ctr" wrap="square" lIns="54864" tIns="0" rIns="36576" bIns="0">
+          <a:bodyPr wrap="square" lIns="54864" tIns="0" rIns="36576" bIns="0" rtlCol="0" anchor="ctr">
             <a:noAutofit/>
           </a:bodyPr>
           <a:lstStyle/>
@@ -13339,7 +13359,7 @@
           <a:noFill/>
         </p:spPr>
         <p:txBody>
-          <a:bodyPr wrap="square" lIns="0" tIns="0" rIns="0" bIns="0" anchor="t" rtlCol="0">
+          <a:bodyPr wrap="square" lIns="0" tIns="0" rIns="0" bIns="0" rtlCol="0" anchor="t">
             <a:noAutofit/>
           </a:bodyPr>
           <a:lstStyle/>
@@ -13450,7 +13470,7 @@
           </a:ln>
         </p:spPr>
         <p:txBody>
-          <a:bodyPr rtlCol="0" anchor="ctr" wrap="square" lIns="54864" tIns="0" rIns="36576" bIns="0">
+          <a:bodyPr wrap="square" lIns="54864" tIns="0" rIns="36576" bIns="0" rtlCol="0" anchor="ctr">
             <a:noAutofit/>
           </a:bodyPr>
           <a:lstStyle/>
@@ -13507,7 +13527,7 @@
           </a:ln>
         </p:spPr>
         <p:txBody>
-          <a:bodyPr rtlCol="0" anchor="ctr" wrap="square" lIns="54864" tIns="0" rIns="36576" bIns="0">
+          <a:bodyPr wrap="square" lIns="54864" tIns="0" rIns="36576" bIns="0" rtlCol="0" anchor="ctr">
             <a:noAutofit/>
           </a:bodyPr>
           <a:lstStyle/>
@@ -13564,7 +13584,7 @@
           </a:ln>
         </p:spPr>
         <p:txBody>
-          <a:bodyPr rtlCol="0" anchor="ctr" wrap="square" lIns="54864" tIns="0" rIns="36576" bIns="0">
+          <a:bodyPr wrap="square" lIns="54864" tIns="0" rIns="36576" bIns="0" rtlCol="0" anchor="ctr">
             <a:noAutofit/>
           </a:bodyPr>
           <a:lstStyle/>
@@ -13621,7 +13641,7 @@
           </a:ln>
         </p:spPr>
         <p:txBody>
-          <a:bodyPr rtlCol="0" anchor="ctr" wrap="square" lIns="54864" tIns="0" rIns="36576" bIns="0">
+          <a:bodyPr wrap="square" lIns="54864" tIns="0" rIns="36576" bIns="0" rtlCol="0" anchor="ctr">
             <a:noAutofit/>
           </a:bodyPr>
           <a:lstStyle/>
@@ -13681,7 +13701,7 @@
           </a:ln>
         </p:spPr>
         <p:txBody>
-          <a:bodyPr rtlCol="0" anchor="ctr" wrap="square" lIns="457200" tIns="9144" rIns="45720" bIns="9144">
+          <a:bodyPr wrap="square" lIns="457200" tIns="9144" rIns="45720" bIns="9144" rtlCol="0" anchor="ctr">
             <a:noAutofit/>
           </a:bodyPr>
           <a:lstStyle/>
@@ -13699,7 +13719,7 @@
               <a:buNone/>
             </a:pPr>
             <a:r>
-              <a:rPr lang="en-IN" sz="1050" dirty="0" b="1">
+              <a:rPr lang="en-IN" sz="1050" b="1" dirty="0">
                 <a:solidFill>
                   <a:srgbClr val="1A1A1A"/>
                 </a:solidFill>
@@ -13726,7 +13746,7 @@
               <a:buNone/>
             </a:pPr>
             <a:r>
-              <a:rPr lang="en-IN" sz="1050" dirty="0" b="1">
+              <a:rPr lang="en-IN" sz="1050" b="1" dirty="0">
                 <a:solidFill>
                   <a:srgbClr val="1A1A1A"/>
                 </a:solidFill>
@@ -13768,7 +13788,7 @@
           </a:ln>
         </p:spPr>
         <p:txBody>
-          <a:bodyPr rtlCol="0" anchor="ctr" wrap="square" lIns="457200" tIns="9144" rIns="45720" bIns="9144">
+          <a:bodyPr wrap="square" lIns="457200" tIns="9144" rIns="45720" bIns="9144" rtlCol="0" anchor="ctr">
             <a:noAutofit/>
           </a:bodyPr>
           <a:lstStyle/>
@@ -13786,7 +13806,7 @@
               <a:buNone/>
             </a:pPr>
             <a:r>
-              <a:rPr lang="en-IN" sz="1050" dirty="0" b="1">
+              <a:rPr lang="en-IN" sz="1050" b="1" dirty="0">
                 <a:solidFill>
                   <a:srgbClr val="1A1A1A"/>
                 </a:solidFill>
@@ -13813,7 +13833,7 @@
               <a:buNone/>
             </a:pPr>
             <a:r>
-              <a:rPr lang="en-IN" sz="1050" dirty="0" b="1">
+              <a:rPr lang="en-IN" sz="1050" b="1" dirty="0">
                 <a:solidFill>
                   <a:srgbClr val="1A1A1A"/>
                 </a:solidFill>
@@ -13855,7 +13875,7 @@
           </a:ln>
         </p:spPr>
         <p:txBody>
-          <a:bodyPr rtlCol="0" anchor="ctr" wrap="square" lIns="457200" tIns="9144" rIns="45720" bIns="9144">
+          <a:bodyPr wrap="square" lIns="457200" tIns="9144" rIns="45720" bIns="9144" rtlCol="0" anchor="ctr">
             <a:noAutofit/>
           </a:bodyPr>
           <a:lstStyle/>
@@ -13873,7 +13893,7 @@
               <a:buNone/>
             </a:pPr>
             <a:r>
-              <a:rPr lang="en-IN" sz="1050" dirty="0" b="1">
+              <a:rPr lang="en-IN" sz="1050" b="1" dirty="0">
                 <a:solidFill>
                   <a:srgbClr val="1A1A1A"/>
                 </a:solidFill>
@@ -13900,7 +13920,7 @@
               <a:buNone/>
             </a:pPr>
             <a:r>
-              <a:rPr lang="en-IN" sz="1050" dirty="0" b="1">
+              <a:rPr lang="en-IN" sz="1050" b="1" dirty="0">
                 <a:solidFill>
                   <a:srgbClr val="1A1A1A"/>
                 </a:solidFill>
@@ -13942,7 +13962,7 @@
           </a:ln>
         </p:spPr>
         <p:txBody>
-          <a:bodyPr rtlCol="0" anchor="ctr" wrap="square" lIns="457200" tIns="9144" rIns="45720" bIns="9144">
+          <a:bodyPr wrap="square" lIns="457200" tIns="9144" rIns="45720" bIns="9144" rtlCol="0" anchor="ctr">
             <a:noAutofit/>
           </a:bodyPr>
           <a:lstStyle/>
@@ -13960,7 +13980,7 @@
               <a:buNone/>
             </a:pPr>
             <a:r>
-              <a:rPr lang="en-IN" sz="1050" dirty="0" b="1">
+              <a:rPr lang="en-IN" sz="1050" b="1" dirty="0">
                 <a:solidFill>
                   <a:srgbClr val="1A1A1A"/>
                 </a:solidFill>
@@ -13987,7 +14007,7 @@
               <a:buNone/>
             </a:pPr>
             <a:r>
-              <a:rPr lang="en-IN" sz="1050" dirty="0" b="1">
+              <a:rPr lang="en-IN" sz="1050" b="1" dirty="0">
                 <a:solidFill>
                   <a:srgbClr val="1A1A1A"/>
                 </a:solidFill>
@@ -14019,7 +14039,7 @@
           <a:noFill/>
         </p:spPr>
         <p:txBody>
-          <a:bodyPr wrap="square" lIns="0" tIns="0" rIns="0" bIns="0" anchor="ctr" rtlCol="0">
+          <a:bodyPr wrap="square" lIns="0" tIns="0" rIns="0" bIns="0" rtlCol="0" anchor="ctr">
             <a:noAutofit/>
           </a:bodyPr>
           <a:lstStyle/>
@@ -14037,7 +14057,7 @@
               <a:buNone/>
             </a:pPr>
             <a:r>
-              <a:rPr lang="en-IN" sz="1050" dirty="0" i="1">
+              <a:rPr lang="en-IN" sz="1050" i="1" dirty="0">
                 <a:solidFill>
                   <a:srgbClr val="595959"/>
                 </a:solidFill>
@@ -14563,7 +14583,7 @@
                 <a16:creationId xmlns:a16="http://schemas.microsoft.com/office/drawing/2014/main" id="{5DBCE864-823D-4A13-9607-5DA1F0ED5FB8}"/>
               </a:ext>
               <a:ext uri="{C183D7F6-B498-43B3-948B-1728B52AA6E4}">
-                <adec:decorative xmlns:adec="http://schemas.microsoft.com/office/drawing/2017/decorative" xmlns="" val="0"/>
+                <adec:decorative xmlns:adec="http://schemas.microsoft.com/office/drawing/2017/decorative" val="0"/>
               </a:ext>
             </a:extLst>
           </p:cNvPr>
@@ -14600,7 +14620,7 @@
             <a:pPr algn="ctr"/>
             <a:r>
               <a:rPr lang="en-US" dirty="0"/>
-              <a:t>Your Team Name</a:t>
+              <a:t>Your Tea Name</a:t>
             </a:r>
             <a:endParaRPr lang="en-IN" dirty="0"/>
           </a:p>
@@ -14663,11 +14683,13 @@
           </a:ln>
         </p:spPr>
         <p:txBody>
-          <a:bodyPr rtlCol="0" anchor="t" wrap="square" lIns="45720" tIns="18288" rIns="36576" bIns="9144">
+          <a:bodyPr wrap="square" lIns="45720" tIns="18288" rIns="36576" bIns="9144" rtlCol="0" anchor="t">
             <a:noAutofit/>
           </a:bodyPr>
           <a:lstStyle/>
-          <a:p/>
+          <a:p>
+            <a:endParaRPr/>
+          </a:p>
         </p:txBody>
       </p:sp>
       <p:sp>
@@ -14695,7 +14717,7 @@
           </a:ln>
         </p:spPr>
         <p:txBody>
-          <a:bodyPr rtlCol="0" anchor="ctr" wrap="square" lIns="73152" tIns="0" rIns="73152" bIns="0">
+          <a:bodyPr wrap="square" lIns="73152" tIns="0" rIns="73152" bIns="0" rtlCol="0" anchor="ctr">
             <a:noAutofit/>
           </a:bodyPr>
           <a:lstStyle/>
@@ -14713,7 +14735,7 @@
               <a:buNone/>
             </a:pPr>
             <a:r>
-              <a:rPr lang="en-IN" sz="1300" dirty="0" b="1">
+              <a:rPr lang="en-IN" sz="1300" b="1" dirty="0">
                 <a:solidFill>
                   <a:srgbClr val="FFFFFF"/>
                 </a:solidFill>
@@ -14755,11 +14777,13 @@
           </a:ln>
         </p:spPr>
         <p:txBody>
-          <a:bodyPr rtlCol="0" anchor="t" wrap="square" lIns="45720" tIns="18288" rIns="36576" bIns="9144">
+          <a:bodyPr wrap="square" lIns="45720" tIns="18288" rIns="36576" bIns="9144" rtlCol="0" anchor="t">
             <a:noAutofit/>
           </a:bodyPr>
           <a:lstStyle/>
-          <a:p/>
+          <a:p>
+            <a:endParaRPr/>
+          </a:p>
         </p:txBody>
       </p:sp>
       <p:sp>
@@ -14787,7 +14811,7 @@
           </a:ln>
         </p:spPr>
         <p:txBody>
-          <a:bodyPr rtlCol="0" anchor="ctr" wrap="square" lIns="73152" tIns="0" rIns="73152" bIns="0">
+          <a:bodyPr wrap="square" lIns="73152" tIns="0" rIns="73152" bIns="0" rtlCol="0" anchor="ctr">
             <a:noAutofit/>
           </a:bodyPr>
           <a:lstStyle/>
@@ -14805,7 +14829,7 @@
               <a:buNone/>
             </a:pPr>
             <a:r>
-              <a:rPr lang="en-IN" sz="1300" dirty="0" b="1">
+              <a:rPr lang="en-IN" sz="1300" b="1" dirty="0">
                 <a:solidFill>
                   <a:srgbClr val="FFFFFF"/>
                 </a:solidFill>
@@ -14847,11 +14871,13 @@
           </a:ln>
         </p:spPr>
         <p:txBody>
-          <a:bodyPr rtlCol="0" anchor="t" wrap="square" lIns="45720" tIns="18288" rIns="36576" bIns="9144">
+          <a:bodyPr wrap="square" lIns="45720" tIns="18288" rIns="36576" bIns="9144" rtlCol="0" anchor="t">
             <a:noAutofit/>
           </a:bodyPr>
           <a:lstStyle/>
-          <a:p/>
+          <a:p>
+            <a:endParaRPr/>
+          </a:p>
         </p:txBody>
       </p:sp>
       <p:sp>
@@ -14881,11 +14907,13 @@
           </a:ln>
         </p:spPr>
         <p:txBody>
-          <a:bodyPr rtlCol="0" anchor="t" wrap="square" lIns="45720" tIns="18288" rIns="36576" bIns="9144">
+          <a:bodyPr wrap="square" lIns="45720" tIns="18288" rIns="36576" bIns="9144" rtlCol="0" anchor="t">
             <a:noAutofit/>
           </a:bodyPr>
           <a:lstStyle/>
-          <a:p/>
+          <a:p>
+            <a:endParaRPr/>
+          </a:p>
         </p:txBody>
       </p:sp>
       <p:sp>
@@ -14915,11 +14943,13 @@
           </a:ln>
         </p:spPr>
         <p:txBody>
-          <a:bodyPr rtlCol="0" anchor="t" wrap="square" lIns="45720" tIns="18288" rIns="36576" bIns="9144">
+          <a:bodyPr wrap="square" lIns="45720" tIns="18288" rIns="36576" bIns="9144" rtlCol="0" anchor="t">
             <a:noAutofit/>
           </a:bodyPr>
           <a:lstStyle/>
-          <a:p/>
+          <a:p>
+            <a:endParaRPr/>
+          </a:p>
         </p:txBody>
       </p:sp>
       <p:sp>
@@ -14949,11 +14979,13 @@
           </a:ln>
         </p:spPr>
         <p:txBody>
-          <a:bodyPr rtlCol="0" anchor="t" wrap="square" lIns="45720" tIns="18288" rIns="36576" bIns="9144">
+          <a:bodyPr wrap="square" lIns="45720" tIns="18288" rIns="36576" bIns="9144" rtlCol="0" anchor="t">
             <a:noAutofit/>
           </a:bodyPr>
           <a:lstStyle/>
-          <a:p/>
+          <a:p>
+            <a:endParaRPr/>
+          </a:p>
         </p:txBody>
       </p:sp>
       <p:sp>
@@ -14981,7 +15013,7 @@
           </a:ln>
         </p:spPr>
         <p:txBody>
-          <a:bodyPr rtlCol="0" anchor="ctr" wrap="square" lIns="109728" tIns="0" rIns="54864" bIns="0">
+          <a:bodyPr wrap="square" lIns="109728" tIns="0" rIns="54864" bIns="0" rtlCol="0" anchor="ctr">
             <a:noAutofit/>
           </a:bodyPr>
           <a:lstStyle/>
@@ -14999,7 +15031,7 @@
               <a:buNone/>
             </a:pPr>
             <a:r>
-              <a:rPr lang="en-IN" sz="1200" dirty="0" b="1">
+              <a:rPr lang="en-IN" sz="1200" b="1" dirty="0">
                 <a:solidFill>
                   <a:srgbClr val="FFFFFF"/>
                 </a:solidFill>
@@ -15043,6 +15075,7 @@
           <a:lstStyle/>
           <a:p>
             <a:pPr algn="ctr"/>
+            <a:endParaRPr/>
           </a:p>
         </p:txBody>
       </p:sp>
@@ -15075,6 +15108,7 @@
           <a:lstStyle/>
           <a:p>
             <a:pPr algn="ctr"/>
+            <a:endParaRPr/>
           </a:p>
         </p:txBody>
       </p:sp>
@@ -15107,6 +15141,7 @@
           <a:lstStyle/>
           <a:p>
             <a:pPr algn="ctr"/>
+            <a:endParaRPr/>
           </a:p>
         </p:txBody>
       </p:sp>
@@ -15139,6 +15174,7 @@
           <a:lstStyle/>
           <a:p>
             <a:pPr algn="ctr"/>
+            <a:endParaRPr/>
           </a:p>
         </p:txBody>
       </p:sp>
@@ -15159,7 +15195,7 @@
           <a:noFill/>
         </p:spPr>
         <p:txBody>
-          <a:bodyPr wrap="square" lIns="0" tIns="0" rIns="0" bIns="0" anchor="t" rtlCol="0">
+          <a:bodyPr wrap="square" lIns="0" tIns="0" rIns="0" bIns="0" rtlCol="0" anchor="t">
             <a:noAutofit/>
           </a:bodyPr>
           <a:lstStyle/>
@@ -15270,7 +15306,7 @@
           </a:ln>
         </p:spPr>
         <p:txBody>
-          <a:bodyPr rtlCol="0" anchor="ctr" wrap="square" lIns="54864" tIns="0" rIns="36576" bIns="0">
+          <a:bodyPr wrap="square" lIns="54864" tIns="0" rIns="36576" bIns="0" rtlCol="0" anchor="ctr">
             <a:noAutofit/>
           </a:bodyPr>
           <a:lstStyle/>
@@ -15327,7 +15363,7 @@
           </a:ln>
         </p:spPr>
         <p:txBody>
-          <a:bodyPr rtlCol="0" anchor="ctr" wrap="square" lIns="54864" tIns="0" rIns="36576" bIns="0">
+          <a:bodyPr wrap="square" lIns="54864" tIns="0" rIns="36576" bIns="0" rtlCol="0" anchor="ctr">
             <a:noAutofit/>
           </a:bodyPr>
           <a:lstStyle/>
@@ -15384,7 +15420,7 @@
           </a:ln>
         </p:spPr>
         <p:txBody>
-          <a:bodyPr rtlCol="0" anchor="ctr" wrap="square" lIns="54864" tIns="0" rIns="36576" bIns="0">
+          <a:bodyPr wrap="square" lIns="54864" tIns="0" rIns="36576" bIns="0" rtlCol="0" anchor="ctr">
             <a:noAutofit/>
           </a:bodyPr>
           <a:lstStyle/>
@@ -15441,7 +15477,7 @@
           </a:ln>
         </p:spPr>
         <p:txBody>
-          <a:bodyPr rtlCol="0" anchor="ctr" wrap="square" lIns="54864" tIns="0" rIns="36576" bIns="0">
+          <a:bodyPr wrap="square" lIns="54864" tIns="0" rIns="36576" bIns="0" rtlCol="0" anchor="ctr">
             <a:noAutofit/>
           </a:bodyPr>
           <a:lstStyle/>
@@ -15498,7 +15534,7 @@
           </a:ln>
         </p:spPr>
         <p:txBody>
-          <a:bodyPr rtlCol="0" anchor="ctr" wrap="square" lIns="54864" tIns="0" rIns="36576" bIns="0">
+          <a:bodyPr wrap="square" lIns="54864" tIns="0" rIns="36576" bIns="0" rtlCol="0" anchor="ctr">
             <a:noAutofit/>
           </a:bodyPr>
           <a:lstStyle/>
@@ -15548,7 +15584,7 @@
           <a:noFill/>
         </p:spPr>
         <p:txBody>
-          <a:bodyPr wrap="square" lIns="0" tIns="0" rIns="0" bIns="0" anchor="ctr" rtlCol="0">
+          <a:bodyPr wrap="square" lIns="0" tIns="0" rIns="0" bIns="0" rtlCol="0" anchor="ctr">
             <a:noAutofit/>
           </a:bodyPr>
           <a:lstStyle/>
@@ -15566,7 +15602,7 @@
               <a:buNone/>
             </a:pPr>
             <a:r>
-              <a:rPr lang="en-IN" sz="1250" dirty="0" b="1">
+              <a:rPr lang="en-IN" sz="1250" b="1" dirty="0">
                 <a:solidFill>
                   <a:srgbClr val="2E7D32"/>
                 </a:solidFill>
@@ -15598,7 +15634,7 @@
           <a:noFill/>
         </p:spPr>
         <p:txBody>
-          <a:bodyPr wrap="square" lIns="0" tIns="0" rIns="0" bIns="0" anchor="t" rtlCol="0">
+          <a:bodyPr wrap="square" lIns="0" tIns="0" rIns="0" bIns="0" rtlCol="0" anchor="t">
             <a:noAutofit/>
           </a:bodyPr>
           <a:lstStyle/>
@@ -15682,7 +15718,7 @@
           </a:ln>
         </p:spPr>
         <p:txBody>
-          <a:bodyPr rtlCol="0" anchor="ctr" wrap="square" lIns="54864" tIns="0" rIns="36576" bIns="0">
+          <a:bodyPr wrap="square" lIns="54864" tIns="0" rIns="36576" bIns="0" rtlCol="0" anchor="ctr">
             <a:noAutofit/>
           </a:bodyPr>
           <a:lstStyle/>
@@ -15739,7 +15775,7 @@
           </a:ln>
         </p:spPr>
         <p:txBody>
-          <a:bodyPr rtlCol="0" anchor="ctr" wrap="square" lIns="54864" tIns="0" rIns="36576" bIns="0">
+          <a:bodyPr wrap="square" lIns="54864" tIns="0" rIns="36576" bIns="0" rtlCol="0" anchor="ctr">
             <a:noAutofit/>
           </a:bodyPr>
           <a:lstStyle/>
@@ -15796,7 +15832,7 @@
           </a:ln>
         </p:spPr>
         <p:txBody>
-          <a:bodyPr rtlCol="0" anchor="ctr" wrap="square" lIns="54864" tIns="0" rIns="36576" bIns="0">
+          <a:bodyPr wrap="square" lIns="54864" tIns="0" rIns="36576" bIns="0" rtlCol="0" anchor="ctr">
             <a:noAutofit/>
           </a:bodyPr>
           <a:lstStyle/>
@@ -15846,7 +15882,7 @@
           <a:noFill/>
         </p:spPr>
         <p:txBody>
-          <a:bodyPr wrap="square" lIns="0" tIns="0" rIns="0" bIns="0" anchor="ctr" rtlCol="0">
+          <a:bodyPr wrap="square" lIns="0" tIns="0" rIns="0" bIns="0" rtlCol="0" anchor="ctr">
             <a:noAutofit/>
           </a:bodyPr>
           <a:lstStyle/>
@@ -15864,7 +15900,7 @@
               <a:buNone/>
             </a:pPr>
             <a:r>
-              <a:rPr lang="en-IN" sz="1250" dirty="0" b="1">
+              <a:rPr lang="en-IN" sz="1250" b="1" dirty="0">
                 <a:solidFill>
                   <a:srgbClr val="C55A11"/>
                 </a:solidFill>
@@ -15896,7 +15932,7 @@
           <a:noFill/>
         </p:spPr>
         <p:txBody>
-          <a:bodyPr wrap="square" lIns="0" tIns="0" rIns="0" bIns="0" anchor="t" rtlCol="0">
+          <a:bodyPr wrap="square" lIns="0" tIns="0" rIns="0" bIns="0" rtlCol="0" anchor="t">
             <a:noAutofit/>
           </a:bodyPr>
           <a:lstStyle/>
@@ -15980,7 +16016,7 @@
           </a:ln>
         </p:spPr>
         <p:txBody>
-          <a:bodyPr rtlCol="0" anchor="ctr" wrap="square" lIns="54864" tIns="0" rIns="36576" bIns="0">
+          <a:bodyPr wrap="square" lIns="54864" tIns="0" rIns="36576" bIns="0" rtlCol="0" anchor="ctr">
             <a:noAutofit/>
           </a:bodyPr>
           <a:lstStyle/>
@@ -16037,7 +16073,7 @@
           </a:ln>
         </p:spPr>
         <p:txBody>
-          <a:bodyPr rtlCol="0" anchor="ctr" wrap="square" lIns="54864" tIns="0" rIns="36576" bIns="0">
+          <a:bodyPr wrap="square" lIns="54864" tIns="0" rIns="36576" bIns="0" rtlCol="0" anchor="ctr">
             <a:noAutofit/>
           </a:bodyPr>
           <a:lstStyle/>
@@ -16094,7 +16130,7 @@
           </a:ln>
         </p:spPr>
         <p:txBody>
-          <a:bodyPr rtlCol="0" anchor="ctr" wrap="square" lIns="54864" tIns="0" rIns="36576" bIns="0">
+          <a:bodyPr wrap="square" lIns="54864" tIns="0" rIns="36576" bIns="0" rtlCol="0" anchor="ctr">
             <a:noAutofit/>
           </a:bodyPr>
           <a:lstStyle/>
@@ -16144,7 +16180,7 @@
           <a:noFill/>
         </p:spPr>
         <p:txBody>
-          <a:bodyPr wrap="square" lIns="0" tIns="0" rIns="0" bIns="0" anchor="ctr" rtlCol="0">
+          <a:bodyPr wrap="square" lIns="0" tIns="0" rIns="0" bIns="0" rtlCol="0" anchor="ctr">
             <a:noAutofit/>
           </a:bodyPr>
           <a:lstStyle/>
@@ -16162,7 +16198,7 @@
               <a:buNone/>
             </a:pPr>
             <a:r>
-              <a:rPr lang="en-IN" sz="1250" dirty="0" b="1">
+              <a:rPr lang="en-IN" sz="1250" b="1" dirty="0">
                 <a:solidFill>
                   <a:srgbClr val="5B3FA0"/>
                 </a:solidFill>
@@ -16194,7 +16230,7 @@
           <a:noFill/>
         </p:spPr>
         <p:txBody>
-          <a:bodyPr wrap="square" lIns="0" tIns="0" rIns="0" bIns="0" anchor="t" rtlCol="0">
+          <a:bodyPr wrap="square" lIns="0" tIns="0" rIns="0" bIns="0" rtlCol="0" anchor="t">
             <a:noAutofit/>
           </a:bodyPr>
           <a:lstStyle/>
@@ -16278,7 +16314,7 @@
           </a:ln>
         </p:spPr>
         <p:txBody>
-          <a:bodyPr rtlCol="0" anchor="ctr" wrap="square" lIns="54864" tIns="0" rIns="36576" bIns="0">
+          <a:bodyPr wrap="square" lIns="54864" tIns="0" rIns="36576" bIns="0" rtlCol="0" anchor="ctr">
             <a:noAutofit/>
           </a:bodyPr>
           <a:lstStyle/>
@@ -16335,7 +16371,7 @@
           </a:ln>
         </p:spPr>
         <p:txBody>
-          <a:bodyPr rtlCol="0" anchor="ctr" wrap="square" lIns="54864" tIns="0" rIns="36576" bIns="0">
+          <a:bodyPr wrap="square" lIns="54864" tIns="0" rIns="36576" bIns="0" rtlCol="0" anchor="ctr">
             <a:noAutofit/>
           </a:bodyPr>
           <a:lstStyle/>
@@ -16392,7 +16428,7 @@
           </a:ln>
         </p:spPr>
         <p:txBody>
-          <a:bodyPr rtlCol="0" anchor="ctr" wrap="square" lIns="54864" tIns="0" rIns="36576" bIns="0">
+          <a:bodyPr wrap="square" lIns="54864" tIns="0" rIns="36576" bIns="0" rtlCol="0" anchor="ctr">
             <a:noAutofit/>
           </a:bodyPr>
           <a:lstStyle/>
@@ -16452,7 +16488,7 @@
           </a:ln>
         </p:spPr>
         <p:txBody>
-          <a:bodyPr rtlCol="0" anchor="ctr" wrap="square" lIns="73152" tIns="9144" rIns="45720" bIns="9144">
+          <a:bodyPr wrap="square" lIns="73152" tIns="9144" rIns="45720" bIns="9144" rtlCol="0" anchor="ctr">
             <a:noAutofit/>
           </a:bodyPr>
           <a:lstStyle/>
@@ -16539,7 +16575,7 @@
           </a:ln>
         </p:spPr>
         <p:txBody>
-          <a:bodyPr rtlCol="0" anchor="ctr" wrap="square" lIns="73152" tIns="9144" rIns="45720" bIns="9144">
+          <a:bodyPr wrap="square" lIns="73152" tIns="9144" rIns="45720" bIns="9144" rtlCol="0" anchor="ctr">
             <a:noAutofit/>
           </a:bodyPr>
           <a:lstStyle/>
@@ -16626,7 +16662,7 @@
           </a:ln>
         </p:spPr>
         <p:txBody>
-          <a:bodyPr rtlCol="0" anchor="ctr" wrap="square" lIns="73152" tIns="9144" rIns="45720" bIns="9144">
+          <a:bodyPr wrap="square" lIns="73152" tIns="9144" rIns="45720" bIns="9144" rtlCol="0" anchor="ctr">
             <a:noAutofit/>
           </a:bodyPr>
           <a:lstStyle/>
@@ -16713,7 +16749,7 @@
           </a:ln>
         </p:spPr>
         <p:txBody>
-          <a:bodyPr rtlCol="0" anchor="ctr" wrap="square" lIns="73152" tIns="9144" rIns="45720" bIns="9144">
+          <a:bodyPr wrap="square" lIns="73152" tIns="9144" rIns="45720" bIns="9144" rtlCol="0" anchor="ctr">
             <a:noAutofit/>
           </a:bodyPr>
           <a:lstStyle/>
@@ -16790,7 +16826,7 @@
           <a:noFill/>
         </p:spPr>
         <p:txBody>
-          <a:bodyPr wrap="square" lIns="0" tIns="0" rIns="0" bIns="0" anchor="ctr" rtlCol="0">
+          <a:bodyPr wrap="square" lIns="0" tIns="0" rIns="0" bIns="0" rtlCol="0" anchor="ctr">
             <a:noAutofit/>
           </a:bodyPr>
           <a:lstStyle/>
@@ -16808,7 +16844,7 @@
               <a:buNone/>
             </a:pPr>
             <a:r>
-              <a:rPr lang="en-IN" sz="1050" dirty="0" i="1">
+              <a:rPr lang="en-IN" sz="1050" i="1" dirty="0">
                 <a:solidFill>
                   <a:srgbClr val="595959"/>
                 </a:solidFill>
@@ -16919,6 +16955,57 @@
           </a:prstGeom>
         </p:spPr>
       </p:pic>
+      <p:sp>
+        <p:nvSpPr>
+          <p:cNvPr id="3" name="Oval 2" descr="Your startup LOGO">
+            <a:extLst>
+              <a:ext uri="{FF2B5EF4-FFF2-40B4-BE49-F238E27FC236}">
+                <a16:creationId xmlns:a16="http://schemas.microsoft.com/office/drawing/2014/main" id="{AC8DCA60-E6A6-4893-5136-A7E64EEBDBF1}"/>
+              </a:ext>
+              <a:ext uri="{C183D7F6-B498-43B3-948B-1728B52AA6E4}">
+                <adec:decorative xmlns:adec="http://schemas.microsoft.com/office/drawing/2017/decorative" val="0"/>
+              </a:ext>
+            </a:extLst>
+          </p:cNvPr>
+          <p:cNvSpPr/>
+          <p:nvPr/>
+        </p:nvSpPr>
+        <p:spPr>
+          <a:xfrm>
+            <a:off x="329773" y="269203"/>
+            <a:ext cx="1251857" cy="807334"/>
+          </a:xfrm>
+          <a:prstGeom prst="ellipse">
+            <a:avLst/>
+          </a:prstGeom>
+        </p:spPr>
+        <p:style>
+          <a:lnRef idx="2">
+            <a:schemeClr val="accent4"/>
+          </a:lnRef>
+          <a:fillRef idx="1">
+            <a:schemeClr val="lt1"/>
+          </a:fillRef>
+          <a:effectRef idx="0">
+            <a:schemeClr val="accent4"/>
+          </a:effectRef>
+          <a:fontRef idx="minor">
+            <a:schemeClr val="dk1"/>
+          </a:fontRef>
+        </p:style>
+        <p:txBody>
+          <a:bodyPr rtlCol="0" anchor="ctr"/>
+          <a:lstStyle/>
+          <a:p>
+            <a:pPr algn="ctr"/>
+            <a:r>
+              <a:rPr lang="en-US" dirty="0" err="1"/>
+              <a:t>AlphaQ</a:t>
+            </a:r>
+            <a:endParaRPr lang="en-IN" dirty="0"/>
+          </a:p>
+        </p:txBody>
+      </p:sp>
     </p:spTree>
     <p:extLst>
       <p:ext uri="{BB962C8B-B14F-4D97-AF65-F5344CB8AC3E}">
@@ -17254,15 +17341,1674 @@
           </a:p>
         </p:txBody>
       </p:sp>
-      <p:sp>
-        <p:nvSpPr>
-          <p:cNvPr id="9" name="Oval 8" descr="Your startup LOGO">
+      <p:pic>
+        <p:nvPicPr>
+          <p:cNvPr id="12" name="Picture 11"/>
+          <p:cNvPicPr>
+            <a:picLocks noChangeAspect="1"/>
+          </p:cNvPicPr>
+          <p:nvPr/>
+        </p:nvPicPr>
+        <p:blipFill>
+          <a:blip r:embed="rId3">
+            <a:extLst>
+              <a:ext uri="{28A0092B-C50C-407E-A947-70E740481C1C}">
+                <a14:useLocalDpi xmlns:a14="http://schemas.microsoft.com/office/drawing/2010/main" val="0"/>
+              </a:ext>
+            </a:extLst>
+          </a:blip>
+          <a:stretch>
+            <a:fillRect/>
+          </a:stretch>
+        </p:blipFill>
+        <p:spPr>
+          <a:xfrm>
+            <a:off x="9780086" y="1500"/>
+            <a:ext cx="2249850" cy="1062337"/>
+          </a:xfrm>
+          <a:prstGeom prst="rect">
+            <a:avLst/>
+          </a:prstGeom>
+        </p:spPr>
+      </p:pic>
+      <p:sp>
+        <p:nvSpPr>
+          <p:cNvPr id="17411" name="FD_R"/>
+          <p:cNvSpPr/>
+          <p:nvPr/>
+        </p:nvSpPr>
+        <p:spPr>
+          <a:xfrm>
+            <a:off x="292608" y="1755648"/>
+            <a:ext cx="11695176" cy="3200400"/>
+          </a:xfrm>
+          <a:prstGeom prst="roundRect">
+            <a:avLst>
+              <a:gd name="adj" fmla="val 3428"/>
+            </a:avLst>
+          </a:prstGeom>
+          <a:solidFill>
+            <a:srgbClr val="F6F8FC"/>
+          </a:solidFill>
+          <a:ln w="19050">
+            <a:solidFill>
+              <a:srgbClr val="1F497D"/>
+            </a:solidFill>
+            <a:round/>
+          </a:ln>
+        </p:spPr>
+        <p:txBody>
+          <a:bodyPr wrap="square" lIns="45720" tIns="18288" rIns="36576" bIns="9144" rtlCol="0" anchor="t">
+            <a:noAutofit/>
+          </a:bodyPr>
+          <a:lstStyle/>
+          <a:p>
+            <a:endParaRPr/>
+          </a:p>
+        </p:txBody>
+      </p:sp>
+      <p:sp>
+        <p:nvSpPr>
+          <p:cNvPr id="17412" name="FD_R_hdr"/>
+          <p:cNvSpPr/>
+          <p:nvPr/>
+        </p:nvSpPr>
+        <p:spPr>
+          <a:xfrm>
+            <a:off x="292608" y="1755648"/>
+            <a:ext cx="11695176" cy="530352"/>
+          </a:xfrm>
+          <a:prstGeom prst="round2SameRect">
+            <a:avLst>
+              <a:gd name="adj1" fmla="val 20689"/>
+              <a:gd name="adj2" fmla="val 0"/>
+            </a:avLst>
+          </a:prstGeom>
+          <a:solidFill>
+            <a:srgbClr val="1F497D"/>
+          </a:solidFill>
+          <a:ln>
+            <a:noFill/>
+          </a:ln>
+        </p:spPr>
+        <p:txBody>
+          <a:bodyPr wrap="square" lIns="73152" tIns="0" rIns="73152" bIns="0" rtlCol="0" anchor="ctr">
+            <a:noAutofit/>
+          </a:bodyPr>
+          <a:lstStyle/>
+          <a:p>
+            <a:pPr marL="0" indent="0" algn="ctr">
+              <a:lnSpc>
+                <a:spcPct val="100000"/>
+              </a:lnSpc>
+              <a:spcBef>
+                <a:spcPts val="0"/>
+              </a:spcBef>
+              <a:spcAft>
+                <a:spcPts val="0"/>
+              </a:spcAft>
+              <a:buNone/>
+            </a:pPr>
+            <a:r>
+              <a:rPr lang="en-IN" sz="1300" b="1" dirty="0">
+                <a:solidFill>
+                  <a:srgbClr val="FFFFFF"/>
+                </a:solidFill>
+                <a:latin typeface="Arial"/>
+                <a:ea typeface="Arial"/>
+                <a:cs typeface="Arial"/>
+                <a:sym typeface="Arial"/>
+              </a:rPr>
+              <a:t>Details / Links of the reference and research work</a:t>
+            </a:r>
+            <a:endParaRPr lang="en-IN" sz="1300" dirty="0"/>
+          </a:p>
+        </p:txBody>
+      </p:sp>
+      <p:sp>
+        <p:nvSpPr>
+          <p:cNvPr id="17413" name="FD_K"/>
+          <p:cNvSpPr/>
+          <p:nvPr/>
+        </p:nvSpPr>
+        <p:spPr>
+          <a:xfrm>
+            <a:off x="292608" y="5065776"/>
+            <a:ext cx="11695176" cy="758952"/>
+          </a:xfrm>
+          <a:prstGeom prst="roundRect">
+            <a:avLst>
+              <a:gd name="adj" fmla="val 12048"/>
+            </a:avLst>
+          </a:prstGeom>
+          <a:solidFill>
+            <a:srgbClr val="F9F7FD"/>
+          </a:solidFill>
+          <a:ln w="15875">
+            <a:solidFill>
+              <a:srgbClr val="5B3FA0"/>
+            </a:solidFill>
+            <a:round/>
+          </a:ln>
+        </p:spPr>
+        <p:txBody>
+          <a:bodyPr wrap="square" lIns="45720" tIns="18288" rIns="36576" bIns="9144" rtlCol="0" anchor="t">
+            <a:noAutofit/>
+          </a:bodyPr>
+          <a:lstStyle/>
+          <a:p>
+            <a:endParaRPr/>
+          </a:p>
+        </p:txBody>
+      </p:sp>
+      <p:sp>
+        <p:nvSpPr>
+          <p:cNvPr id="17414" name="FD_K_hdr"/>
+          <p:cNvSpPr/>
+          <p:nvPr/>
+        </p:nvSpPr>
+        <p:spPr>
+          <a:xfrm>
+            <a:off x="292608" y="5065776"/>
+            <a:ext cx="11695176" cy="246888"/>
+          </a:xfrm>
+          <a:prstGeom prst="round2SameRect">
+            <a:avLst>
+              <a:gd name="adj1" fmla="val 37037"/>
+              <a:gd name="adj2" fmla="val 0"/>
+            </a:avLst>
+          </a:prstGeom>
+          <a:solidFill>
+            <a:srgbClr val="5B3FA0"/>
+          </a:solidFill>
+          <a:ln>
+            <a:noFill/>
+          </a:ln>
+        </p:spPr>
+        <p:txBody>
+          <a:bodyPr wrap="square" lIns="109728" tIns="0" rIns="54864" bIns="0" rtlCol="0" anchor="ctr">
+            <a:noAutofit/>
+          </a:bodyPr>
+          <a:lstStyle/>
+          <a:p>
+            <a:pPr marL="0" indent="0" algn="l">
+              <a:lnSpc>
+                <a:spcPct val="100000"/>
+              </a:lnSpc>
+              <a:spcBef>
+                <a:spcPts val="0"/>
+              </a:spcBef>
+              <a:spcAft>
+                <a:spcPts val="0"/>
+              </a:spcAft>
+              <a:buNone/>
+            </a:pPr>
+            <a:r>
+              <a:rPr lang="en-IN" sz="1200" b="1" dirty="0">
+                <a:solidFill>
+                  <a:srgbClr val="FFFFFF"/>
+                </a:solidFill>
+                <a:latin typeface="Arial"/>
+                <a:ea typeface="Arial"/>
+                <a:cs typeface="Arial"/>
+                <a:sym typeface="Arial"/>
+              </a:rPr>
+              <a:t>Links (demo video to be added)</a:t>
+            </a:r>
+            <a:endParaRPr lang="en-IN" sz="1200" dirty="0"/>
+          </a:p>
+        </p:txBody>
+      </p:sp>
+      <p:sp>
+        <p:nvSpPr>
+          <p:cNvPr id="17415" name="FD_R00"/>
+          <p:cNvSpPr/>
+          <p:nvPr/>
+        </p:nvSpPr>
+        <p:spPr>
+          <a:xfrm>
+            <a:off x="384048" y="2377440"/>
+            <a:ext cx="5710428" cy="365760"/>
+          </a:xfrm>
+          <a:prstGeom prst="roundRect">
+            <a:avLst>
+              <a:gd name="adj" fmla="val 12500"/>
+            </a:avLst>
+          </a:prstGeom>
+          <a:solidFill>
+            <a:srgbClr val="FFFFFF"/>
+          </a:solidFill>
+          <a:ln w="6350">
+            <a:solidFill>
+              <a:srgbClr val="1F497D"/>
+            </a:solidFill>
+            <a:round/>
+          </a:ln>
+        </p:spPr>
+        <p:txBody>
+          <a:bodyPr wrap="square" lIns="73152" tIns="9144" rIns="54864" bIns="9144" rtlCol="0" anchor="ctr">
+            <a:noAutofit/>
+          </a:bodyPr>
+          <a:lstStyle/>
+          <a:p>
+            <a:pPr marL="0" indent="0" algn="l">
+              <a:lnSpc>
+                <a:spcPct val="100000"/>
+              </a:lnSpc>
+              <a:spcBef>
+                <a:spcPts val="0"/>
+              </a:spcBef>
+              <a:spcAft>
+                <a:spcPts val="0"/>
+              </a:spcAft>
+              <a:buNone/>
+            </a:pPr>
+            <a:r>
+              <a:rPr lang="en-IN" sz="950" dirty="0">
+                <a:solidFill>
+                  <a:srgbClr val="1A1A1A"/>
+                </a:solidFill>
+                <a:latin typeface="Arial"/>
+                <a:ea typeface="Arial"/>
+                <a:cs typeface="Arial"/>
+                <a:sym typeface="Arial"/>
+              </a:rPr>
+              <a:t>Marx &amp; Langenheim (1959). Reservoir heating by hot fluid injection. Trans. AIME 216.</a:t>
+            </a:r>
+            <a:endParaRPr lang="en-IN" sz="950" dirty="0"/>
+          </a:p>
+          <a:p>
+            <a:pPr marL="0" indent="0" algn="l">
+              <a:lnSpc>
+                <a:spcPct val="100000"/>
+              </a:lnSpc>
+              <a:spcBef>
+                <a:spcPts val="0"/>
+              </a:spcBef>
+              <a:spcAft>
+                <a:spcPts val="0"/>
+              </a:spcAft>
+              <a:buNone/>
+            </a:pPr>
+            <a:r>
+              <a:rPr lang="en-IN" sz="800" dirty="0">
+                <a:solidFill>
+                  <a:srgbClr val="0563C1"/>
+                </a:solidFill>
+                <a:latin typeface="Arial"/>
+                <a:ea typeface="Arial"/>
+                <a:cs typeface="Arial"/>
+                <a:sym typeface="Arial"/>
+                <a:hlinkClick r:id="rId4"/>
+              </a:rPr>
+              <a:t>https://doi.org/10.2118/1266-G</a:t>
+            </a:r>
+            <a:endParaRPr lang="en-IN" sz="800" dirty="0"/>
+          </a:p>
+        </p:txBody>
+      </p:sp>
+      <p:sp>
+        <p:nvSpPr>
+          <p:cNvPr id="17416" name="FD_R01"/>
+          <p:cNvSpPr/>
+          <p:nvPr/>
+        </p:nvSpPr>
+        <p:spPr>
+          <a:xfrm>
+            <a:off x="384048" y="2798064"/>
+            <a:ext cx="5710428" cy="365760"/>
+          </a:xfrm>
+          <a:prstGeom prst="roundRect">
+            <a:avLst>
+              <a:gd name="adj" fmla="val 12500"/>
+            </a:avLst>
+          </a:prstGeom>
+          <a:solidFill>
+            <a:srgbClr val="FFFFFF"/>
+          </a:solidFill>
+          <a:ln w="6350">
+            <a:solidFill>
+              <a:srgbClr val="1F497D"/>
+            </a:solidFill>
+            <a:round/>
+          </a:ln>
+        </p:spPr>
+        <p:txBody>
+          <a:bodyPr wrap="square" lIns="73152" tIns="9144" rIns="54864" bIns="9144" rtlCol="0" anchor="ctr">
+            <a:noAutofit/>
+          </a:bodyPr>
+          <a:lstStyle/>
+          <a:p>
+            <a:pPr marL="0" indent="0" algn="l">
+              <a:lnSpc>
+                <a:spcPct val="100000"/>
+              </a:lnSpc>
+              <a:spcBef>
+                <a:spcPts val="0"/>
+              </a:spcBef>
+              <a:spcAft>
+                <a:spcPts val="0"/>
+              </a:spcAft>
+              <a:buNone/>
+            </a:pPr>
+            <a:r>
+              <a:rPr lang="en-IN" sz="950" dirty="0">
+                <a:solidFill>
+                  <a:srgbClr val="1A1A1A"/>
+                </a:solidFill>
+                <a:latin typeface="Arial"/>
+                <a:ea typeface="Arial"/>
+                <a:cs typeface="Arial"/>
+                <a:sym typeface="Arial"/>
+              </a:rPr>
+              <a:t>Boberg &amp; Lantz (1966). Thermally stimulated well rate — via SPE PEH ch. 15 (Prats).</a:t>
+            </a:r>
+            <a:endParaRPr lang="en-IN" sz="950" dirty="0"/>
+          </a:p>
+          <a:p>
+            <a:pPr marL="0" indent="0" algn="l">
+              <a:lnSpc>
+                <a:spcPct val="100000"/>
+              </a:lnSpc>
+              <a:spcBef>
+                <a:spcPts val="0"/>
+              </a:spcBef>
+              <a:spcAft>
+                <a:spcPts val="0"/>
+              </a:spcAft>
+              <a:buNone/>
+            </a:pPr>
+            <a:r>
+              <a:rPr lang="en-IN" sz="800" dirty="0">
+                <a:solidFill>
+                  <a:srgbClr val="0563C1"/>
+                </a:solidFill>
+                <a:latin typeface="Arial"/>
+                <a:ea typeface="Arial"/>
+                <a:cs typeface="Arial"/>
+                <a:sym typeface="Arial"/>
+                <a:hlinkClick r:id="rId5"/>
+              </a:rPr>
+              <a:t>https://petrowiki.org/PEH:Thermal_Recovery_by_Steam_Injection</a:t>
+            </a:r>
+            <a:endParaRPr lang="en-IN" sz="800" dirty="0"/>
+          </a:p>
+        </p:txBody>
+      </p:sp>
+      <p:sp>
+        <p:nvSpPr>
+          <p:cNvPr id="17417" name="FD_R02"/>
+          <p:cNvSpPr/>
+          <p:nvPr/>
+        </p:nvSpPr>
+        <p:spPr>
+          <a:xfrm>
+            <a:off x="384048" y="3218688"/>
+            <a:ext cx="5710428" cy="365760"/>
+          </a:xfrm>
+          <a:prstGeom prst="roundRect">
+            <a:avLst>
+              <a:gd name="adj" fmla="val 12500"/>
+            </a:avLst>
+          </a:prstGeom>
+          <a:solidFill>
+            <a:srgbClr val="FFFFFF"/>
+          </a:solidFill>
+          <a:ln w="6350">
+            <a:solidFill>
+              <a:srgbClr val="1F497D"/>
+            </a:solidFill>
+            <a:round/>
+          </a:ln>
+        </p:spPr>
+        <p:txBody>
+          <a:bodyPr wrap="square" lIns="73152" tIns="9144" rIns="54864" bIns="9144" rtlCol="0" anchor="ctr">
+            <a:noAutofit/>
+          </a:bodyPr>
+          <a:lstStyle/>
+          <a:p>
+            <a:pPr marL="0" indent="0" algn="l">
+              <a:lnSpc>
+                <a:spcPct val="100000"/>
+              </a:lnSpc>
+              <a:spcBef>
+                <a:spcPts val="0"/>
+              </a:spcBef>
+              <a:spcAft>
+                <a:spcPts val="0"/>
+              </a:spcAft>
+              <a:buNone/>
+            </a:pPr>
+            <a:r>
+              <a:rPr lang="en-IN" sz="950" dirty="0">
+                <a:solidFill>
+                  <a:srgbClr val="1A1A1A"/>
+                </a:solidFill>
+                <a:latin typeface="Arial"/>
+                <a:ea typeface="Arial"/>
+                <a:cs typeface="Arial"/>
+                <a:sym typeface="Arial"/>
+              </a:rPr>
+              <a:t>Vogel (1968). Inflow performance relationships for solution-gas drive wells. JPT.</a:t>
+            </a:r>
+            <a:endParaRPr lang="en-IN" sz="950" dirty="0"/>
+          </a:p>
+          <a:p>
+            <a:pPr marL="0" indent="0" algn="l">
+              <a:lnSpc>
+                <a:spcPct val="100000"/>
+              </a:lnSpc>
+              <a:spcBef>
+                <a:spcPts val="0"/>
+              </a:spcBef>
+              <a:spcAft>
+                <a:spcPts val="0"/>
+              </a:spcAft>
+              <a:buNone/>
+            </a:pPr>
+            <a:r>
+              <a:rPr lang="en-IN" sz="800" dirty="0">
+                <a:solidFill>
+                  <a:srgbClr val="0563C1"/>
+                </a:solidFill>
+                <a:latin typeface="Arial"/>
+                <a:ea typeface="Arial"/>
+                <a:cs typeface="Arial"/>
+                <a:sym typeface="Arial"/>
+                <a:hlinkClick r:id="rId6"/>
+              </a:rPr>
+              <a:t>https://onepetro.org/JPT/article/20/01/83/163252</a:t>
+            </a:r>
+            <a:endParaRPr lang="en-IN" sz="800" dirty="0"/>
+          </a:p>
+        </p:txBody>
+      </p:sp>
+      <p:sp>
+        <p:nvSpPr>
+          <p:cNvPr id="17418" name="FD_R03"/>
+          <p:cNvSpPr/>
+          <p:nvPr/>
+        </p:nvSpPr>
+        <p:spPr>
+          <a:xfrm>
+            <a:off x="384048" y="3639312"/>
+            <a:ext cx="5710428" cy="365760"/>
+          </a:xfrm>
+          <a:prstGeom prst="roundRect">
+            <a:avLst>
+              <a:gd name="adj" fmla="val 12500"/>
+            </a:avLst>
+          </a:prstGeom>
+          <a:solidFill>
+            <a:srgbClr val="FFFFFF"/>
+          </a:solidFill>
+          <a:ln w="6350">
+            <a:solidFill>
+              <a:srgbClr val="1F497D"/>
+            </a:solidFill>
+            <a:round/>
+          </a:ln>
+        </p:spPr>
+        <p:txBody>
+          <a:bodyPr wrap="square" lIns="73152" tIns="9144" rIns="54864" bIns="9144" rtlCol="0" anchor="ctr">
+            <a:noAutofit/>
+          </a:bodyPr>
+          <a:lstStyle/>
+          <a:p>
+            <a:pPr marL="0" indent="0" algn="l">
+              <a:lnSpc>
+                <a:spcPct val="100000"/>
+              </a:lnSpc>
+              <a:spcBef>
+                <a:spcPts val="0"/>
+              </a:spcBef>
+              <a:spcAft>
+                <a:spcPts val="0"/>
+              </a:spcAft>
+              <a:buNone/>
+            </a:pPr>
+            <a:r>
+              <a:rPr lang="en-IN" sz="950" dirty="0">
+                <a:solidFill>
+                  <a:srgbClr val="1A1A1A"/>
+                </a:solidFill>
+                <a:latin typeface="Arial"/>
+                <a:ea typeface="Arial"/>
+                <a:cs typeface="Arial"/>
+                <a:sym typeface="Arial"/>
+              </a:rPr>
+              <a:t>Gibbs (1963). Predicting the behavior of sucker-rod pumping systems. JPT 15.</a:t>
+            </a:r>
+            <a:endParaRPr lang="en-IN" sz="950" dirty="0"/>
+          </a:p>
+          <a:p>
+            <a:pPr marL="0" indent="0" algn="l">
+              <a:lnSpc>
+                <a:spcPct val="100000"/>
+              </a:lnSpc>
+              <a:spcBef>
+                <a:spcPts val="0"/>
+              </a:spcBef>
+              <a:spcAft>
+                <a:spcPts val="0"/>
+              </a:spcAft>
+              <a:buNone/>
+            </a:pPr>
+            <a:r>
+              <a:rPr lang="en-IN" sz="800" dirty="0">
+                <a:solidFill>
+                  <a:srgbClr val="0563C1"/>
+                </a:solidFill>
+                <a:latin typeface="Arial"/>
+                <a:ea typeface="Arial"/>
+                <a:cs typeface="Arial"/>
+                <a:sym typeface="Arial"/>
+                <a:hlinkClick r:id="rId7"/>
+              </a:rPr>
+              <a:t>https://doi.org/10.2118/588-PA</a:t>
+            </a:r>
+            <a:endParaRPr lang="en-IN" sz="800" dirty="0"/>
+          </a:p>
+        </p:txBody>
+      </p:sp>
+      <p:sp>
+        <p:nvSpPr>
+          <p:cNvPr id="17419" name="FD_R04"/>
+          <p:cNvSpPr/>
+          <p:nvPr/>
+        </p:nvSpPr>
+        <p:spPr>
+          <a:xfrm>
+            <a:off x="384048" y="4059936"/>
+            <a:ext cx="5710428" cy="365760"/>
+          </a:xfrm>
+          <a:prstGeom prst="roundRect">
+            <a:avLst>
+              <a:gd name="adj" fmla="val 12500"/>
+            </a:avLst>
+          </a:prstGeom>
+          <a:solidFill>
+            <a:srgbClr val="FFFFFF"/>
+          </a:solidFill>
+          <a:ln w="6350">
+            <a:solidFill>
+              <a:srgbClr val="1F497D"/>
+            </a:solidFill>
+            <a:round/>
+          </a:ln>
+        </p:spPr>
+        <p:txBody>
+          <a:bodyPr wrap="square" lIns="73152" tIns="9144" rIns="54864" bIns="9144" rtlCol="0" anchor="ctr">
+            <a:noAutofit/>
+          </a:bodyPr>
+          <a:lstStyle/>
+          <a:p>
+            <a:pPr marL="0" indent="0" algn="l">
+              <a:lnSpc>
+                <a:spcPct val="100000"/>
+              </a:lnSpc>
+              <a:spcBef>
+                <a:spcPts val="0"/>
+              </a:spcBef>
+              <a:spcAft>
+                <a:spcPts val="0"/>
+              </a:spcAft>
+              <a:buNone/>
+            </a:pPr>
+            <a:r>
+              <a:rPr lang="en-IN" sz="950" dirty="0">
+                <a:solidFill>
+                  <a:srgbClr val="1A1A1A"/>
+                </a:solidFill>
+                <a:latin typeface="Arial"/>
+                <a:ea typeface="Arial"/>
+                <a:cs typeface="Arial"/>
+                <a:sym typeface="Arial"/>
+              </a:rPr>
+              <a:t>ASTM D341 viscosity–temperature charts (Walther); Pal &amp; Rhodes (1989) emulsions.</a:t>
+            </a:r>
+            <a:endParaRPr lang="en-IN" sz="950" dirty="0"/>
+          </a:p>
+          <a:p>
+            <a:pPr marL="0" indent="0" algn="l">
+              <a:lnSpc>
+                <a:spcPct val="100000"/>
+              </a:lnSpc>
+              <a:spcBef>
+                <a:spcPts val="0"/>
+              </a:spcBef>
+              <a:spcAft>
+                <a:spcPts val="0"/>
+              </a:spcAft>
+              <a:buNone/>
+            </a:pPr>
+            <a:r>
+              <a:rPr lang="en-IN" sz="800" dirty="0">
+                <a:solidFill>
+                  <a:srgbClr val="0563C1"/>
+                </a:solidFill>
+                <a:latin typeface="Arial"/>
+                <a:ea typeface="Arial"/>
+                <a:cs typeface="Arial"/>
+                <a:sym typeface="Arial"/>
+                <a:hlinkClick r:id="rId8"/>
+              </a:rPr>
+              <a:t>https://www.astm.org/Standards/D341.htm</a:t>
+            </a:r>
+            <a:endParaRPr lang="en-IN" sz="800" dirty="0"/>
+          </a:p>
+        </p:txBody>
+      </p:sp>
+      <p:sp>
+        <p:nvSpPr>
+          <p:cNvPr id="17420" name="FD_R05"/>
+          <p:cNvSpPr/>
+          <p:nvPr/>
+        </p:nvSpPr>
+        <p:spPr>
+          <a:xfrm>
+            <a:off x="384048" y="4480560"/>
+            <a:ext cx="5710428" cy="365760"/>
+          </a:xfrm>
+          <a:prstGeom prst="roundRect">
+            <a:avLst>
+              <a:gd name="adj" fmla="val 12500"/>
+            </a:avLst>
+          </a:prstGeom>
+          <a:solidFill>
+            <a:srgbClr val="FFFFFF"/>
+          </a:solidFill>
+          <a:ln w="6350">
+            <a:solidFill>
+              <a:srgbClr val="1F497D"/>
+            </a:solidFill>
+            <a:round/>
+          </a:ln>
+        </p:spPr>
+        <p:txBody>
+          <a:bodyPr wrap="square" lIns="73152" tIns="9144" rIns="54864" bIns="9144" rtlCol="0" anchor="ctr">
+            <a:noAutofit/>
+          </a:bodyPr>
+          <a:lstStyle/>
+          <a:p>
+            <a:pPr marL="0" indent="0" algn="l">
+              <a:lnSpc>
+                <a:spcPct val="100000"/>
+              </a:lnSpc>
+              <a:spcBef>
+                <a:spcPts val="0"/>
+              </a:spcBef>
+              <a:spcAft>
+                <a:spcPts val="0"/>
+              </a:spcAft>
+              <a:buNone/>
+            </a:pPr>
+            <a:r>
+              <a:rPr lang="en-IN" sz="950" dirty="0">
+                <a:solidFill>
+                  <a:srgbClr val="1A1A1A"/>
+                </a:solidFill>
+                <a:latin typeface="Arial"/>
+                <a:ea typeface="Arial"/>
+                <a:cs typeface="Arial"/>
+                <a:sym typeface="Arial"/>
+              </a:rPr>
+              <a:t>API Spec 11E / RP 11L — pumping-unit ratings and rod-string design.</a:t>
+            </a:r>
+            <a:endParaRPr lang="en-IN" sz="950" dirty="0"/>
+          </a:p>
+          <a:p>
+            <a:pPr marL="0" indent="0" algn="l">
+              <a:lnSpc>
+                <a:spcPct val="100000"/>
+              </a:lnSpc>
+              <a:spcBef>
+                <a:spcPts val="0"/>
+              </a:spcBef>
+              <a:spcAft>
+                <a:spcPts val="0"/>
+              </a:spcAft>
+              <a:buNone/>
+            </a:pPr>
+            <a:r>
+              <a:rPr lang="en-IN" sz="800" dirty="0">
+                <a:solidFill>
+                  <a:srgbClr val="0563C1"/>
+                </a:solidFill>
+                <a:latin typeface="Arial"/>
+                <a:ea typeface="Arial"/>
+                <a:cs typeface="Arial"/>
+                <a:sym typeface="Arial"/>
+                <a:hlinkClick r:id="rId9"/>
+              </a:rPr>
+              <a:t>https://www.api.org/products-and-services/standards</a:t>
+            </a:r>
+            <a:endParaRPr lang="en-IN" sz="800" dirty="0"/>
+          </a:p>
+        </p:txBody>
+      </p:sp>
+      <p:sp>
+        <p:nvSpPr>
+          <p:cNvPr id="17421" name="FD_R10"/>
+          <p:cNvSpPr/>
+          <p:nvPr/>
+        </p:nvSpPr>
+        <p:spPr>
+          <a:xfrm>
+            <a:off x="6185916" y="2377440"/>
+            <a:ext cx="5710428" cy="365760"/>
+          </a:xfrm>
+          <a:prstGeom prst="roundRect">
+            <a:avLst>
+              <a:gd name="adj" fmla="val 12500"/>
+            </a:avLst>
+          </a:prstGeom>
+          <a:solidFill>
+            <a:srgbClr val="FFFFFF"/>
+          </a:solidFill>
+          <a:ln w="6350">
+            <a:solidFill>
+              <a:srgbClr val="1F497D"/>
+            </a:solidFill>
+            <a:round/>
+          </a:ln>
+        </p:spPr>
+        <p:txBody>
+          <a:bodyPr wrap="square" lIns="73152" tIns="9144" rIns="54864" bIns="9144" rtlCol="0" anchor="ctr">
+            <a:noAutofit/>
+          </a:bodyPr>
+          <a:lstStyle/>
+          <a:p>
+            <a:pPr marL="0" indent="0" algn="l">
+              <a:lnSpc>
+                <a:spcPct val="100000"/>
+              </a:lnSpc>
+              <a:spcBef>
+                <a:spcPts val="0"/>
+              </a:spcBef>
+              <a:spcAft>
+                <a:spcPts val="0"/>
+              </a:spcAft>
+              <a:buNone/>
+            </a:pPr>
+            <a:r>
+              <a:rPr lang="en-IN" sz="950" dirty="0">
+                <a:solidFill>
+                  <a:srgbClr val="1A1A1A"/>
+                </a:solidFill>
+                <a:latin typeface="Arial"/>
+                <a:ea typeface="Arial"/>
+                <a:cs typeface="Arial"/>
+                <a:sym typeface="Arial"/>
+              </a:rPr>
+              <a:t>SPE-23APOG-535203 (2023). Baghewala heavy oil: depth, API, viscosity, heater case.</a:t>
+            </a:r>
+            <a:endParaRPr lang="en-IN" sz="950" dirty="0"/>
+          </a:p>
+          <a:p>
+            <a:pPr marL="0" indent="0" algn="l">
+              <a:lnSpc>
+                <a:spcPct val="100000"/>
+              </a:lnSpc>
+              <a:spcBef>
+                <a:spcPts val="0"/>
+              </a:spcBef>
+              <a:spcAft>
+                <a:spcPts val="0"/>
+              </a:spcAft>
+              <a:buNone/>
+            </a:pPr>
+            <a:r>
+              <a:rPr lang="en-IN" sz="800" dirty="0">
+                <a:solidFill>
+                  <a:srgbClr val="0563C1"/>
+                </a:solidFill>
+                <a:latin typeface="Arial"/>
+                <a:ea typeface="Arial"/>
+                <a:cs typeface="Arial"/>
+                <a:sym typeface="Arial"/>
+                <a:hlinkClick r:id="rId10"/>
+              </a:rPr>
+              <a:t>https://onepetro.org/SPEAPOG/proceedings-abstract/23APOG/2-23APOG/535203</a:t>
+            </a:r>
+            <a:endParaRPr lang="en-IN" sz="800" dirty="0"/>
+          </a:p>
+        </p:txBody>
+      </p:sp>
+      <p:sp>
+        <p:nvSpPr>
+          <p:cNvPr id="17422" name="FD_R11"/>
+          <p:cNvSpPr/>
+          <p:nvPr/>
+        </p:nvSpPr>
+        <p:spPr>
+          <a:xfrm>
+            <a:off x="6185916" y="2798064"/>
+            <a:ext cx="5710428" cy="365760"/>
+          </a:xfrm>
+          <a:prstGeom prst="roundRect">
+            <a:avLst>
+              <a:gd name="adj" fmla="val 12500"/>
+            </a:avLst>
+          </a:prstGeom>
+          <a:solidFill>
+            <a:srgbClr val="FFFFFF"/>
+          </a:solidFill>
+          <a:ln w="6350">
+            <a:solidFill>
+              <a:srgbClr val="1F497D"/>
+            </a:solidFill>
+            <a:round/>
+          </a:ln>
+        </p:spPr>
+        <p:txBody>
+          <a:bodyPr wrap="square" lIns="73152" tIns="9144" rIns="54864" bIns="9144" rtlCol="0" anchor="ctr">
+            <a:noAutofit/>
+          </a:bodyPr>
+          <a:lstStyle/>
+          <a:p>
+            <a:pPr marL="0" indent="0" algn="l">
+              <a:lnSpc>
+                <a:spcPct val="100000"/>
+              </a:lnSpc>
+              <a:spcBef>
+                <a:spcPts val="0"/>
+              </a:spcBef>
+              <a:spcAft>
+                <a:spcPts val="0"/>
+              </a:spcAft>
+              <a:buNone/>
+            </a:pPr>
+            <a:r>
+              <a:rPr lang="en-IN" sz="950" dirty="0">
+                <a:solidFill>
+                  <a:srgbClr val="1A1A1A"/>
+                </a:solidFill>
+                <a:latin typeface="Arial"/>
+                <a:ea typeface="Arial"/>
+                <a:cs typeface="Arial"/>
+                <a:sym typeface="Arial"/>
+              </a:rPr>
+              <a:t>Yasin et al. (2022). Scientific Reports 12:11086 — Baghewala-1 reservoir properties.</a:t>
+            </a:r>
+            <a:endParaRPr lang="en-IN" sz="950" dirty="0"/>
+          </a:p>
+          <a:p>
+            <a:pPr marL="0" indent="0" algn="l">
+              <a:lnSpc>
+                <a:spcPct val="100000"/>
+              </a:lnSpc>
+              <a:spcBef>
+                <a:spcPts val="0"/>
+              </a:spcBef>
+              <a:spcAft>
+                <a:spcPts val="0"/>
+              </a:spcAft>
+              <a:buNone/>
+            </a:pPr>
+            <a:r>
+              <a:rPr lang="en-IN" sz="800" dirty="0">
+                <a:solidFill>
+                  <a:srgbClr val="0563C1"/>
+                </a:solidFill>
+                <a:latin typeface="Arial"/>
+                <a:ea typeface="Arial"/>
+                <a:cs typeface="Arial"/>
+                <a:sym typeface="Arial"/>
+                <a:hlinkClick r:id="rId11"/>
+              </a:rPr>
+              <a:t>https://doi.org/10.1038/s41598-022-14831-5</a:t>
+            </a:r>
+            <a:endParaRPr lang="en-IN" sz="800" dirty="0"/>
+          </a:p>
+        </p:txBody>
+      </p:sp>
+      <p:sp>
+        <p:nvSpPr>
+          <p:cNvPr id="17423" name="FD_R12"/>
+          <p:cNvSpPr/>
+          <p:nvPr/>
+        </p:nvSpPr>
+        <p:spPr>
+          <a:xfrm>
+            <a:off x="6185916" y="3218688"/>
+            <a:ext cx="5710428" cy="365760"/>
+          </a:xfrm>
+          <a:prstGeom prst="roundRect">
+            <a:avLst>
+              <a:gd name="adj" fmla="val 12500"/>
+            </a:avLst>
+          </a:prstGeom>
+          <a:solidFill>
+            <a:srgbClr val="FFFFFF"/>
+          </a:solidFill>
+          <a:ln w="6350">
+            <a:solidFill>
+              <a:srgbClr val="1F497D"/>
+            </a:solidFill>
+            <a:round/>
+          </a:ln>
+        </p:spPr>
+        <p:txBody>
+          <a:bodyPr wrap="square" lIns="73152" tIns="9144" rIns="54864" bIns="9144" rtlCol="0" anchor="ctr">
+            <a:noAutofit/>
+          </a:bodyPr>
+          <a:lstStyle/>
+          <a:p>
+            <a:pPr marL="0" indent="0" algn="l">
+              <a:lnSpc>
+                <a:spcPct val="100000"/>
+              </a:lnSpc>
+              <a:spcBef>
+                <a:spcPts val="0"/>
+              </a:spcBef>
+              <a:spcAft>
+                <a:spcPts val="0"/>
+              </a:spcAft>
+              <a:buNone/>
+            </a:pPr>
+            <a:r>
+              <a:rPr lang="en-IN" sz="950" dirty="0">
+                <a:solidFill>
+                  <a:srgbClr val="1A1A1A"/>
+                </a:solidFill>
+                <a:latin typeface="Arial"/>
+                <a:ea typeface="Arial"/>
+                <a:cs typeface="Arial"/>
+                <a:sym typeface="Arial"/>
+              </a:rPr>
+              <a:t>Oil India Ltd — Rajasthan fields (BGW-8 CSS); investor presentation (realised price).</a:t>
+            </a:r>
+            <a:endParaRPr lang="en-IN" sz="950" dirty="0"/>
+          </a:p>
+          <a:p>
+            <a:pPr marL="0" indent="0" algn="l">
+              <a:lnSpc>
+                <a:spcPct val="100000"/>
+              </a:lnSpc>
+              <a:spcBef>
+                <a:spcPts val="0"/>
+              </a:spcBef>
+              <a:spcAft>
+                <a:spcPts val="0"/>
+              </a:spcAft>
+              <a:buNone/>
+            </a:pPr>
+            <a:r>
+              <a:rPr lang="en-IN" sz="800" dirty="0">
+                <a:solidFill>
+                  <a:srgbClr val="0563C1"/>
+                </a:solidFill>
+                <a:latin typeface="Arial"/>
+                <a:ea typeface="Arial"/>
+                <a:cs typeface="Arial"/>
+                <a:sym typeface="Arial"/>
+                <a:hlinkClick r:id="rId12"/>
+              </a:rPr>
+              <a:t>https://www.oil-india.com/rajasthan-fields</a:t>
+            </a:r>
+            <a:endParaRPr lang="en-IN" sz="800" dirty="0"/>
+          </a:p>
+        </p:txBody>
+      </p:sp>
+      <p:sp>
+        <p:nvSpPr>
+          <p:cNvPr id="17424" name="FD_R13"/>
+          <p:cNvSpPr/>
+          <p:nvPr/>
+        </p:nvSpPr>
+        <p:spPr>
+          <a:xfrm>
+            <a:off x="6185916" y="3639312"/>
+            <a:ext cx="5710428" cy="365760"/>
+          </a:xfrm>
+          <a:prstGeom prst="roundRect">
+            <a:avLst>
+              <a:gd name="adj" fmla="val 12500"/>
+            </a:avLst>
+          </a:prstGeom>
+          <a:solidFill>
+            <a:srgbClr val="FFFFFF"/>
+          </a:solidFill>
+          <a:ln w="6350">
+            <a:solidFill>
+              <a:srgbClr val="1F497D"/>
+            </a:solidFill>
+            <a:round/>
+          </a:ln>
+        </p:spPr>
+        <p:txBody>
+          <a:bodyPr wrap="square" lIns="73152" tIns="9144" rIns="54864" bIns="9144" rtlCol="0" anchor="ctr">
+            <a:noAutofit/>
+          </a:bodyPr>
+          <a:lstStyle/>
+          <a:p>
+            <a:pPr marL="0" indent="0" algn="l">
+              <a:lnSpc>
+                <a:spcPct val="100000"/>
+              </a:lnSpc>
+              <a:spcBef>
+                <a:spcPts val="0"/>
+              </a:spcBef>
+              <a:spcAft>
+                <a:spcPts val="0"/>
+              </a:spcAft>
+              <a:buNone/>
+            </a:pPr>
+            <a:r>
+              <a:rPr lang="en-IN" sz="950" dirty="0">
+                <a:solidFill>
+                  <a:srgbClr val="1A1A1A"/>
+                </a:solidFill>
+                <a:latin typeface="Arial"/>
+                <a:ea typeface="Arial"/>
+                <a:cs typeface="Arial"/>
+                <a:sym typeface="Arial"/>
+              </a:rPr>
+              <a:t>CalGEM (2021). Annual Report of the State Oil &amp; Gas Supervisor — field steam-oil ratios.</a:t>
+            </a:r>
+            <a:endParaRPr lang="en-IN" sz="950" dirty="0"/>
+          </a:p>
+          <a:p>
+            <a:pPr marL="0" indent="0" algn="l">
+              <a:lnSpc>
+                <a:spcPct val="100000"/>
+              </a:lnSpc>
+              <a:spcBef>
+                <a:spcPts val="0"/>
+              </a:spcBef>
+              <a:spcAft>
+                <a:spcPts val="0"/>
+              </a:spcAft>
+              <a:buNone/>
+            </a:pPr>
+            <a:r>
+              <a:rPr lang="en-IN" sz="800" dirty="0">
+                <a:solidFill>
+                  <a:srgbClr val="0563C1"/>
+                </a:solidFill>
+                <a:latin typeface="Arial"/>
+                <a:ea typeface="Arial"/>
+                <a:cs typeface="Arial"/>
+                <a:sym typeface="Arial"/>
+                <a:hlinkClick r:id="rId13"/>
+              </a:rPr>
+              <a:t>https://www.conservation.ca.gov/calgem/Documents/2021%20CalGEM%20Supervisor%20Annual%20Report.pdf</a:t>
+            </a:r>
+            <a:endParaRPr lang="en-IN" sz="800" dirty="0"/>
+          </a:p>
+        </p:txBody>
+      </p:sp>
+      <p:sp>
+        <p:nvSpPr>
+          <p:cNvPr id="17425" name="FD_R14"/>
+          <p:cNvSpPr/>
+          <p:nvPr/>
+        </p:nvSpPr>
+        <p:spPr>
+          <a:xfrm>
+            <a:off x="6185916" y="4059936"/>
+            <a:ext cx="5710428" cy="365760"/>
+          </a:xfrm>
+          <a:prstGeom prst="roundRect">
+            <a:avLst>
+              <a:gd name="adj" fmla="val 12500"/>
+            </a:avLst>
+          </a:prstGeom>
+          <a:solidFill>
+            <a:srgbClr val="FFFFFF"/>
+          </a:solidFill>
+          <a:ln w="6350">
+            <a:solidFill>
+              <a:srgbClr val="1F497D"/>
+            </a:solidFill>
+            <a:round/>
+          </a:ln>
+        </p:spPr>
+        <p:txBody>
+          <a:bodyPr wrap="square" lIns="73152" tIns="9144" rIns="54864" bIns="9144" rtlCol="0" anchor="ctr">
+            <a:noAutofit/>
+          </a:bodyPr>
+          <a:lstStyle/>
+          <a:p>
+            <a:pPr marL="0" indent="0" algn="l">
+              <a:lnSpc>
+                <a:spcPct val="100000"/>
+              </a:lnSpc>
+              <a:spcBef>
+                <a:spcPts val="0"/>
+              </a:spcBef>
+              <a:spcAft>
+                <a:spcPts val="0"/>
+              </a:spcAft>
+              <a:buNone/>
+            </a:pPr>
+            <a:r>
+              <a:rPr lang="en-IN" sz="950" dirty="0">
+                <a:solidFill>
+                  <a:srgbClr val="1A1A1A"/>
+                </a:solidFill>
+                <a:latin typeface="Arial"/>
+                <a:ea typeface="Arial"/>
+                <a:cs typeface="Arial"/>
+                <a:sym typeface="Arial"/>
+              </a:rPr>
+              <a:t>Inside Climate News (2022) mirror of CalGEM injection data — 9,692 cyclic-steam records.</a:t>
+            </a:r>
+            <a:endParaRPr lang="en-IN" sz="950" dirty="0"/>
+          </a:p>
+          <a:p>
+            <a:pPr marL="0" indent="0" algn="l">
+              <a:lnSpc>
+                <a:spcPct val="100000"/>
+              </a:lnSpc>
+              <a:spcBef>
+                <a:spcPts val="0"/>
+              </a:spcBef>
+              <a:spcAft>
+                <a:spcPts val="0"/>
+              </a:spcAft>
+              <a:buNone/>
+            </a:pPr>
+            <a:r>
+              <a:rPr lang="en-IN" sz="800" dirty="0">
+                <a:solidFill>
+                  <a:srgbClr val="0563C1"/>
+                </a:solidFill>
+                <a:latin typeface="Arial"/>
+                <a:ea typeface="Arial"/>
+                <a:cs typeface="Arial"/>
+                <a:sym typeface="Arial"/>
+                <a:hlinkClick r:id="rId14"/>
+              </a:rPr>
+              <a:t>https://github.com/InsideClimateNews/2022-09-ca-kern-oil-water</a:t>
+            </a:r>
+            <a:endParaRPr lang="en-IN" sz="800" dirty="0"/>
+          </a:p>
+        </p:txBody>
+      </p:sp>
+      <p:sp>
+        <p:nvSpPr>
+          <p:cNvPr id="17426" name="FD_R15"/>
+          <p:cNvSpPr/>
+          <p:nvPr/>
+        </p:nvSpPr>
+        <p:spPr>
+          <a:xfrm>
+            <a:off x="6185916" y="4480560"/>
+            <a:ext cx="5710428" cy="365760"/>
+          </a:xfrm>
+          <a:prstGeom prst="roundRect">
+            <a:avLst>
+              <a:gd name="adj" fmla="val 12500"/>
+            </a:avLst>
+          </a:prstGeom>
+          <a:solidFill>
+            <a:srgbClr val="FFFFFF"/>
+          </a:solidFill>
+          <a:ln w="6350">
+            <a:solidFill>
+              <a:srgbClr val="1F497D"/>
+            </a:solidFill>
+            <a:round/>
+          </a:ln>
+        </p:spPr>
+        <p:txBody>
+          <a:bodyPr wrap="square" lIns="73152" tIns="9144" rIns="54864" bIns="9144" rtlCol="0" anchor="ctr">
+            <a:noAutofit/>
+          </a:bodyPr>
+          <a:lstStyle/>
+          <a:p>
+            <a:pPr marL="0" indent="0" algn="l">
+              <a:lnSpc>
+                <a:spcPct val="100000"/>
+              </a:lnSpc>
+              <a:spcBef>
+                <a:spcPts val="0"/>
+              </a:spcBef>
+              <a:spcAft>
+                <a:spcPts val="0"/>
+              </a:spcAft>
+              <a:buNone/>
+            </a:pPr>
+            <a:r>
+              <a:rPr lang="en-IN" sz="950" dirty="0">
+                <a:solidFill>
+                  <a:srgbClr val="1A1A1A"/>
+                </a:solidFill>
+                <a:latin typeface="Arial"/>
+                <a:ea typeface="Arial"/>
+                <a:cs typeface="Arial"/>
+                <a:sym typeface="Arial"/>
+              </a:rPr>
+              <a:t>Landscape: XSPOC, Lufkin SAM/SROD, ForeSite, AVEVA — none couples CSS with the pump.</a:t>
+            </a:r>
+            <a:endParaRPr lang="en-IN" sz="950" dirty="0"/>
+          </a:p>
+          <a:p>
+            <a:pPr marL="0" indent="0" algn="l">
+              <a:lnSpc>
+                <a:spcPct val="100000"/>
+              </a:lnSpc>
+              <a:spcBef>
+                <a:spcPts val="0"/>
+              </a:spcBef>
+              <a:spcAft>
+                <a:spcPts val="0"/>
+              </a:spcAft>
+              <a:buNone/>
+            </a:pPr>
+            <a:r>
+              <a:rPr lang="en-IN" sz="800" dirty="0">
+                <a:solidFill>
+                  <a:srgbClr val="0563C1"/>
+                </a:solidFill>
+                <a:latin typeface="Arial"/>
+                <a:ea typeface="Arial"/>
+                <a:cs typeface="Arial"/>
+                <a:sym typeface="Arial"/>
+                <a:hlinkClick r:id="rId15"/>
+              </a:rPr>
+              <a:t>https://www.lufkin.com/solutions-services/srod/</a:t>
+            </a:r>
+            <a:endParaRPr lang="en-IN" sz="800" dirty="0"/>
+          </a:p>
+        </p:txBody>
+      </p:sp>
+      <p:sp>
+        <p:nvSpPr>
+          <p:cNvPr id="17427" name="FD_K1"/>
+          <p:cNvSpPr/>
+          <p:nvPr/>
+        </p:nvSpPr>
+        <p:spPr>
+          <a:xfrm>
+            <a:off x="384048" y="5367528"/>
+            <a:ext cx="3776472" cy="402336"/>
+          </a:xfrm>
+          <a:prstGeom prst="roundRect">
+            <a:avLst>
+              <a:gd name="adj" fmla="val 13636"/>
+            </a:avLst>
+          </a:prstGeom>
+          <a:solidFill>
+            <a:srgbClr val="FFFFFF"/>
+          </a:solidFill>
+          <a:ln w="9525">
+            <a:solidFill>
+              <a:srgbClr val="5B3FA0"/>
+            </a:solidFill>
+            <a:round/>
+          </a:ln>
+        </p:spPr>
+        <p:txBody>
+          <a:bodyPr wrap="square" lIns="457200" tIns="9144" rIns="45720" bIns="9144" rtlCol="0" anchor="ctr">
+            <a:noAutofit/>
+          </a:bodyPr>
+          <a:lstStyle/>
+          <a:p>
+            <a:pPr marL="0" indent="0" algn="l">
+              <a:lnSpc>
+                <a:spcPct val="100000"/>
+              </a:lnSpc>
+              <a:spcBef>
+                <a:spcPts val="0"/>
+              </a:spcBef>
+              <a:spcAft>
+                <a:spcPts val="0"/>
+              </a:spcAft>
+              <a:buNone/>
+            </a:pPr>
+            <a:r>
+              <a:rPr lang="en-IN" sz="1050" dirty="0">
+                <a:solidFill>
+                  <a:srgbClr val="1A1A1A"/>
+                </a:solidFill>
+                <a:latin typeface="Arial"/>
+                <a:ea typeface="Arial"/>
+                <a:cs typeface="Arial"/>
+                <a:sym typeface="Arial"/>
+              </a:rPr>
+              <a:t>Live dashboard:</a:t>
+            </a:r>
+            <a:endParaRPr lang="en-IN" sz="1050" dirty="0"/>
+          </a:p>
+          <a:p>
+            <a:pPr marL="0" indent="0" algn="l">
+              <a:lnSpc>
+                <a:spcPct val="100000"/>
+              </a:lnSpc>
+              <a:spcBef>
+                <a:spcPts val="0"/>
+              </a:spcBef>
+              <a:spcAft>
+                <a:spcPts val="0"/>
+              </a:spcAft>
+              <a:buNone/>
+            </a:pPr>
+            <a:r>
+              <a:rPr lang="en-IN" sz="950" dirty="0">
+                <a:solidFill>
+                  <a:srgbClr val="0563C1"/>
+                </a:solidFill>
+                <a:latin typeface="Arial"/>
+                <a:ea typeface="Arial"/>
+                <a:cs typeface="Arial"/>
+                <a:sym typeface="Arial"/>
+                <a:hlinkClick r:id="rId16"/>
+              </a:rPr>
+              <a:t>baghewala-digital-twin.onrender.com</a:t>
+            </a:r>
+            <a:endParaRPr lang="en-IN" sz="950" dirty="0"/>
+          </a:p>
+        </p:txBody>
+      </p:sp>
+      <p:sp>
+        <p:nvSpPr>
+          <p:cNvPr id="17428" name="FD_K2"/>
+          <p:cNvSpPr/>
+          <p:nvPr/>
+        </p:nvSpPr>
+        <p:spPr>
+          <a:xfrm>
+            <a:off x="4251960" y="5367528"/>
+            <a:ext cx="3776472" cy="402336"/>
+          </a:xfrm>
+          <a:prstGeom prst="roundRect">
+            <a:avLst>
+              <a:gd name="adj" fmla="val 13636"/>
+            </a:avLst>
+          </a:prstGeom>
+          <a:solidFill>
+            <a:srgbClr val="FFFFFF"/>
+          </a:solidFill>
+          <a:ln w="9525">
+            <a:solidFill>
+              <a:srgbClr val="5B3FA0"/>
+            </a:solidFill>
+            <a:round/>
+          </a:ln>
+        </p:spPr>
+        <p:txBody>
+          <a:bodyPr wrap="square" lIns="457200" tIns="9144" rIns="45720" bIns="9144" rtlCol="0" anchor="ctr">
+            <a:noAutofit/>
+          </a:bodyPr>
+          <a:lstStyle/>
+          <a:p>
+            <a:pPr marL="0" indent="0" algn="l">
+              <a:lnSpc>
+                <a:spcPct val="100000"/>
+              </a:lnSpc>
+              <a:spcBef>
+                <a:spcPts val="0"/>
+              </a:spcBef>
+              <a:spcAft>
+                <a:spcPts val="0"/>
+              </a:spcAft>
+              <a:buNone/>
+            </a:pPr>
+            <a:r>
+              <a:rPr lang="en-IN" sz="1050" dirty="0">
+                <a:solidFill>
+                  <a:srgbClr val="1A1A1A"/>
+                </a:solidFill>
+                <a:latin typeface="Arial"/>
+                <a:ea typeface="Arial"/>
+                <a:cs typeface="Arial"/>
+                <a:sym typeface="Arial"/>
+              </a:rPr>
+              <a:t>Demo video:</a:t>
+            </a:r>
+            <a:endParaRPr lang="en-IN" sz="1050" dirty="0"/>
+          </a:p>
+          <a:p>
+            <a:pPr marL="0" indent="0" algn="l">
+              <a:lnSpc>
+                <a:spcPct val="100000"/>
+              </a:lnSpc>
+              <a:spcBef>
+                <a:spcPts val="0"/>
+              </a:spcBef>
+              <a:spcAft>
+                <a:spcPts val="0"/>
+              </a:spcAft>
+              <a:buNone/>
+            </a:pPr>
+            <a:r>
+              <a:rPr lang="en-IN" sz="950" dirty="0">
+                <a:solidFill>
+                  <a:srgbClr val="0563C1"/>
+                </a:solidFill>
+                <a:latin typeface="Arial"/>
+                <a:ea typeface="Arial"/>
+                <a:cs typeface="Arial"/>
+                <a:sym typeface="Arial"/>
+              </a:rPr>
+              <a:t>https://  ________________</a:t>
+            </a:r>
+            <a:endParaRPr lang="en-IN" sz="950" dirty="0"/>
+          </a:p>
+        </p:txBody>
+      </p:sp>
+      <p:sp>
+        <p:nvSpPr>
+          <p:cNvPr id="17429" name="FD_K3"/>
+          <p:cNvSpPr/>
+          <p:nvPr/>
+        </p:nvSpPr>
+        <p:spPr>
+          <a:xfrm>
+            <a:off x="8119872" y="5367528"/>
+            <a:ext cx="3776472" cy="402336"/>
+          </a:xfrm>
+          <a:prstGeom prst="roundRect">
+            <a:avLst>
+              <a:gd name="adj" fmla="val 13636"/>
+            </a:avLst>
+          </a:prstGeom>
+          <a:solidFill>
+            <a:srgbClr val="FFFFFF"/>
+          </a:solidFill>
+          <a:ln w="9525">
+            <a:solidFill>
+              <a:srgbClr val="5B3FA0"/>
+            </a:solidFill>
+            <a:round/>
+          </a:ln>
+        </p:spPr>
+        <p:txBody>
+          <a:bodyPr wrap="square" lIns="457200" tIns="9144" rIns="45720" bIns="9144" rtlCol="0" anchor="ctr">
+            <a:noAutofit/>
+          </a:bodyPr>
+          <a:lstStyle/>
+          <a:p>
+            <a:pPr marL="0" indent="0" algn="l">
+              <a:lnSpc>
+                <a:spcPct val="100000"/>
+              </a:lnSpc>
+              <a:spcBef>
+                <a:spcPts val="0"/>
+              </a:spcBef>
+              <a:spcAft>
+                <a:spcPts val="0"/>
+              </a:spcAft>
+              <a:buNone/>
+            </a:pPr>
+            <a:r>
+              <a:rPr lang="en-IN" sz="1050" dirty="0">
+                <a:solidFill>
+                  <a:srgbClr val="1A1A1A"/>
+                </a:solidFill>
+                <a:latin typeface="Arial"/>
+                <a:ea typeface="Arial"/>
+                <a:cs typeface="Arial"/>
+                <a:sym typeface="Arial"/>
+              </a:rPr>
+              <a:t>GitHub repository:</a:t>
+            </a:r>
+            <a:endParaRPr lang="en-IN" sz="1050" dirty="0"/>
+          </a:p>
+          <a:p>
+            <a:pPr marL="0" indent="0" algn="l">
+              <a:lnSpc>
+                <a:spcPct val="100000"/>
+              </a:lnSpc>
+              <a:spcBef>
+                <a:spcPts val="0"/>
+              </a:spcBef>
+              <a:spcAft>
+                <a:spcPts val="0"/>
+              </a:spcAft>
+              <a:buNone/>
+            </a:pPr>
+            <a:r>
+              <a:rPr lang="en-IN" sz="950" dirty="0">
+                <a:solidFill>
+                  <a:srgbClr val="0563C1"/>
+                </a:solidFill>
+                <a:latin typeface="Arial"/>
+                <a:ea typeface="Arial"/>
+                <a:cs typeface="Arial"/>
+                <a:sym typeface="Arial"/>
+                <a:hlinkClick r:id="rId17"/>
+              </a:rPr>
+              <a:t>github.com/grv-io/sih2026-baghewala-digital-twin</a:t>
+            </a:r>
+            <a:endParaRPr lang="en-IN" sz="950" dirty="0"/>
+          </a:p>
+        </p:txBody>
+      </p:sp>
+      <p:sp>
+        <p:nvSpPr>
+          <p:cNvPr id="17430" name="FD_n"/>
+          <p:cNvSpPr txBox="1"/>
+          <p:nvPr/>
+        </p:nvSpPr>
+        <p:spPr>
+          <a:xfrm>
+            <a:off x="292608" y="5861304"/>
+            <a:ext cx="11695176" cy="201168"/>
+          </a:xfrm>
+          <a:prstGeom prst="rect">
+            <a:avLst/>
+          </a:prstGeom>
+          <a:noFill/>
+        </p:spPr>
+        <p:txBody>
+          <a:bodyPr wrap="square" lIns="0" tIns="0" rIns="0" bIns="0" rtlCol="0" anchor="ctr">
+            <a:noAutofit/>
+          </a:bodyPr>
+          <a:lstStyle/>
+          <a:p>
+            <a:pPr marL="0" indent="0" algn="l">
+              <a:lnSpc>
+                <a:spcPct val="100000"/>
+              </a:lnSpc>
+              <a:spcBef>
+                <a:spcPts val="0"/>
+              </a:spcBef>
+              <a:spcAft>
+                <a:spcPts val="0"/>
+              </a:spcAft>
+              <a:buNone/>
+            </a:pPr>
+            <a:r>
+              <a:rPr lang="en-IN" sz="1050" i="1" dirty="0">
+                <a:solidFill>
+                  <a:srgbClr val="595959"/>
+                </a:solidFill>
+                <a:latin typeface="Arial"/>
+                <a:ea typeface="Arial"/>
+                <a:cs typeface="Arial"/>
+                <a:sym typeface="Arial"/>
+              </a:rPr>
+              <a:t>Every link is clickable in this PDF · full list with notes in the repository (docs/research/references.md)</a:t>
+            </a:r>
+            <a:endParaRPr lang="en-IN" sz="1050" dirty="0"/>
+          </a:p>
+        </p:txBody>
+      </p:sp>
+      <p:pic>
+        <p:nvPicPr>
+          <p:cNvPr id="17431" name="FD_K1_icon" descr="icon: ic_dashboard.svg"/>
+          <p:cNvPicPr>
+            <a:picLocks noChangeAspect="1"/>
+          </p:cNvPicPr>
+          <p:nvPr/>
+        </p:nvPicPr>
+        <p:blipFill>
+          <a:blip r:embed="rId18"/>
+          <a:stretch>
+            <a:fillRect/>
+          </a:stretch>
+        </p:blipFill>
+        <p:spPr>
+          <a:xfrm>
+            <a:off x="457200" y="5404104"/>
+            <a:ext cx="329184" cy="329184"/>
+          </a:xfrm>
+          <a:prstGeom prst="rect">
+            <a:avLst/>
+          </a:prstGeom>
+        </p:spPr>
+      </p:pic>
+      <p:pic>
+        <p:nvPicPr>
+          <p:cNvPr id="17432" name="FD_K2_icon" descr="icon: ic_sensor.svg"/>
+          <p:cNvPicPr>
+            <a:picLocks noChangeAspect="1"/>
+          </p:cNvPicPr>
+          <p:nvPr/>
+        </p:nvPicPr>
+        <p:blipFill>
+          <a:blip r:embed="rId19"/>
+          <a:stretch>
+            <a:fillRect/>
+          </a:stretch>
+        </p:blipFill>
+        <p:spPr>
+          <a:xfrm>
+            <a:off x="4325112" y="5404104"/>
+            <a:ext cx="329184" cy="329184"/>
+          </a:xfrm>
+          <a:prstGeom prst="rect">
+            <a:avLst/>
+          </a:prstGeom>
+        </p:spPr>
+      </p:pic>
+      <p:pic>
+        <p:nvPicPr>
+          <p:cNvPr id="17433" name="FD_K3_icon" descr="icon: ic_ai-chip.svg"/>
+          <p:cNvPicPr>
+            <a:picLocks noChangeAspect="1"/>
+          </p:cNvPicPr>
+          <p:nvPr/>
+        </p:nvPicPr>
+        <p:blipFill>
+          <a:blip r:embed="rId20"/>
+          <a:stretch>
+            <a:fillRect/>
+          </a:stretch>
+        </p:blipFill>
+        <p:spPr>
+          <a:xfrm>
+            <a:off x="8193024" y="5404104"/>
+            <a:ext cx="329184" cy="329184"/>
+          </a:xfrm>
+          <a:prstGeom prst="rect">
+            <a:avLst/>
+          </a:prstGeom>
+        </p:spPr>
+      </p:pic>
+      <p:sp>
+        <p:nvSpPr>
+          <p:cNvPr id="3" name="Oval 2" descr="Your startup LOGO">
             <a:extLst>
               <a:ext uri="{FF2B5EF4-FFF2-40B4-BE49-F238E27FC236}">
-                <a16:creationId xmlns:a16="http://schemas.microsoft.com/office/drawing/2014/main" id="{5DBCE864-823D-4A13-9607-5DA1F0ED5FB8}"/>
+                <a16:creationId xmlns:a16="http://schemas.microsoft.com/office/drawing/2014/main" id="{E0A4581B-C838-6D99-68D5-FC08C15D8FCC}"/>
               </a:ext>
               <a:ext uri="{C183D7F6-B498-43B3-948B-1728B52AA6E4}">
-                <adec:decorative xmlns:adec="http://schemas.microsoft.com/office/drawing/2017/decorative" xmlns="" val="0"/>
+                <adec:decorative xmlns:adec="http://schemas.microsoft.com/office/drawing/2017/decorative" val="0"/>
               </a:ext>
             </a:extLst>
           </p:cNvPr>
@@ -17298,1666 +19044,13 @@
           <a:p>
             <a:pPr algn="ctr"/>
             <a:r>
-              <a:rPr lang="en-US" dirty="0"/>
-              <a:t>Your Team Name</a:t>
+              <a:rPr lang="en-US" dirty="0" err="1"/>
+              <a:t>AlphaQ</a:t>
             </a:r>
             <a:endParaRPr lang="en-IN" dirty="0"/>
           </a:p>
         </p:txBody>
       </p:sp>
-      <p:pic>
-        <p:nvPicPr>
-          <p:cNvPr id="12" name="Picture 11"/>
-          <p:cNvPicPr>
-            <a:picLocks noChangeAspect="1"/>
-          </p:cNvPicPr>
-          <p:nvPr/>
-        </p:nvPicPr>
-        <p:blipFill>
-          <a:blip r:embed="rId3">
-            <a:extLst>
-              <a:ext uri="{28A0092B-C50C-407E-A947-70E740481C1C}">
-                <a14:useLocalDpi xmlns:a14="http://schemas.microsoft.com/office/drawing/2010/main" val="0"/>
-              </a:ext>
-            </a:extLst>
-          </a:blip>
-          <a:stretch>
-            <a:fillRect/>
-          </a:stretch>
-        </p:blipFill>
-        <p:spPr>
-          <a:xfrm>
-            <a:off x="9780086" y="1500"/>
-            <a:ext cx="2249850" cy="1062337"/>
-          </a:xfrm>
-          <a:prstGeom prst="rect">
-            <a:avLst/>
-          </a:prstGeom>
-        </p:spPr>
-      </p:pic>
-      <p:sp>
-        <p:nvSpPr>
-          <p:cNvPr id="17411" name="FD_R"/>
-          <p:cNvSpPr/>
-          <p:nvPr/>
-        </p:nvSpPr>
-        <p:spPr>
-          <a:xfrm>
-            <a:off x="292608" y="1755648"/>
-            <a:ext cx="11695176" cy="3200400"/>
-          </a:xfrm>
-          <a:prstGeom prst="roundRect">
-            <a:avLst>
-              <a:gd name="adj" fmla="val 3428"/>
-            </a:avLst>
-          </a:prstGeom>
-          <a:solidFill>
-            <a:srgbClr val="F6F8FC"/>
-          </a:solidFill>
-          <a:ln w="19050">
-            <a:solidFill>
-              <a:srgbClr val="1F497D"/>
-            </a:solidFill>
-            <a:round/>
-          </a:ln>
-        </p:spPr>
-        <p:txBody>
-          <a:bodyPr rtlCol="0" anchor="t" wrap="square" lIns="45720" tIns="18288" rIns="36576" bIns="9144">
-            <a:noAutofit/>
-          </a:bodyPr>
-          <a:lstStyle/>
-          <a:p/>
-        </p:txBody>
-      </p:sp>
-      <p:sp>
-        <p:nvSpPr>
-          <p:cNvPr id="17412" name="FD_R_hdr"/>
-          <p:cNvSpPr/>
-          <p:nvPr/>
-        </p:nvSpPr>
-        <p:spPr>
-          <a:xfrm>
-            <a:off x="292608" y="1755648"/>
-            <a:ext cx="11695176" cy="530352"/>
-          </a:xfrm>
-          <a:prstGeom prst="round2SameRect">
-            <a:avLst>
-              <a:gd name="adj1" fmla="val 20689"/>
-              <a:gd name="adj2" fmla="val 0"/>
-            </a:avLst>
-          </a:prstGeom>
-          <a:solidFill>
-            <a:srgbClr val="1F497D"/>
-          </a:solidFill>
-          <a:ln>
-            <a:noFill/>
-          </a:ln>
-        </p:spPr>
-        <p:txBody>
-          <a:bodyPr rtlCol="0" anchor="ctr" wrap="square" lIns="73152" tIns="0" rIns="73152" bIns="0">
-            <a:noAutofit/>
-          </a:bodyPr>
-          <a:lstStyle/>
-          <a:p>
-            <a:pPr marL="0" indent="0" algn="ctr">
-              <a:lnSpc>
-                <a:spcPct val="100000"/>
-              </a:lnSpc>
-              <a:spcBef>
-                <a:spcPts val="0"/>
-              </a:spcBef>
-              <a:spcAft>
-                <a:spcPts val="0"/>
-              </a:spcAft>
-              <a:buNone/>
-            </a:pPr>
-            <a:r>
-              <a:rPr lang="en-IN" sz="1300" dirty="0" b="1">
-                <a:solidFill>
-                  <a:srgbClr val="FFFFFF"/>
-                </a:solidFill>
-                <a:latin typeface="Arial"/>
-                <a:ea typeface="Arial"/>
-                <a:cs typeface="Arial"/>
-                <a:sym typeface="Arial"/>
-              </a:rPr>
-              <a:t>Details / Links of the reference and research work</a:t>
-            </a:r>
-            <a:endParaRPr lang="en-IN" sz="1300" dirty="0"/>
-          </a:p>
-        </p:txBody>
-      </p:sp>
-      <p:sp>
-        <p:nvSpPr>
-          <p:cNvPr id="17413" name="FD_K"/>
-          <p:cNvSpPr/>
-          <p:nvPr/>
-        </p:nvSpPr>
-        <p:spPr>
-          <a:xfrm>
-            <a:off x="292608" y="5065776"/>
-            <a:ext cx="11695176" cy="758952"/>
-          </a:xfrm>
-          <a:prstGeom prst="roundRect">
-            <a:avLst>
-              <a:gd name="adj" fmla="val 12048"/>
-            </a:avLst>
-          </a:prstGeom>
-          <a:solidFill>
-            <a:srgbClr val="F9F7FD"/>
-          </a:solidFill>
-          <a:ln w="15875">
-            <a:solidFill>
-              <a:srgbClr val="5B3FA0"/>
-            </a:solidFill>
-            <a:round/>
-          </a:ln>
-        </p:spPr>
-        <p:txBody>
-          <a:bodyPr rtlCol="0" anchor="t" wrap="square" lIns="45720" tIns="18288" rIns="36576" bIns="9144">
-            <a:noAutofit/>
-          </a:bodyPr>
-          <a:lstStyle/>
-          <a:p/>
-        </p:txBody>
-      </p:sp>
-      <p:sp>
-        <p:nvSpPr>
-          <p:cNvPr id="17414" name="FD_K_hdr"/>
-          <p:cNvSpPr/>
-          <p:nvPr/>
-        </p:nvSpPr>
-        <p:spPr>
-          <a:xfrm>
-            <a:off x="292608" y="5065776"/>
-            <a:ext cx="11695176" cy="246888"/>
-          </a:xfrm>
-          <a:prstGeom prst="round2SameRect">
-            <a:avLst>
-              <a:gd name="adj1" fmla="val 37037"/>
-              <a:gd name="adj2" fmla="val 0"/>
-            </a:avLst>
-          </a:prstGeom>
-          <a:solidFill>
-            <a:srgbClr val="5B3FA0"/>
-          </a:solidFill>
-          <a:ln>
-            <a:noFill/>
-          </a:ln>
-        </p:spPr>
-        <p:txBody>
-          <a:bodyPr rtlCol="0" anchor="ctr" wrap="square" lIns="109728" tIns="0" rIns="54864" bIns="0">
-            <a:noAutofit/>
-          </a:bodyPr>
-          <a:lstStyle/>
-          <a:p>
-            <a:pPr marL="0" indent="0" algn="l">
-              <a:lnSpc>
-                <a:spcPct val="100000"/>
-              </a:lnSpc>
-              <a:spcBef>
-                <a:spcPts val="0"/>
-              </a:spcBef>
-              <a:spcAft>
-                <a:spcPts val="0"/>
-              </a:spcAft>
-              <a:buNone/>
-            </a:pPr>
-            <a:r>
-              <a:rPr lang="en-IN" sz="1200" dirty="0" b="1">
-                <a:solidFill>
-                  <a:srgbClr val="FFFFFF"/>
-                </a:solidFill>
-                <a:latin typeface="Arial"/>
-                <a:ea typeface="Arial"/>
-                <a:cs typeface="Arial"/>
-                <a:sym typeface="Arial"/>
-              </a:rPr>
-              <a:t>Links (fill in before submission)</a:t>
-            </a:r>
-            <a:endParaRPr lang="en-IN" sz="1200" dirty="0"/>
-          </a:p>
-        </p:txBody>
-      </p:sp>
-      <p:sp>
-        <p:nvSpPr>
-          <p:cNvPr id="17415" name="FD_R00"/>
-          <p:cNvSpPr/>
-          <p:nvPr/>
-        </p:nvSpPr>
-        <p:spPr>
-          <a:xfrm>
-            <a:off x="384048" y="2377440"/>
-            <a:ext cx="5710428" cy="365760"/>
-          </a:xfrm>
-          <a:prstGeom prst="roundRect">
-            <a:avLst>
-              <a:gd name="adj" fmla="val 12500"/>
-            </a:avLst>
-          </a:prstGeom>
-          <a:solidFill>
-            <a:srgbClr val="FFFFFF"/>
-          </a:solidFill>
-          <a:ln w="6350">
-            <a:solidFill>
-              <a:srgbClr val="1F497D"/>
-            </a:solidFill>
-            <a:round/>
-          </a:ln>
-        </p:spPr>
-        <p:txBody>
-          <a:bodyPr rtlCol="0" anchor="ctr" wrap="square" lIns="73152" tIns="9144" rIns="54864" bIns="9144">
-            <a:noAutofit/>
-          </a:bodyPr>
-          <a:lstStyle/>
-          <a:p>
-            <a:pPr marL="0" indent="0" algn="l">
-              <a:lnSpc>
-                <a:spcPct val="100000"/>
-              </a:lnSpc>
-              <a:spcBef>
-                <a:spcPts val="0"/>
-              </a:spcBef>
-              <a:spcAft>
-                <a:spcPts val="0"/>
-              </a:spcAft>
-              <a:buNone/>
-            </a:pPr>
-            <a:r>
-              <a:rPr lang="en-IN" sz="950" dirty="0">
-                <a:solidFill>
-                  <a:srgbClr val="1A1A1A"/>
-                </a:solidFill>
-                <a:latin typeface="Arial"/>
-                <a:ea typeface="Arial"/>
-                <a:cs typeface="Arial"/>
-                <a:sym typeface="Arial"/>
-              </a:rPr>
-              <a:t>Marx &amp; Langenheim (1959). Reservoir heating by hot fluid injection. Trans. AIME 216.</a:t>
-            </a:r>
-            <a:endParaRPr lang="en-IN" sz="950" dirty="0"/>
-          </a:p>
-          <a:p>
-            <a:pPr marL="0" indent="0" algn="l">
-              <a:lnSpc>
-                <a:spcPct val="100000"/>
-              </a:lnSpc>
-              <a:spcBef>
-                <a:spcPts val="0"/>
-              </a:spcBef>
-              <a:spcAft>
-                <a:spcPts val="0"/>
-              </a:spcAft>
-              <a:buNone/>
-            </a:pPr>
-            <a:r>
-              <a:rPr lang="en-IN" sz="800" dirty="0">
-                <a:solidFill>
-                  <a:srgbClr val="0563C1"/>
-                </a:solidFill>
-                <a:latin typeface="Arial"/>
-                <a:ea typeface="Arial"/>
-                <a:cs typeface="Arial"/>
-                <a:sym typeface="Arial"/>
-                <a:hlinkClick r:id="rId7"/>
-              </a:rPr>
-              <a:t>https://doi.org/10.2118/1266-G</a:t>
-            </a:r>
-            <a:endParaRPr lang="en-IN" sz="800" dirty="0"/>
-          </a:p>
-        </p:txBody>
-      </p:sp>
-      <p:sp>
-        <p:nvSpPr>
-          <p:cNvPr id="17416" name="FD_R01"/>
-          <p:cNvSpPr/>
-          <p:nvPr/>
-        </p:nvSpPr>
-        <p:spPr>
-          <a:xfrm>
-            <a:off x="384048" y="2798064"/>
-            <a:ext cx="5710428" cy="365760"/>
-          </a:xfrm>
-          <a:prstGeom prst="roundRect">
-            <a:avLst>
-              <a:gd name="adj" fmla="val 12500"/>
-            </a:avLst>
-          </a:prstGeom>
-          <a:solidFill>
-            <a:srgbClr val="FFFFFF"/>
-          </a:solidFill>
-          <a:ln w="6350">
-            <a:solidFill>
-              <a:srgbClr val="1F497D"/>
-            </a:solidFill>
-            <a:round/>
-          </a:ln>
-        </p:spPr>
-        <p:txBody>
-          <a:bodyPr rtlCol="0" anchor="ctr" wrap="square" lIns="73152" tIns="9144" rIns="54864" bIns="9144">
-            <a:noAutofit/>
-          </a:bodyPr>
-          <a:lstStyle/>
-          <a:p>
-            <a:pPr marL="0" indent="0" algn="l">
-              <a:lnSpc>
-                <a:spcPct val="100000"/>
-              </a:lnSpc>
-              <a:spcBef>
-                <a:spcPts val="0"/>
-              </a:spcBef>
-              <a:spcAft>
-                <a:spcPts val="0"/>
-              </a:spcAft>
-              <a:buNone/>
-            </a:pPr>
-            <a:r>
-              <a:rPr lang="en-IN" sz="950" dirty="0">
-                <a:solidFill>
-                  <a:srgbClr val="1A1A1A"/>
-                </a:solidFill>
-                <a:latin typeface="Arial"/>
-                <a:ea typeface="Arial"/>
-                <a:cs typeface="Arial"/>
-                <a:sym typeface="Arial"/>
-              </a:rPr>
-              <a:t>Boberg &amp; Lantz (1966). Thermally stimulated well rate — via SPE PEH ch. 15 (Prats).</a:t>
-            </a:r>
-            <a:endParaRPr lang="en-IN" sz="950" dirty="0"/>
-          </a:p>
-          <a:p>
-            <a:pPr marL="0" indent="0" algn="l">
-              <a:lnSpc>
-                <a:spcPct val="100000"/>
-              </a:lnSpc>
-              <a:spcBef>
-                <a:spcPts val="0"/>
-              </a:spcBef>
-              <a:spcAft>
-                <a:spcPts val="0"/>
-              </a:spcAft>
-              <a:buNone/>
-            </a:pPr>
-            <a:r>
-              <a:rPr lang="en-IN" sz="800" dirty="0">
-                <a:solidFill>
-                  <a:srgbClr val="0563C1"/>
-                </a:solidFill>
-                <a:latin typeface="Arial"/>
-                <a:ea typeface="Arial"/>
-                <a:cs typeface="Arial"/>
-                <a:sym typeface="Arial"/>
-                <a:hlinkClick r:id="rId8"/>
-              </a:rPr>
-              <a:t>https://petrowiki.org/PEH:Thermal_Recovery_by_Steam_Injection</a:t>
-            </a:r>
-            <a:endParaRPr lang="en-IN" sz="800" dirty="0"/>
-          </a:p>
-        </p:txBody>
-      </p:sp>
-      <p:sp>
-        <p:nvSpPr>
-          <p:cNvPr id="17417" name="FD_R02"/>
-          <p:cNvSpPr/>
-          <p:nvPr/>
-        </p:nvSpPr>
-        <p:spPr>
-          <a:xfrm>
-            <a:off x="384048" y="3218688"/>
-            <a:ext cx="5710428" cy="365760"/>
-          </a:xfrm>
-          <a:prstGeom prst="roundRect">
-            <a:avLst>
-              <a:gd name="adj" fmla="val 12500"/>
-            </a:avLst>
-          </a:prstGeom>
-          <a:solidFill>
-            <a:srgbClr val="FFFFFF"/>
-          </a:solidFill>
-          <a:ln w="6350">
-            <a:solidFill>
-              <a:srgbClr val="1F497D"/>
-            </a:solidFill>
-            <a:round/>
-          </a:ln>
-        </p:spPr>
-        <p:txBody>
-          <a:bodyPr rtlCol="0" anchor="ctr" wrap="square" lIns="73152" tIns="9144" rIns="54864" bIns="9144">
-            <a:noAutofit/>
-          </a:bodyPr>
-          <a:lstStyle/>
-          <a:p>
-            <a:pPr marL="0" indent="0" algn="l">
-              <a:lnSpc>
-                <a:spcPct val="100000"/>
-              </a:lnSpc>
-              <a:spcBef>
-                <a:spcPts val="0"/>
-              </a:spcBef>
-              <a:spcAft>
-                <a:spcPts val="0"/>
-              </a:spcAft>
-              <a:buNone/>
-            </a:pPr>
-            <a:r>
-              <a:rPr lang="en-IN" sz="950" dirty="0">
-                <a:solidFill>
-                  <a:srgbClr val="1A1A1A"/>
-                </a:solidFill>
-                <a:latin typeface="Arial"/>
-                <a:ea typeface="Arial"/>
-                <a:cs typeface="Arial"/>
-                <a:sym typeface="Arial"/>
-              </a:rPr>
-              <a:t>Vogel (1968). Inflow performance relationships for solution-gas drive wells. JPT.</a:t>
-            </a:r>
-            <a:endParaRPr lang="en-IN" sz="950" dirty="0"/>
-          </a:p>
-          <a:p>
-            <a:pPr marL="0" indent="0" algn="l">
-              <a:lnSpc>
-                <a:spcPct val="100000"/>
-              </a:lnSpc>
-              <a:spcBef>
-                <a:spcPts val="0"/>
-              </a:spcBef>
-              <a:spcAft>
-                <a:spcPts val="0"/>
-              </a:spcAft>
-              <a:buNone/>
-            </a:pPr>
-            <a:r>
-              <a:rPr lang="en-IN" sz="800" dirty="0">
-                <a:solidFill>
-                  <a:srgbClr val="0563C1"/>
-                </a:solidFill>
-                <a:latin typeface="Arial"/>
-                <a:ea typeface="Arial"/>
-                <a:cs typeface="Arial"/>
-                <a:sym typeface="Arial"/>
-                <a:hlinkClick r:id="rId9"/>
-              </a:rPr>
-              <a:t>https://onepetro.org/JPT/article/20/01/83/163252</a:t>
-            </a:r>
-            <a:endParaRPr lang="en-IN" sz="800" dirty="0"/>
-          </a:p>
-        </p:txBody>
-      </p:sp>
-      <p:sp>
-        <p:nvSpPr>
-          <p:cNvPr id="17418" name="FD_R03"/>
-          <p:cNvSpPr/>
-          <p:nvPr/>
-        </p:nvSpPr>
-        <p:spPr>
-          <a:xfrm>
-            <a:off x="384048" y="3639312"/>
-            <a:ext cx="5710428" cy="365760"/>
-          </a:xfrm>
-          <a:prstGeom prst="roundRect">
-            <a:avLst>
-              <a:gd name="adj" fmla="val 12500"/>
-            </a:avLst>
-          </a:prstGeom>
-          <a:solidFill>
-            <a:srgbClr val="FFFFFF"/>
-          </a:solidFill>
-          <a:ln w="6350">
-            <a:solidFill>
-              <a:srgbClr val="1F497D"/>
-            </a:solidFill>
-            <a:round/>
-          </a:ln>
-        </p:spPr>
-        <p:txBody>
-          <a:bodyPr rtlCol="0" anchor="ctr" wrap="square" lIns="73152" tIns="9144" rIns="54864" bIns="9144">
-            <a:noAutofit/>
-          </a:bodyPr>
-          <a:lstStyle/>
-          <a:p>
-            <a:pPr marL="0" indent="0" algn="l">
-              <a:lnSpc>
-                <a:spcPct val="100000"/>
-              </a:lnSpc>
-              <a:spcBef>
-                <a:spcPts val="0"/>
-              </a:spcBef>
-              <a:spcAft>
-                <a:spcPts val="0"/>
-              </a:spcAft>
-              <a:buNone/>
-            </a:pPr>
-            <a:r>
-              <a:rPr lang="en-IN" sz="950" dirty="0">
-                <a:solidFill>
-                  <a:srgbClr val="1A1A1A"/>
-                </a:solidFill>
-                <a:latin typeface="Arial"/>
-                <a:ea typeface="Arial"/>
-                <a:cs typeface="Arial"/>
-                <a:sym typeface="Arial"/>
-              </a:rPr>
-              <a:t>Gibbs (1963). Predicting the behavior of sucker-rod pumping systems. JPT 15.</a:t>
-            </a:r>
-            <a:endParaRPr lang="en-IN" sz="950" dirty="0"/>
-          </a:p>
-          <a:p>
-            <a:pPr marL="0" indent="0" algn="l">
-              <a:lnSpc>
-                <a:spcPct val="100000"/>
-              </a:lnSpc>
-              <a:spcBef>
-                <a:spcPts val="0"/>
-              </a:spcBef>
-              <a:spcAft>
-                <a:spcPts val="0"/>
-              </a:spcAft>
-              <a:buNone/>
-            </a:pPr>
-            <a:r>
-              <a:rPr lang="en-IN" sz="800" dirty="0">
-                <a:solidFill>
-                  <a:srgbClr val="0563C1"/>
-                </a:solidFill>
-                <a:latin typeface="Arial"/>
-                <a:ea typeface="Arial"/>
-                <a:cs typeface="Arial"/>
-                <a:sym typeface="Arial"/>
-                <a:hlinkClick r:id="rId10"/>
-              </a:rPr>
-              <a:t>https://doi.org/10.2118/588-PA</a:t>
-            </a:r>
-            <a:endParaRPr lang="en-IN" sz="800" dirty="0"/>
-          </a:p>
-        </p:txBody>
-      </p:sp>
-      <p:sp>
-        <p:nvSpPr>
-          <p:cNvPr id="17419" name="FD_R04"/>
-          <p:cNvSpPr/>
-          <p:nvPr/>
-        </p:nvSpPr>
-        <p:spPr>
-          <a:xfrm>
-            <a:off x="384048" y="4059936"/>
-            <a:ext cx="5710428" cy="365760"/>
-          </a:xfrm>
-          <a:prstGeom prst="roundRect">
-            <a:avLst>
-              <a:gd name="adj" fmla="val 12500"/>
-            </a:avLst>
-          </a:prstGeom>
-          <a:solidFill>
-            <a:srgbClr val="FFFFFF"/>
-          </a:solidFill>
-          <a:ln w="6350">
-            <a:solidFill>
-              <a:srgbClr val="1F497D"/>
-            </a:solidFill>
-            <a:round/>
-          </a:ln>
-        </p:spPr>
-        <p:txBody>
-          <a:bodyPr rtlCol="0" anchor="ctr" wrap="square" lIns="73152" tIns="9144" rIns="54864" bIns="9144">
-            <a:noAutofit/>
-          </a:bodyPr>
-          <a:lstStyle/>
-          <a:p>
-            <a:pPr marL="0" indent="0" algn="l">
-              <a:lnSpc>
-                <a:spcPct val="100000"/>
-              </a:lnSpc>
-              <a:spcBef>
-                <a:spcPts val="0"/>
-              </a:spcBef>
-              <a:spcAft>
-                <a:spcPts val="0"/>
-              </a:spcAft>
-              <a:buNone/>
-            </a:pPr>
-            <a:r>
-              <a:rPr lang="en-IN" sz="950" dirty="0">
-                <a:solidFill>
-                  <a:srgbClr val="1A1A1A"/>
-                </a:solidFill>
-                <a:latin typeface="Arial"/>
-                <a:ea typeface="Arial"/>
-                <a:cs typeface="Arial"/>
-                <a:sym typeface="Arial"/>
-              </a:rPr>
-              <a:t>ASTM D341 viscosity–temperature charts (Walther); Pal &amp; Rhodes (1989) emulsions.</a:t>
-            </a:r>
-            <a:endParaRPr lang="en-IN" sz="950" dirty="0"/>
-          </a:p>
-          <a:p>
-            <a:pPr marL="0" indent="0" algn="l">
-              <a:lnSpc>
-                <a:spcPct val="100000"/>
-              </a:lnSpc>
-              <a:spcBef>
-                <a:spcPts val="0"/>
-              </a:spcBef>
-              <a:spcAft>
-                <a:spcPts val="0"/>
-              </a:spcAft>
-              <a:buNone/>
-            </a:pPr>
-            <a:r>
-              <a:rPr lang="en-IN" sz="800" dirty="0">
-                <a:solidFill>
-                  <a:srgbClr val="0563C1"/>
-                </a:solidFill>
-                <a:latin typeface="Arial"/>
-                <a:ea typeface="Arial"/>
-                <a:cs typeface="Arial"/>
-                <a:sym typeface="Arial"/>
-                <a:hlinkClick r:id="rId11"/>
-              </a:rPr>
-              <a:t>https://www.astm.org/Standards/D341.htm</a:t>
-            </a:r>
-            <a:endParaRPr lang="en-IN" sz="800" dirty="0"/>
-          </a:p>
-        </p:txBody>
-      </p:sp>
-      <p:sp>
-        <p:nvSpPr>
-          <p:cNvPr id="17420" name="FD_R05"/>
-          <p:cNvSpPr/>
-          <p:nvPr/>
-        </p:nvSpPr>
-        <p:spPr>
-          <a:xfrm>
-            <a:off x="384048" y="4480560"/>
-            <a:ext cx="5710428" cy="365760"/>
-          </a:xfrm>
-          <a:prstGeom prst="roundRect">
-            <a:avLst>
-              <a:gd name="adj" fmla="val 12500"/>
-            </a:avLst>
-          </a:prstGeom>
-          <a:solidFill>
-            <a:srgbClr val="FFFFFF"/>
-          </a:solidFill>
-          <a:ln w="6350">
-            <a:solidFill>
-              <a:srgbClr val="1F497D"/>
-            </a:solidFill>
-            <a:round/>
-          </a:ln>
-        </p:spPr>
-        <p:txBody>
-          <a:bodyPr rtlCol="0" anchor="ctr" wrap="square" lIns="73152" tIns="9144" rIns="54864" bIns="9144">
-            <a:noAutofit/>
-          </a:bodyPr>
-          <a:lstStyle/>
-          <a:p>
-            <a:pPr marL="0" indent="0" algn="l">
-              <a:lnSpc>
-                <a:spcPct val="100000"/>
-              </a:lnSpc>
-              <a:spcBef>
-                <a:spcPts val="0"/>
-              </a:spcBef>
-              <a:spcAft>
-                <a:spcPts val="0"/>
-              </a:spcAft>
-              <a:buNone/>
-            </a:pPr>
-            <a:r>
-              <a:rPr lang="en-IN" sz="950" dirty="0">
-                <a:solidFill>
-                  <a:srgbClr val="1A1A1A"/>
-                </a:solidFill>
-                <a:latin typeface="Arial"/>
-                <a:ea typeface="Arial"/>
-                <a:cs typeface="Arial"/>
-                <a:sym typeface="Arial"/>
-              </a:rPr>
-              <a:t>API Spec 11E / RP 11L — pumping-unit ratings and rod-string design.</a:t>
-            </a:r>
-            <a:endParaRPr lang="en-IN" sz="950" dirty="0"/>
-          </a:p>
-          <a:p>
-            <a:pPr marL="0" indent="0" algn="l">
-              <a:lnSpc>
-                <a:spcPct val="100000"/>
-              </a:lnSpc>
-              <a:spcBef>
-                <a:spcPts val="0"/>
-              </a:spcBef>
-              <a:spcAft>
-                <a:spcPts val="0"/>
-              </a:spcAft>
-              <a:buNone/>
-            </a:pPr>
-            <a:r>
-              <a:rPr lang="en-IN" sz="800" dirty="0">
-                <a:solidFill>
-                  <a:srgbClr val="0563C1"/>
-                </a:solidFill>
-                <a:latin typeface="Arial"/>
-                <a:ea typeface="Arial"/>
-                <a:cs typeface="Arial"/>
-                <a:sym typeface="Arial"/>
-                <a:hlinkClick r:id="rId12"/>
-              </a:rPr>
-              <a:t>https://www.api.org/products-and-services/standards</a:t>
-            </a:r>
-            <a:endParaRPr lang="en-IN" sz="800" dirty="0"/>
-          </a:p>
-        </p:txBody>
-      </p:sp>
-      <p:sp>
-        <p:nvSpPr>
-          <p:cNvPr id="17421" name="FD_R10"/>
-          <p:cNvSpPr/>
-          <p:nvPr/>
-        </p:nvSpPr>
-        <p:spPr>
-          <a:xfrm>
-            <a:off x="6185916" y="2377440"/>
-            <a:ext cx="5710428" cy="365760"/>
-          </a:xfrm>
-          <a:prstGeom prst="roundRect">
-            <a:avLst>
-              <a:gd name="adj" fmla="val 12500"/>
-            </a:avLst>
-          </a:prstGeom>
-          <a:solidFill>
-            <a:srgbClr val="FFFFFF"/>
-          </a:solidFill>
-          <a:ln w="6350">
-            <a:solidFill>
-              <a:srgbClr val="1F497D"/>
-            </a:solidFill>
-            <a:round/>
-          </a:ln>
-        </p:spPr>
-        <p:txBody>
-          <a:bodyPr rtlCol="0" anchor="ctr" wrap="square" lIns="73152" tIns="9144" rIns="54864" bIns="9144">
-            <a:noAutofit/>
-          </a:bodyPr>
-          <a:lstStyle/>
-          <a:p>
-            <a:pPr marL="0" indent="0" algn="l">
-              <a:lnSpc>
-                <a:spcPct val="100000"/>
-              </a:lnSpc>
-              <a:spcBef>
-                <a:spcPts val="0"/>
-              </a:spcBef>
-              <a:spcAft>
-                <a:spcPts val="0"/>
-              </a:spcAft>
-              <a:buNone/>
-            </a:pPr>
-            <a:r>
-              <a:rPr lang="en-IN" sz="950" dirty="0">
-                <a:solidFill>
-                  <a:srgbClr val="1A1A1A"/>
-                </a:solidFill>
-                <a:latin typeface="Arial"/>
-                <a:ea typeface="Arial"/>
-                <a:cs typeface="Arial"/>
-                <a:sym typeface="Arial"/>
-              </a:rPr>
-              <a:t>SPE-23APOG-535203 (2023). Baghewala heavy oil: depth, API, viscosity, heater case.</a:t>
-            </a:r>
-            <a:endParaRPr lang="en-IN" sz="950" dirty="0"/>
-          </a:p>
-          <a:p>
-            <a:pPr marL="0" indent="0" algn="l">
-              <a:lnSpc>
-                <a:spcPct val="100000"/>
-              </a:lnSpc>
-              <a:spcBef>
-                <a:spcPts val="0"/>
-              </a:spcBef>
-              <a:spcAft>
-                <a:spcPts val="0"/>
-              </a:spcAft>
-              <a:buNone/>
-            </a:pPr>
-            <a:r>
-              <a:rPr lang="en-IN" sz="800" dirty="0">
-                <a:solidFill>
-                  <a:srgbClr val="0563C1"/>
-                </a:solidFill>
-                <a:latin typeface="Arial"/>
-                <a:ea typeface="Arial"/>
-                <a:cs typeface="Arial"/>
-                <a:sym typeface="Arial"/>
-                <a:hlinkClick r:id="rId13"/>
-              </a:rPr>
-              <a:t>https://onepetro.org/SPEAPOG/proceedings-abstract/23APOG/2-23APOG/535203</a:t>
-            </a:r>
-            <a:endParaRPr lang="en-IN" sz="800" dirty="0"/>
-          </a:p>
-        </p:txBody>
-      </p:sp>
-      <p:sp>
-        <p:nvSpPr>
-          <p:cNvPr id="17422" name="FD_R11"/>
-          <p:cNvSpPr/>
-          <p:nvPr/>
-        </p:nvSpPr>
-        <p:spPr>
-          <a:xfrm>
-            <a:off x="6185916" y="2798064"/>
-            <a:ext cx="5710428" cy="365760"/>
-          </a:xfrm>
-          <a:prstGeom prst="roundRect">
-            <a:avLst>
-              <a:gd name="adj" fmla="val 12500"/>
-            </a:avLst>
-          </a:prstGeom>
-          <a:solidFill>
-            <a:srgbClr val="FFFFFF"/>
-          </a:solidFill>
-          <a:ln w="6350">
-            <a:solidFill>
-              <a:srgbClr val="1F497D"/>
-            </a:solidFill>
-            <a:round/>
-          </a:ln>
-        </p:spPr>
-        <p:txBody>
-          <a:bodyPr rtlCol="0" anchor="ctr" wrap="square" lIns="73152" tIns="9144" rIns="54864" bIns="9144">
-            <a:noAutofit/>
-          </a:bodyPr>
-          <a:lstStyle/>
-          <a:p>
-            <a:pPr marL="0" indent="0" algn="l">
-              <a:lnSpc>
-                <a:spcPct val="100000"/>
-              </a:lnSpc>
-              <a:spcBef>
-                <a:spcPts val="0"/>
-              </a:spcBef>
-              <a:spcAft>
-                <a:spcPts val="0"/>
-              </a:spcAft>
-              <a:buNone/>
-            </a:pPr>
-            <a:r>
-              <a:rPr lang="en-IN" sz="950" dirty="0">
-                <a:solidFill>
-                  <a:srgbClr val="1A1A1A"/>
-                </a:solidFill>
-                <a:latin typeface="Arial"/>
-                <a:ea typeface="Arial"/>
-                <a:cs typeface="Arial"/>
-                <a:sym typeface="Arial"/>
-              </a:rPr>
-              <a:t>Yasin et al. (2022). Scientific Reports 12:11086 — Baghewala-1 reservoir properties.</a:t>
-            </a:r>
-            <a:endParaRPr lang="en-IN" sz="950" dirty="0"/>
-          </a:p>
-          <a:p>
-            <a:pPr marL="0" indent="0" algn="l">
-              <a:lnSpc>
-                <a:spcPct val="100000"/>
-              </a:lnSpc>
-              <a:spcBef>
-                <a:spcPts val="0"/>
-              </a:spcBef>
-              <a:spcAft>
-                <a:spcPts val="0"/>
-              </a:spcAft>
-              <a:buNone/>
-            </a:pPr>
-            <a:r>
-              <a:rPr lang="en-IN" sz="800" dirty="0">
-                <a:solidFill>
-                  <a:srgbClr val="0563C1"/>
-                </a:solidFill>
-                <a:latin typeface="Arial"/>
-                <a:ea typeface="Arial"/>
-                <a:cs typeface="Arial"/>
-                <a:sym typeface="Arial"/>
-                <a:hlinkClick r:id="rId14"/>
-              </a:rPr>
-              <a:t>https://doi.org/10.1038/s41598-022-14831-5</a:t>
-            </a:r>
-            <a:endParaRPr lang="en-IN" sz="800" dirty="0"/>
-          </a:p>
-        </p:txBody>
-      </p:sp>
-      <p:sp>
-        <p:nvSpPr>
-          <p:cNvPr id="17423" name="FD_R12"/>
-          <p:cNvSpPr/>
-          <p:nvPr/>
-        </p:nvSpPr>
-        <p:spPr>
-          <a:xfrm>
-            <a:off x="6185916" y="3218688"/>
-            <a:ext cx="5710428" cy="365760"/>
-          </a:xfrm>
-          <a:prstGeom prst="roundRect">
-            <a:avLst>
-              <a:gd name="adj" fmla="val 12500"/>
-            </a:avLst>
-          </a:prstGeom>
-          <a:solidFill>
-            <a:srgbClr val="FFFFFF"/>
-          </a:solidFill>
-          <a:ln w="6350">
-            <a:solidFill>
-              <a:srgbClr val="1F497D"/>
-            </a:solidFill>
-            <a:round/>
-          </a:ln>
-        </p:spPr>
-        <p:txBody>
-          <a:bodyPr rtlCol="0" anchor="ctr" wrap="square" lIns="73152" tIns="9144" rIns="54864" bIns="9144">
-            <a:noAutofit/>
-          </a:bodyPr>
-          <a:lstStyle/>
-          <a:p>
-            <a:pPr marL="0" indent="0" algn="l">
-              <a:lnSpc>
-                <a:spcPct val="100000"/>
-              </a:lnSpc>
-              <a:spcBef>
-                <a:spcPts val="0"/>
-              </a:spcBef>
-              <a:spcAft>
-                <a:spcPts val="0"/>
-              </a:spcAft>
-              <a:buNone/>
-            </a:pPr>
-            <a:r>
-              <a:rPr lang="en-IN" sz="950" dirty="0">
-                <a:solidFill>
-                  <a:srgbClr val="1A1A1A"/>
-                </a:solidFill>
-                <a:latin typeface="Arial"/>
-                <a:ea typeface="Arial"/>
-                <a:cs typeface="Arial"/>
-                <a:sym typeface="Arial"/>
-              </a:rPr>
-              <a:t>Oil India Ltd — Rajasthan fields (BGW-8 CSS); investor presentation (realised price).</a:t>
-            </a:r>
-            <a:endParaRPr lang="en-IN" sz="950" dirty="0"/>
-          </a:p>
-          <a:p>
-            <a:pPr marL="0" indent="0" algn="l">
-              <a:lnSpc>
-                <a:spcPct val="100000"/>
-              </a:lnSpc>
-              <a:spcBef>
-                <a:spcPts val="0"/>
-              </a:spcBef>
-              <a:spcAft>
-                <a:spcPts val="0"/>
-              </a:spcAft>
-              <a:buNone/>
-            </a:pPr>
-            <a:r>
-              <a:rPr lang="en-IN" sz="800" dirty="0">
-                <a:solidFill>
-                  <a:srgbClr val="0563C1"/>
-                </a:solidFill>
-                <a:latin typeface="Arial"/>
-                <a:ea typeface="Arial"/>
-                <a:cs typeface="Arial"/>
-                <a:sym typeface="Arial"/>
-                <a:hlinkClick r:id="rId15"/>
-              </a:rPr>
-              <a:t>https://www.oil-india.com/rajasthan-fields</a:t>
-            </a:r>
-            <a:endParaRPr lang="en-IN" sz="800" dirty="0"/>
-          </a:p>
-        </p:txBody>
-      </p:sp>
-      <p:sp>
-        <p:nvSpPr>
-          <p:cNvPr id="17424" name="FD_R13"/>
-          <p:cNvSpPr/>
-          <p:nvPr/>
-        </p:nvSpPr>
-        <p:spPr>
-          <a:xfrm>
-            <a:off x="6185916" y="3639312"/>
-            <a:ext cx="5710428" cy="365760"/>
-          </a:xfrm>
-          <a:prstGeom prst="roundRect">
-            <a:avLst>
-              <a:gd name="adj" fmla="val 12500"/>
-            </a:avLst>
-          </a:prstGeom>
-          <a:solidFill>
-            <a:srgbClr val="FFFFFF"/>
-          </a:solidFill>
-          <a:ln w="6350">
-            <a:solidFill>
-              <a:srgbClr val="1F497D"/>
-            </a:solidFill>
-            <a:round/>
-          </a:ln>
-        </p:spPr>
-        <p:txBody>
-          <a:bodyPr rtlCol="0" anchor="ctr" wrap="square" lIns="73152" tIns="9144" rIns="54864" bIns="9144">
-            <a:noAutofit/>
-          </a:bodyPr>
-          <a:lstStyle/>
-          <a:p>
-            <a:pPr marL="0" indent="0" algn="l">
-              <a:lnSpc>
-                <a:spcPct val="100000"/>
-              </a:lnSpc>
-              <a:spcBef>
-                <a:spcPts val="0"/>
-              </a:spcBef>
-              <a:spcAft>
-                <a:spcPts val="0"/>
-              </a:spcAft>
-              <a:buNone/>
-            </a:pPr>
-            <a:r>
-              <a:rPr lang="en-IN" sz="950" dirty="0">
-                <a:solidFill>
-                  <a:srgbClr val="1A1A1A"/>
-                </a:solidFill>
-                <a:latin typeface="Arial"/>
-                <a:ea typeface="Arial"/>
-                <a:cs typeface="Arial"/>
-                <a:sym typeface="Arial"/>
-              </a:rPr>
-              <a:t>CalGEM (2021). Annual Report of the State Oil &amp; Gas Supervisor — field steam-oil ratios.</a:t>
-            </a:r>
-            <a:endParaRPr lang="en-IN" sz="950" dirty="0"/>
-          </a:p>
-          <a:p>
-            <a:pPr marL="0" indent="0" algn="l">
-              <a:lnSpc>
-                <a:spcPct val="100000"/>
-              </a:lnSpc>
-              <a:spcBef>
-                <a:spcPts val="0"/>
-              </a:spcBef>
-              <a:spcAft>
-                <a:spcPts val="0"/>
-              </a:spcAft>
-              <a:buNone/>
-            </a:pPr>
-            <a:r>
-              <a:rPr lang="en-IN" sz="800" dirty="0">
-                <a:solidFill>
-                  <a:srgbClr val="0563C1"/>
-                </a:solidFill>
-                <a:latin typeface="Arial"/>
-                <a:ea typeface="Arial"/>
-                <a:cs typeface="Arial"/>
-                <a:sym typeface="Arial"/>
-                <a:hlinkClick r:id="rId16"/>
-              </a:rPr>
-              <a:t>https://www.conservation.ca.gov/calgem/Documents/2021%20CalGEM%20Supervisor%20Annual%20Report.pdf</a:t>
-            </a:r>
-            <a:endParaRPr lang="en-IN" sz="800" dirty="0"/>
-          </a:p>
-        </p:txBody>
-      </p:sp>
-      <p:sp>
-        <p:nvSpPr>
-          <p:cNvPr id="17425" name="FD_R14"/>
-          <p:cNvSpPr/>
-          <p:nvPr/>
-        </p:nvSpPr>
-        <p:spPr>
-          <a:xfrm>
-            <a:off x="6185916" y="4059936"/>
-            <a:ext cx="5710428" cy="365760"/>
-          </a:xfrm>
-          <a:prstGeom prst="roundRect">
-            <a:avLst>
-              <a:gd name="adj" fmla="val 12500"/>
-            </a:avLst>
-          </a:prstGeom>
-          <a:solidFill>
-            <a:srgbClr val="FFFFFF"/>
-          </a:solidFill>
-          <a:ln w="6350">
-            <a:solidFill>
-              <a:srgbClr val="1F497D"/>
-            </a:solidFill>
-            <a:round/>
-          </a:ln>
-        </p:spPr>
-        <p:txBody>
-          <a:bodyPr rtlCol="0" anchor="ctr" wrap="square" lIns="73152" tIns="9144" rIns="54864" bIns="9144">
-            <a:noAutofit/>
-          </a:bodyPr>
-          <a:lstStyle/>
-          <a:p>
-            <a:pPr marL="0" indent="0" algn="l">
-              <a:lnSpc>
-                <a:spcPct val="100000"/>
-              </a:lnSpc>
-              <a:spcBef>
-                <a:spcPts val="0"/>
-              </a:spcBef>
-              <a:spcAft>
-                <a:spcPts val="0"/>
-              </a:spcAft>
-              <a:buNone/>
-            </a:pPr>
-            <a:r>
-              <a:rPr lang="en-IN" sz="950" dirty="0">
-                <a:solidFill>
-                  <a:srgbClr val="1A1A1A"/>
-                </a:solidFill>
-                <a:latin typeface="Arial"/>
-                <a:ea typeface="Arial"/>
-                <a:cs typeface="Arial"/>
-                <a:sym typeface="Arial"/>
-              </a:rPr>
-              <a:t>Inside Climate News (2022) mirror of CalGEM injection data — 9,692 cyclic-steam records.</a:t>
-            </a:r>
-            <a:endParaRPr lang="en-IN" sz="950" dirty="0"/>
-          </a:p>
-          <a:p>
-            <a:pPr marL="0" indent="0" algn="l">
-              <a:lnSpc>
-                <a:spcPct val="100000"/>
-              </a:lnSpc>
-              <a:spcBef>
-                <a:spcPts val="0"/>
-              </a:spcBef>
-              <a:spcAft>
-                <a:spcPts val="0"/>
-              </a:spcAft>
-              <a:buNone/>
-            </a:pPr>
-            <a:r>
-              <a:rPr lang="en-IN" sz="800" dirty="0">
-                <a:solidFill>
-                  <a:srgbClr val="0563C1"/>
-                </a:solidFill>
-                <a:latin typeface="Arial"/>
-                <a:ea typeface="Arial"/>
-                <a:cs typeface="Arial"/>
-                <a:sym typeface="Arial"/>
-                <a:hlinkClick r:id="rId17"/>
-              </a:rPr>
-              <a:t>https://github.com/InsideClimateNews/2022-09-ca-kern-oil-water</a:t>
-            </a:r>
-            <a:endParaRPr lang="en-IN" sz="800" dirty="0"/>
-          </a:p>
-        </p:txBody>
-      </p:sp>
-      <p:sp>
-        <p:nvSpPr>
-          <p:cNvPr id="17426" name="FD_R15"/>
-          <p:cNvSpPr/>
-          <p:nvPr/>
-        </p:nvSpPr>
-        <p:spPr>
-          <a:xfrm>
-            <a:off x="6185916" y="4480560"/>
-            <a:ext cx="5710428" cy="365760"/>
-          </a:xfrm>
-          <a:prstGeom prst="roundRect">
-            <a:avLst>
-              <a:gd name="adj" fmla="val 12500"/>
-            </a:avLst>
-          </a:prstGeom>
-          <a:solidFill>
-            <a:srgbClr val="FFFFFF"/>
-          </a:solidFill>
-          <a:ln w="6350">
-            <a:solidFill>
-              <a:srgbClr val="1F497D"/>
-            </a:solidFill>
-            <a:round/>
-          </a:ln>
-        </p:spPr>
-        <p:txBody>
-          <a:bodyPr rtlCol="0" anchor="ctr" wrap="square" lIns="73152" tIns="9144" rIns="54864" bIns="9144">
-            <a:noAutofit/>
-          </a:bodyPr>
-          <a:lstStyle/>
-          <a:p>
-            <a:pPr marL="0" indent="0" algn="l">
-              <a:lnSpc>
-                <a:spcPct val="100000"/>
-              </a:lnSpc>
-              <a:spcBef>
-                <a:spcPts val="0"/>
-              </a:spcBef>
-              <a:spcAft>
-                <a:spcPts val="0"/>
-              </a:spcAft>
-              <a:buNone/>
-            </a:pPr>
-            <a:r>
-              <a:rPr lang="en-IN" sz="950" dirty="0">
-                <a:solidFill>
-                  <a:srgbClr val="1A1A1A"/>
-                </a:solidFill>
-                <a:latin typeface="Arial"/>
-                <a:ea typeface="Arial"/>
-                <a:cs typeface="Arial"/>
-                <a:sym typeface="Arial"/>
-              </a:rPr>
-              <a:t>Landscape: XSPOC, Lufkin SAM/SROD, ForeSite, AVEVA — none couples CSS with the pump.</a:t>
-            </a:r>
-            <a:endParaRPr lang="en-IN" sz="950" dirty="0"/>
-          </a:p>
-          <a:p>
-            <a:pPr marL="0" indent="0" algn="l">
-              <a:lnSpc>
-                <a:spcPct val="100000"/>
-              </a:lnSpc>
-              <a:spcBef>
-                <a:spcPts val="0"/>
-              </a:spcBef>
-              <a:spcAft>
-                <a:spcPts val="0"/>
-              </a:spcAft>
-              <a:buNone/>
-            </a:pPr>
-            <a:r>
-              <a:rPr lang="en-IN" sz="800" dirty="0">
-                <a:solidFill>
-                  <a:srgbClr val="0563C1"/>
-                </a:solidFill>
-                <a:latin typeface="Arial"/>
-                <a:ea typeface="Arial"/>
-                <a:cs typeface="Arial"/>
-                <a:sym typeface="Arial"/>
-                <a:hlinkClick r:id="rId18"/>
-              </a:rPr>
-              <a:t>https://www.lufkin.com/solutions-services/srod/</a:t>
-            </a:r>
-            <a:endParaRPr lang="en-IN" sz="800" dirty="0"/>
-          </a:p>
-        </p:txBody>
-      </p:sp>
-      <p:sp>
-        <p:nvSpPr>
-          <p:cNvPr id="17427" name="FD_K1"/>
-          <p:cNvSpPr/>
-          <p:nvPr/>
-        </p:nvSpPr>
-        <p:spPr>
-          <a:xfrm>
-            <a:off x="384048" y="5367528"/>
-            <a:ext cx="3776472" cy="402336"/>
-          </a:xfrm>
-          <a:prstGeom prst="roundRect">
-            <a:avLst>
-              <a:gd name="adj" fmla="val 13636"/>
-            </a:avLst>
-          </a:prstGeom>
-          <a:solidFill>
-            <a:srgbClr val="FFFFFF"/>
-          </a:solidFill>
-          <a:ln w="9525">
-            <a:solidFill>
-              <a:srgbClr val="5B3FA0"/>
-            </a:solidFill>
-            <a:round/>
-          </a:ln>
-        </p:spPr>
-        <p:txBody>
-          <a:bodyPr rtlCol="0" anchor="ctr" wrap="square" lIns="457200" tIns="9144" rIns="45720" bIns="9144">
-            <a:noAutofit/>
-          </a:bodyPr>
-          <a:lstStyle/>
-          <a:p>
-            <a:pPr marL="0" indent="0" algn="l">
-              <a:lnSpc>
-                <a:spcPct val="100000"/>
-              </a:lnSpc>
-              <a:spcBef>
-                <a:spcPts val="0"/>
-              </a:spcBef>
-              <a:spcAft>
-                <a:spcPts val="0"/>
-              </a:spcAft>
-              <a:buNone/>
-            </a:pPr>
-            <a:r>
-              <a:rPr lang="en-IN" sz="1050" dirty="0">
-                <a:solidFill>
-                  <a:srgbClr val="1A1A1A"/>
-                </a:solidFill>
-                <a:latin typeface="Arial"/>
-                <a:ea typeface="Arial"/>
-                <a:cs typeface="Arial"/>
-                <a:sym typeface="Arial"/>
-              </a:rPr>
-              <a:t>Live dashboard:</a:t>
-            </a:r>
-            <a:endParaRPr lang="en-IN" sz="1050" dirty="0"/>
-          </a:p>
-          <a:p>
-            <a:pPr marL="0" indent="0" algn="l">
-              <a:lnSpc>
-                <a:spcPct val="100000"/>
-              </a:lnSpc>
-              <a:spcBef>
-                <a:spcPts val="0"/>
-              </a:spcBef>
-              <a:spcAft>
-                <a:spcPts val="0"/>
-              </a:spcAft>
-              <a:buNone/>
-            </a:pPr>
-            <a:r>
-              <a:rPr lang="en-IN" sz="1050" dirty="0">
-                <a:solidFill>
-                  <a:srgbClr val="1A1A1A"/>
-                </a:solidFill>
-                <a:latin typeface="Arial"/>
-                <a:ea typeface="Arial"/>
-                <a:cs typeface="Arial"/>
-                <a:sym typeface="Arial"/>
-              </a:rPr>
-              <a:t>https://  ________________</a:t>
-            </a:r>
-            <a:endParaRPr lang="en-IN" sz="1050" dirty="0"/>
-          </a:p>
-        </p:txBody>
-      </p:sp>
-      <p:sp>
-        <p:nvSpPr>
-          <p:cNvPr id="17428" name="FD_K2"/>
-          <p:cNvSpPr/>
-          <p:nvPr/>
-        </p:nvSpPr>
-        <p:spPr>
-          <a:xfrm>
-            <a:off x="4251960" y="5367528"/>
-            <a:ext cx="3776472" cy="402336"/>
-          </a:xfrm>
-          <a:prstGeom prst="roundRect">
-            <a:avLst>
-              <a:gd name="adj" fmla="val 13636"/>
-            </a:avLst>
-          </a:prstGeom>
-          <a:solidFill>
-            <a:srgbClr val="FFFFFF"/>
-          </a:solidFill>
-          <a:ln w="9525">
-            <a:solidFill>
-              <a:srgbClr val="5B3FA0"/>
-            </a:solidFill>
-            <a:round/>
-          </a:ln>
-        </p:spPr>
-        <p:txBody>
-          <a:bodyPr rtlCol="0" anchor="ctr" wrap="square" lIns="457200" tIns="9144" rIns="45720" bIns="9144">
-            <a:noAutofit/>
-          </a:bodyPr>
-          <a:lstStyle/>
-          <a:p>
-            <a:pPr marL="0" indent="0" algn="l">
-              <a:lnSpc>
-                <a:spcPct val="100000"/>
-              </a:lnSpc>
-              <a:spcBef>
-                <a:spcPts val="0"/>
-              </a:spcBef>
-              <a:spcAft>
-                <a:spcPts val="0"/>
-              </a:spcAft>
-              <a:buNone/>
-            </a:pPr>
-            <a:r>
-              <a:rPr lang="en-IN" sz="1050" dirty="0">
-                <a:solidFill>
-                  <a:srgbClr val="1A1A1A"/>
-                </a:solidFill>
-                <a:latin typeface="Arial"/>
-                <a:ea typeface="Arial"/>
-                <a:cs typeface="Arial"/>
-                <a:sym typeface="Arial"/>
-              </a:rPr>
-              <a:t>Demo video:</a:t>
-            </a:r>
-            <a:endParaRPr lang="en-IN" sz="1050" dirty="0"/>
-          </a:p>
-          <a:p>
-            <a:pPr marL="0" indent="0" algn="l">
-              <a:lnSpc>
-                <a:spcPct val="100000"/>
-              </a:lnSpc>
-              <a:spcBef>
-                <a:spcPts val="0"/>
-              </a:spcBef>
-              <a:spcAft>
-                <a:spcPts val="0"/>
-              </a:spcAft>
-              <a:buNone/>
-            </a:pPr>
-            <a:r>
-              <a:rPr lang="en-IN" sz="1050" dirty="0">
-                <a:solidFill>
-                  <a:srgbClr val="1A1A1A"/>
-                </a:solidFill>
-                <a:latin typeface="Arial"/>
-                <a:ea typeface="Arial"/>
-                <a:cs typeface="Arial"/>
-                <a:sym typeface="Arial"/>
-              </a:rPr>
-              <a:t>https://  ________________</a:t>
-            </a:r>
-            <a:endParaRPr lang="en-IN" sz="1050" dirty="0"/>
-          </a:p>
-        </p:txBody>
-      </p:sp>
-      <p:sp>
-        <p:nvSpPr>
-          <p:cNvPr id="17429" name="FD_K3"/>
-          <p:cNvSpPr/>
-          <p:nvPr/>
-        </p:nvSpPr>
-        <p:spPr>
-          <a:xfrm>
-            <a:off x="8119872" y="5367528"/>
-            <a:ext cx="3776472" cy="402336"/>
-          </a:xfrm>
-          <a:prstGeom prst="roundRect">
-            <a:avLst>
-              <a:gd name="adj" fmla="val 13636"/>
-            </a:avLst>
-          </a:prstGeom>
-          <a:solidFill>
-            <a:srgbClr val="FFFFFF"/>
-          </a:solidFill>
-          <a:ln w="9525">
-            <a:solidFill>
-              <a:srgbClr val="5B3FA0"/>
-            </a:solidFill>
-            <a:round/>
-          </a:ln>
-        </p:spPr>
-        <p:txBody>
-          <a:bodyPr rtlCol="0" anchor="ctr" wrap="square" lIns="457200" tIns="9144" rIns="45720" bIns="9144">
-            <a:noAutofit/>
-          </a:bodyPr>
-          <a:lstStyle/>
-          <a:p>
-            <a:pPr marL="0" indent="0" algn="l">
-              <a:lnSpc>
-                <a:spcPct val="100000"/>
-              </a:lnSpc>
-              <a:spcBef>
-                <a:spcPts val="0"/>
-              </a:spcBef>
-              <a:spcAft>
-                <a:spcPts val="0"/>
-              </a:spcAft>
-              <a:buNone/>
-            </a:pPr>
-            <a:r>
-              <a:rPr lang="en-IN" sz="1050" dirty="0">
-                <a:solidFill>
-                  <a:srgbClr val="1A1A1A"/>
-                </a:solidFill>
-                <a:latin typeface="Arial"/>
-                <a:ea typeface="Arial"/>
-                <a:cs typeface="Arial"/>
-                <a:sym typeface="Arial"/>
-              </a:rPr>
-              <a:t>GitHub repository:</a:t>
-            </a:r>
-            <a:endParaRPr lang="en-IN" sz="1050" dirty="0"/>
-          </a:p>
-          <a:p>
-            <a:pPr marL="0" indent="0" algn="l">
-              <a:lnSpc>
-                <a:spcPct val="100000"/>
-              </a:lnSpc>
-              <a:spcBef>
-                <a:spcPts val="0"/>
-              </a:spcBef>
-              <a:spcAft>
-                <a:spcPts val="0"/>
-              </a:spcAft>
-              <a:buNone/>
-            </a:pPr>
-            <a:r>
-              <a:rPr lang="en-IN" sz="1050" dirty="0">
-                <a:solidFill>
-                  <a:srgbClr val="1A1A1A"/>
-                </a:solidFill>
-                <a:latin typeface="Arial"/>
-                <a:ea typeface="Arial"/>
-                <a:cs typeface="Arial"/>
-                <a:sym typeface="Arial"/>
-              </a:rPr>
-              <a:t>https://  ________________</a:t>
-            </a:r>
-            <a:endParaRPr lang="en-IN" sz="1050" dirty="0"/>
-          </a:p>
-        </p:txBody>
-      </p:sp>
-      <p:sp>
-        <p:nvSpPr>
-          <p:cNvPr id="17430" name="FD_n"/>
-          <p:cNvSpPr txBox="1"/>
-          <p:nvPr/>
-        </p:nvSpPr>
-        <p:spPr>
-          <a:xfrm>
-            <a:off x="292608" y="5861304"/>
-            <a:ext cx="11695176" cy="201168"/>
-          </a:xfrm>
-          <a:prstGeom prst="rect">
-            <a:avLst/>
-          </a:prstGeom>
-          <a:noFill/>
-        </p:spPr>
-        <p:txBody>
-          <a:bodyPr wrap="square" lIns="0" tIns="0" rIns="0" bIns="0" anchor="ctr" rtlCol="0">
-            <a:noAutofit/>
-          </a:bodyPr>
-          <a:lstStyle/>
-          <a:p>
-            <a:pPr marL="0" indent="0" algn="l">
-              <a:lnSpc>
-                <a:spcPct val="100000"/>
-              </a:lnSpc>
-              <a:spcBef>
-                <a:spcPts val="0"/>
-              </a:spcBef>
-              <a:spcAft>
-                <a:spcPts val="0"/>
-              </a:spcAft>
-              <a:buNone/>
-            </a:pPr>
-            <a:r>
-              <a:rPr lang="en-IN" sz="1050" dirty="0" i="1">
-                <a:solidFill>
-                  <a:srgbClr val="595959"/>
-                </a:solidFill>
-                <a:latin typeface="Arial"/>
-                <a:ea typeface="Arial"/>
-                <a:cs typeface="Arial"/>
-                <a:sym typeface="Arial"/>
-              </a:rPr>
-              <a:t>Every link is clickable in this PDF · full list with notes in the repository (docs/research/references.md)</a:t>
-            </a:r>
-            <a:endParaRPr lang="en-IN" sz="1050" dirty="0"/>
-          </a:p>
-        </p:txBody>
-      </p:sp>
-      <p:pic>
-        <p:nvPicPr>
-          <p:cNvPr id="17431" name="FD_K1_icon" descr="icon: ic_dashboard.svg"/>
-          <p:cNvPicPr>
-            <a:picLocks noChangeAspect="1"/>
-          </p:cNvPicPr>
-          <p:nvPr/>
-        </p:nvPicPr>
-        <p:blipFill>
-          <a:blip r:embed="rId6"/>
-          <a:stretch>
-            <a:fillRect/>
-          </a:stretch>
-        </p:blipFill>
-        <p:spPr>
-          <a:xfrm>
-            <a:off x="457200" y="5404104"/>
-            <a:ext cx="329184" cy="329184"/>
-          </a:xfrm>
-          <a:prstGeom prst="rect">
-            <a:avLst/>
-          </a:prstGeom>
-        </p:spPr>
-      </p:pic>
-      <p:pic>
-        <p:nvPicPr>
-          <p:cNvPr id="17432" name="FD_K2_icon" descr="icon: ic_sensor.svg"/>
-          <p:cNvPicPr>
-            <a:picLocks noChangeAspect="1"/>
-          </p:cNvPicPr>
-          <p:nvPr/>
-        </p:nvPicPr>
-        <p:blipFill>
-          <a:blip r:embed="rId5"/>
-          <a:stretch>
-            <a:fillRect/>
-          </a:stretch>
-        </p:blipFill>
-        <p:spPr>
-          <a:xfrm>
-            <a:off x="4325112" y="5404104"/>
-            <a:ext cx="329184" cy="329184"/>
-          </a:xfrm>
-          <a:prstGeom prst="rect">
-            <a:avLst/>
-          </a:prstGeom>
-        </p:spPr>
-      </p:pic>
-      <p:pic>
-        <p:nvPicPr>
-          <p:cNvPr id="17433" name="FD_K3_icon" descr="icon: ic_ai-chip.svg"/>
-          <p:cNvPicPr>
-            <a:picLocks noChangeAspect="1"/>
-          </p:cNvPicPr>
-          <p:nvPr/>
-        </p:nvPicPr>
-        <p:blipFill>
-          <a:blip r:embed="rId4"/>
-          <a:stretch>
-            <a:fillRect/>
-          </a:stretch>
-        </p:blipFill>
-        <p:spPr>
-          <a:xfrm>
-            <a:off x="8193024" y="5404104"/>
-            <a:ext cx="329184" cy="329184"/>
-          </a:xfrm>
-          <a:prstGeom prst="rect">
-            <a:avLst/>
-          </a:prstGeom>
-        </p:spPr>
-      </p:pic>
     </p:spTree>
     <p:extLst>
       <p:ext uri="{BB962C8B-B14F-4D97-AF65-F5344CB8AC3E}">
